--- a/AUTONOMOUS PARTNER - KAIZEN.pptx
+++ b/AUTONOMOUS PARTNER - KAIZEN.pptx
@@ -1,25 +1,25 @@
 
 <file path=ppt/presentation.xml><?xml version="1.0" encoding="utf-8"?>
-<p:presentation xmlns:a="http://schemas.openxmlformats.org/drawingml/2006/main" xmlns:r="http://schemas.openxmlformats.org/officeDocument/2006/relationships" xmlns:p="http://schemas.openxmlformats.org/presentationml/2006/main" saveSubsetFonts="1">
+<p:presentation xmlns:a="http://schemas.openxmlformats.org/drawingml/2006/main" xmlns:r="http://schemas.openxmlformats.org/officeDocument/2006/relationships" xmlns:p="http://schemas.openxmlformats.org/presentationml/2006/main">
   <p:sldMasterIdLst>
     <p:sldMasterId id="2147483648" r:id="rId1"/>
   </p:sldMasterIdLst>
   <p:notesMasterIdLst>
-    <p:notesMasterId r:id="rId14"/>
+    <p:notesMasterId r:id="rId4"/>
   </p:notesMasterIdLst>
   <p:sldIdLst>
-    <p:sldId id="257" r:id="rId2"/>
-    <p:sldId id="258" r:id="rId3"/>
-    <p:sldId id="259" r:id="rId4"/>
-    <p:sldId id="260" r:id="rId5"/>
-    <p:sldId id="261" r:id="rId6"/>
-    <p:sldId id="262" r:id="rId7"/>
-    <p:sldId id="263" r:id="rId8"/>
-    <p:sldId id="264" r:id="rId9"/>
-    <p:sldId id="265" r:id="rId10"/>
-    <p:sldId id="266" r:id="rId11"/>
-    <p:sldId id="271" r:id="rId12"/>
-    <p:sldId id="270" r:id="rId13"/>
+    <p:sldId id="257" r:id="rId3"/>
+    <p:sldId id="258" r:id="rId5"/>
+    <p:sldId id="259" r:id="rId6"/>
+    <p:sldId id="260" r:id="rId7"/>
+    <p:sldId id="261" r:id="rId8"/>
+    <p:sldId id="262" r:id="rId9"/>
+    <p:sldId id="263" r:id="rId10"/>
+    <p:sldId id="264" r:id="rId11"/>
+    <p:sldId id="265" r:id="rId12"/>
+    <p:sldId id="266" r:id="rId13"/>
+    <p:sldId id="271" r:id="rId14"/>
+    <p:sldId id="270" r:id="rId15"/>
   </p:sldIdLst>
   <p:sldSz cx="12192000" cy="6858000"/>
   <p:notesSz cx="6858000" cy="9144000"/>
@@ -118,23 +118,7 @@
       </a:defRPr>
     </a:lvl9pPr>
   </p:defaultTextStyle>
-  <p:extLst>
-    <p:ext uri="{EFAFB233-063F-42B5-8137-9DF3F51BA10A}">
-      <p15:sldGuideLst xmlns:p15="http://schemas.microsoft.com/office/powerpoint/2012/main"/>
-    </p:ext>
-  </p:extLst>
 </p:presentation>
-</file>
-
-<file path=ppt/revisionInfo.xml><?xml version="1.0" encoding="utf-8"?>
-<p1510:revInfo xmlns:a="http://schemas.openxmlformats.org/drawingml/2006/main" xmlns:r="http://schemas.openxmlformats.org/officeDocument/2006/relationships" xmlns:p1510="http://schemas.microsoft.com/office/powerpoint/2015/10/main">
-  <p1510:revLst>
-    <p1510:client id="{00000000-0000-0000-0000-000000000000}" v="3" dt="2026-09-24T15:51:50.904"/>
-    <p1510:client id="{5486EAAB-EF28-7507-9E99-ECF627E95E54}" v="49" dt="2026-09-24T17:06:56.353"/>
-    <p1510:client id="{902C23F3-199F-49DB-89F5-49F0C39D4CB4}" v="13" dt="2026-09-25T08:04:46.206"/>
-    <p1510:client id="{AD32AB76-2B49-0539-65FB-A5CE63D39AC6}" v="12" dt="2026-09-24T17:02:34.868"/>
-  </p1510:revLst>
-</p1510:revInfo>
 </file>
 
 <file path=ppt/notesMasters/notesMaster1.xml><?xml version="1.0" encoding="utf-8"?>
@@ -219,7 +203,6 @@
           <a:p>
             <a:fld id="{72CE9A8C-3F50-49F8-A835-316C22A1110D}" type="datetimeFigureOut">
               <a:rPr lang="en-IN" smtClean="0"/>
-              <a:t>30-09-2026</a:t>
             </a:fld>
             <a:endParaRPr lang="en-IN"/>
           </a:p>
@@ -286,6 +269,7 @@
               <a:rPr lang="en-US"/>
               <a:t>Click to edit Master text styles</a:t>
             </a:r>
+            <a:endParaRPr lang="en-US"/>
           </a:p>
           <a:p>
             <a:pPr lvl="1"/>
@@ -293,6 +277,7 @@
               <a:rPr lang="en-US"/>
               <a:t>Second level</a:t>
             </a:r>
+            <a:endParaRPr lang="en-US"/>
           </a:p>
           <a:p>
             <a:pPr lvl="2"/>
@@ -300,6 +285,7 @@
               <a:rPr lang="en-US"/>
               <a:t>Third level</a:t>
             </a:r>
+            <a:endParaRPr lang="en-US"/>
           </a:p>
           <a:p>
             <a:pPr lvl="3"/>
@@ -307,6 +293,7 @@
               <a:rPr lang="en-US"/>
               <a:t>Fourth level</a:t>
             </a:r>
+            <a:endParaRPr lang="en-US"/>
           </a:p>
           <a:p>
             <a:pPr lvl="4"/>
@@ -378,18 +365,12 @@
           <a:p>
             <a:fld id="{EF3343F9-2D09-4642-A3BD-5BF627A067F3}" type="slidenum">
               <a:rPr lang="en-IN" smtClean="0"/>
-              <a:t>‹#›</a:t>
             </a:fld>
             <a:endParaRPr lang="en-IN"/>
           </a:p>
         </p:txBody>
       </p:sp>
     </p:spTree>
-    <p:extLst>
-      <p:ext uri="{BB962C8B-B14F-4D97-AF65-F5344CB8AC3E}">
-        <p14:creationId xmlns:p14="http://schemas.microsoft.com/office/powerpoint/2010/main" val="569163167"/>
-      </p:ext>
-    </p:extLst>
   </p:cSld>
   <p:clrMap bg1="lt1" tx1="dk1" bg2="lt2" tx2="dk2" accent1="accent1" accent2="accent2" accent3="accent3" accent4="accent4" accent5="accent5" accent6="accent6" hlink="hlink" folHlink="folHlink"/>
   <p:notesStyle>
@@ -535,6 +516,7 @@
               <a:rPr lang="en-US"/>
               <a:t>Opening slide for the 3rd edition of the PRISM Generative AI Hackathon. Replace the SAMSUNG PRISM pill with the official PRISM logo image if you have the asset. Confirm the academic year label (2026-27) before circulating.</a:t>
             </a:r>
+            <a:endParaRPr lang="en-US"/>
           </a:p>
         </p:txBody>
       </p:sp>
@@ -555,18 +537,12 @@
           <a:p>
             <a:fld id="{F7021451-1387-4CA6-816F-3879F97B5CBC}" type="slidenum">
               <a:rPr lang="en-US"/>
-              <a:t>1</a:t>
             </a:fld>
             <a:endParaRPr lang="en-US"/>
           </a:p>
         </p:txBody>
       </p:sp>
     </p:spTree>
-    <p:extLst>
-      <p:ext uri="{BB962C8B-B14F-4D97-AF65-F5344CB8AC3E}">
-        <p14:creationId xmlns:p14="http://schemas.microsoft.com/office/powerpoint/2010/main" val="1024086991"/>
-      </p:ext>
-    </p:extLst>
   </p:cSld>
   <p:clrMapOvr>
     <a:masterClrMapping/>
@@ -622,6 +598,7 @@
               <a:rPr lang="en-US"/>
               <a:t>Closing slide. Add the Google Form URL and a contact email before sharing. Edition 2 organising team for reference: Language AI - Sourabh Tiwari, Gaurav, Sanjeeth Pothireddy, Gorang Maniar; PRISM - Binny Lakra, Prakhar Chandrakar, Vishu Kumar; Kick-off and mentors - Giridhar Jakki, Deepraj Prabhakar Patkar (Language AI), Srimanu Prasad Nagaraju, Ashish Kumar (Tech Strategy).</a:t>
             </a:r>
+            <a:endParaRPr lang="en-US"/>
           </a:p>
         </p:txBody>
       </p:sp>
@@ -642,18 +619,12 @@
           <a:p>
             <a:fld id="{F7021451-1387-4CA6-816F-3879F97B5CBC}" type="slidenum">
               <a:rPr lang="en-US"/>
-              <a:t>12</a:t>
             </a:fld>
             <a:endParaRPr lang="en-US"/>
           </a:p>
         </p:txBody>
       </p:sp>
     </p:spTree>
-    <p:extLst>
-      <p:ext uri="{BB962C8B-B14F-4D97-AF65-F5344CB8AC3E}">
-        <p14:creationId xmlns:p14="http://schemas.microsoft.com/office/powerpoint/2010/main" val="1024086991"/>
-      </p:ext>
-    </p:extLst>
   </p:cSld>
   <p:clrMapOvr>
     <a:masterClrMapping/>
@@ -680,13 +651,7 @@
       </p:grpSpPr>
       <p:sp>
         <p:nvSpPr>
-          <p:cNvPr id="2" name="Title 1">
-            <a:extLst>
-              <a:ext uri="{FF2B5EF4-FFF2-40B4-BE49-F238E27FC236}">
-                <a16:creationId xmlns:a16="http://schemas.microsoft.com/office/drawing/2014/main" id="{7A2CFE64-7CE6-4299-B8FE-939866A3EB6B}"/>
-              </a:ext>
-            </a:extLst>
-          </p:cNvPr>
+          <p:cNvPr id="2" name="Title 1"/>
           <p:cNvSpPr>
             <a:spLocks noGrp="1"/>
           </p:cNvSpPr>
@@ -718,13 +683,7 @@
       </p:sp>
       <p:sp>
         <p:nvSpPr>
-          <p:cNvPr id="3" name="Subtitle 2">
-            <a:extLst>
-              <a:ext uri="{FF2B5EF4-FFF2-40B4-BE49-F238E27FC236}">
-                <a16:creationId xmlns:a16="http://schemas.microsoft.com/office/drawing/2014/main" id="{09E4360C-492F-4E2E-B967-599B2BD31D70}"/>
-              </a:ext>
-            </a:extLst>
-          </p:cNvPr>
+          <p:cNvPr id="3" name="Subtitle 2"/>
           <p:cNvSpPr>
             <a:spLocks noGrp="1"/>
           </p:cNvSpPr>
@@ -789,13 +748,7 @@
       </p:sp>
       <p:sp>
         <p:nvSpPr>
-          <p:cNvPr id="4" name="Date Placeholder 3">
-            <a:extLst>
-              <a:ext uri="{FF2B5EF4-FFF2-40B4-BE49-F238E27FC236}">
-                <a16:creationId xmlns:a16="http://schemas.microsoft.com/office/drawing/2014/main" id="{56870CDB-78C3-4602-B35C-A826CBF20916}"/>
-              </a:ext>
-            </a:extLst>
-          </p:cNvPr>
+          <p:cNvPr id="4" name="Date Placeholder 3"/>
           <p:cNvSpPr>
             <a:spLocks noGrp="1"/>
           </p:cNvSpPr>
@@ -810,7 +763,6 @@
           <a:p>
             <a:fld id="{2AF27EEE-1B67-445E-AA5D-351EC91D1DEB}" type="datetimeFigureOut">
               <a:rPr lang="en-IN" smtClean="0"/>
-              <a:t>30-09-2026</a:t>
             </a:fld>
             <a:endParaRPr lang="en-IN"/>
           </a:p>
@@ -818,13 +770,7 @@
       </p:sp>
       <p:sp>
         <p:nvSpPr>
-          <p:cNvPr id="5" name="Footer Placeholder 4">
-            <a:extLst>
-              <a:ext uri="{FF2B5EF4-FFF2-40B4-BE49-F238E27FC236}">
-                <a16:creationId xmlns:a16="http://schemas.microsoft.com/office/drawing/2014/main" id="{F585EF81-E96A-4C8D-A4F0-A9DF05C49CC6}"/>
-              </a:ext>
-            </a:extLst>
-          </p:cNvPr>
+          <p:cNvPr id="5" name="Footer Placeholder 4"/>
           <p:cNvSpPr>
             <a:spLocks noGrp="1"/>
           </p:cNvSpPr>
@@ -843,13 +789,7 @@
       </p:sp>
       <p:sp>
         <p:nvSpPr>
-          <p:cNvPr id="6" name="Slide Number Placeholder 5">
-            <a:extLst>
-              <a:ext uri="{FF2B5EF4-FFF2-40B4-BE49-F238E27FC236}">
-                <a16:creationId xmlns:a16="http://schemas.microsoft.com/office/drawing/2014/main" id="{09FA2448-68BE-42AE-8001-48ECE62DC431}"/>
-              </a:ext>
-            </a:extLst>
-          </p:cNvPr>
+          <p:cNvPr id="6" name="Slide Number Placeholder 5"/>
           <p:cNvSpPr>
             <a:spLocks noGrp="1"/>
           </p:cNvSpPr>
@@ -864,18 +804,12 @@
           <a:p>
             <a:fld id="{BF5B04A4-2082-4D7E-8466-9BA22C990A78}" type="slidenum">
               <a:rPr lang="en-IN" smtClean="0"/>
-              <a:t>‹#›</a:t>
             </a:fld>
             <a:endParaRPr lang="en-IN"/>
           </a:p>
         </p:txBody>
       </p:sp>
     </p:spTree>
-    <p:extLst>
-      <p:ext uri="{BB962C8B-B14F-4D97-AF65-F5344CB8AC3E}">
-        <p14:creationId xmlns:p14="http://schemas.microsoft.com/office/powerpoint/2010/main" val="3551206680"/>
-      </p:ext>
-    </p:extLst>
   </p:cSld>
   <p:clrMapOvr>
     <a:masterClrMapping/>
@@ -902,13 +836,7 @@
       </p:grpSpPr>
       <p:sp>
         <p:nvSpPr>
-          <p:cNvPr id="2" name="Title 1">
-            <a:extLst>
-              <a:ext uri="{FF2B5EF4-FFF2-40B4-BE49-F238E27FC236}">
-                <a16:creationId xmlns:a16="http://schemas.microsoft.com/office/drawing/2014/main" id="{625A63EB-C66D-4D2D-9928-25D57CFDCDD2}"/>
-              </a:ext>
-            </a:extLst>
-          </p:cNvPr>
+          <p:cNvPr id="2" name="Title 1"/>
           <p:cNvSpPr>
             <a:spLocks noGrp="1"/>
           </p:cNvSpPr>
@@ -931,13 +859,7 @@
       </p:sp>
       <p:sp>
         <p:nvSpPr>
-          <p:cNvPr id="3" name="Vertical Text Placeholder 2">
-            <a:extLst>
-              <a:ext uri="{FF2B5EF4-FFF2-40B4-BE49-F238E27FC236}">
-                <a16:creationId xmlns:a16="http://schemas.microsoft.com/office/drawing/2014/main" id="{3D91A17B-5319-4265-82A2-5D286CFAFD86}"/>
-              </a:ext>
-            </a:extLst>
-          </p:cNvPr>
+          <p:cNvPr id="3" name="Vertical Text Placeholder 2"/>
           <p:cNvSpPr>
             <a:spLocks noGrp="1"/>
           </p:cNvSpPr>
@@ -955,6 +877,7 @@
               <a:rPr lang="en-US"/>
               <a:t>Click to edit Master text styles</a:t>
             </a:r>
+            <a:endParaRPr lang="en-US"/>
           </a:p>
           <a:p>
             <a:pPr lvl="1"/>
@@ -962,6 +885,7 @@
               <a:rPr lang="en-US"/>
               <a:t>Second level</a:t>
             </a:r>
+            <a:endParaRPr lang="en-US"/>
           </a:p>
           <a:p>
             <a:pPr lvl="2"/>
@@ -969,6 +893,7 @@
               <a:rPr lang="en-US"/>
               <a:t>Third level</a:t>
             </a:r>
+            <a:endParaRPr lang="en-US"/>
           </a:p>
           <a:p>
             <a:pPr lvl="3"/>
@@ -976,6 +901,7 @@
               <a:rPr lang="en-US"/>
               <a:t>Fourth level</a:t>
             </a:r>
+            <a:endParaRPr lang="en-US"/>
           </a:p>
           <a:p>
             <a:pPr lvl="4"/>
@@ -989,13 +915,7 @@
       </p:sp>
       <p:sp>
         <p:nvSpPr>
-          <p:cNvPr id="4" name="Date Placeholder 3">
-            <a:extLst>
-              <a:ext uri="{FF2B5EF4-FFF2-40B4-BE49-F238E27FC236}">
-                <a16:creationId xmlns:a16="http://schemas.microsoft.com/office/drawing/2014/main" id="{DE972F85-7902-4426-947E-3509F7A06CB1}"/>
-              </a:ext>
-            </a:extLst>
-          </p:cNvPr>
+          <p:cNvPr id="4" name="Date Placeholder 3"/>
           <p:cNvSpPr>
             <a:spLocks noGrp="1"/>
           </p:cNvSpPr>
@@ -1010,7 +930,6 @@
           <a:p>
             <a:fld id="{2AF27EEE-1B67-445E-AA5D-351EC91D1DEB}" type="datetimeFigureOut">
               <a:rPr lang="en-IN" smtClean="0"/>
-              <a:t>30-09-2026</a:t>
             </a:fld>
             <a:endParaRPr lang="en-IN"/>
           </a:p>
@@ -1018,13 +937,7 @@
       </p:sp>
       <p:sp>
         <p:nvSpPr>
-          <p:cNvPr id="5" name="Footer Placeholder 4">
-            <a:extLst>
-              <a:ext uri="{FF2B5EF4-FFF2-40B4-BE49-F238E27FC236}">
-                <a16:creationId xmlns:a16="http://schemas.microsoft.com/office/drawing/2014/main" id="{FD08658F-7DA3-40F3-B6FA-CF740F858EB2}"/>
-              </a:ext>
-            </a:extLst>
-          </p:cNvPr>
+          <p:cNvPr id="5" name="Footer Placeholder 4"/>
           <p:cNvSpPr>
             <a:spLocks noGrp="1"/>
           </p:cNvSpPr>
@@ -1043,13 +956,7 @@
       </p:sp>
       <p:sp>
         <p:nvSpPr>
-          <p:cNvPr id="6" name="Slide Number Placeholder 5">
-            <a:extLst>
-              <a:ext uri="{FF2B5EF4-FFF2-40B4-BE49-F238E27FC236}">
-                <a16:creationId xmlns:a16="http://schemas.microsoft.com/office/drawing/2014/main" id="{DF6B0DE9-130B-4DA8-9A0C-06A295C9D82C}"/>
-              </a:ext>
-            </a:extLst>
-          </p:cNvPr>
+          <p:cNvPr id="6" name="Slide Number Placeholder 5"/>
           <p:cNvSpPr>
             <a:spLocks noGrp="1"/>
           </p:cNvSpPr>
@@ -1064,18 +971,12 @@
           <a:p>
             <a:fld id="{BF5B04A4-2082-4D7E-8466-9BA22C990A78}" type="slidenum">
               <a:rPr lang="en-IN" smtClean="0"/>
-              <a:t>‹#›</a:t>
             </a:fld>
             <a:endParaRPr lang="en-IN"/>
           </a:p>
         </p:txBody>
       </p:sp>
     </p:spTree>
-    <p:extLst>
-      <p:ext uri="{BB962C8B-B14F-4D97-AF65-F5344CB8AC3E}">
-        <p14:creationId xmlns:p14="http://schemas.microsoft.com/office/powerpoint/2010/main" val="3481950546"/>
-      </p:ext>
-    </p:extLst>
   </p:cSld>
   <p:clrMapOvr>
     <a:masterClrMapping/>
@@ -1102,13 +1003,7 @@
       </p:grpSpPr>
       <p:sp>
         <p:nvSpPr>
-          <p:cNvPr id="2" name="Vertical Title 1">
-            <a:extLst>
-              <a:ext uri="{FF2B5EF4-FFF2-40B4-BE49-F238E27FC236}">
-                <a16:creationId xmlns:a16="http://schemas.microsoft.com/office/drawing/2014/main" id="{954594E2-CBC8-4A0C-A110-E3B5A301CF62}"/>
-              </a:ext>
-            </a:extLst>
-          </p:cNvPr>
+          <p:cNvPr id="2" name="Vertical Title 1"/>
           <p:cNvSpPr>
             <a:spLocks noGrp="1"/>
           </p:cNvSpPr>
@@ -1136,13 +1031,7 @@
       </p:sp>
       <p:sp>
         <p:nvSpPr>
-          <p:cNvPr id="3" name="Vertical Text Placeholder 2">
-            <a:extLst>
-              <a:ext uri="{FF2B5EF4-FFF2-40B4-BE49-F238E27FC236}">
-                <a16:creationId xmlns:a16="http://schemas.microsoft.com/office/drawing/2014/main" id="{8CFBD2EA-CB7C-4CAB-855D-57F791910445}"/>
-              </a:ext>
-            </a:extLst>
-          </p:cNvPr>
+          <p:cNvPr id="3" name="Vertical Text Placeholder 2"/>
           <p:cNvSpPr>
             <a:spLocks noGrp="1"/>
           </p:cNvSpPr>
@@ -1165,6 +1054,7 @@
               <a:rPr lang="en-US"/>
               <a:t>Click to edit Master text styles</a:t>
             </a:r>
+            <a:endParaRPr lang="en-US"/>
           </a:p>
           <a:p>
             <a:pPr lvl="1"/>
@@ -1172,6 +1062,7 @@
               <a:rPr lang="en-US"/>
               <a:t>Second level</a:t>
             </a:r>
+            <a:endParaRPr lang="en-US"/>
           </a:p>
           <a:p>
             <a:pPr lvl="2"/>
@@ -1179,6 +1070,7 @@
               <a:rPr lang="en-US"/>
               <a:t>Third level</a:t>
             </a:r>
+            <a:endParaRPr lang="en-US"/>
           </a:p>
           <a:p>
             <a:pPr lvl="3"/>
@@ -1186,6 +1078,7 @@
               <a:rPr lang="en-US"/>
               <a:t>Fourth level</a:t>
             </a:r>
+            <a:endParaRPr lang="en-US"/>
           </a:p>
           <a:p>
             <a:pPr lvl="4"/>
@@ -1199,13 +1092,7 @@
       </p:sp>
       <p:sp>
         <p:nvSpPr>
-          <p:cNvPr id="4" name="Date Placeholder 3">
-            <a:extLst>
-              <a:ext uri="{FF2B5EF4-FFF2-40B4-BE49-F238E27FC236}">
-                <a16:creationId xmlns:a16="http://schemas.microsoft.com/office/drawing/2014/main" id="{AD2348B0-3CBB-41FA-A8EC-5DFC833D7ECD}"/>
-              </a:ext>
-            </a:extLst>
-          </p:cNvPr>
+          <p:cNvPr id="4" name="Date Placeholder 3"/>
           <p:cNvSpPr>
             <a:spLocks noGrp="1"/>
           </p:cNvSpPr>
@@ -1220,7 +1107,6 @@
           <a:p>
             <a:fld id="{2AF27EEE-1B67-445E-AA5D-351EC91D1DEB}" type="datetimeFigureOut">
               <a:rPr lang="en-IN" smtClean="0"/>
-              <a:t>30-09-2026</a:t>
             </a:fld>
             <a:endParaRPr lang="en-IN"/>
           </a:p>
@@ -1228,13 +1114,7 @@
       </p:sp>
       <p:sp>
         <p:nvSpPr>
-          <p:cNvPr id="5" name="Footer Placeholder 4">
-            <a:extLst>
-              <a:ext uri="{FF2B5EF4-FFF2-40B4-BE49-F238E27FC236}">
-                <a16:creationId xmlns:a16="http://schemas.microsoft.com/office/drawing/2014/main" id="{1A7E08DA-D399-4DC8-89B1-C4EBC64DC989}"/>
-              </a:ext>
-            </a:extLst>
-          </p:cNvPr>
+          <p:cNvPr id="5" name="Footer Placeholder 4"/>
           <p:cNvSpPr>
             <a:spLocks noGrp="1"/>
           </p:cNvSpPr>
@@ -1253,13 +1133,7 @@
       </p:sp>
       <p:sp>
         <p:nvSpPr>
-          <p:cNvPr id="6" name="Slide Number Placeholder 5">
-            <a:extLst>
-              <a:ext uri="{FF2B5EF4-FFF2-40B4-BE49-F238E27FC236}">
-                <a16:creationId xmlns:a16="http://schemas.microsoft.com/office/drawing/2014/main" id="{DFDA6177-D647-4C5F-BA43-C02A1390F473}"/>
-              </a:ext>
-            </a:extLst>
-          </p:cNvPr>
+          <p:cNvPr id="6" name="Slide Number Placeholder 5"/>
           <p:cNvSpPr>
             <a:spLocks noGrp="1"/>
           </p:cNvSpPr>
@@ -1274,18 +1148,12 @@
           <a:p>
             <a:fld id="{BF5B04A4-2082-4D7E-8466-9BA22C990A78}" type="slidenum">
               <a:rPr lang="en-IN" smtClean="0"/>
-              <a:t>‹#›</a:t>
             </a:fld>
             <a:endParaRPr lang="en-IN"/>
           </a:p>
         </p:txBody>
       </p:sp>
     </p:spTree>
-    <p:extLst>
-      <p:ext uri="{BB962C8B-B14F-4D97-AF65-F5344CB8AC3E}">
-        <p14:creationId xmlns:p14="http://schemas.microsoft.com/office/powerpoint/2010/main" val="814687059"/>
-      </p:ext>
-    </p:extLst>
   </p:cSld>
   <p:clrMapOvr>
     <a:masterClrMapping/>
@@ -1316,11 +1184,6 @@
         </a:xfrm>
       </p:grpSpPr>
     </p:spTree>
-    <p:extLst>
-      <p:ext uri="{BB962C8B-B14F-4D97-AF65-F5344CB8AC3E}">
-        <p14:creationId xmlns:p14="http://schemas.microsoft.com/office/powerpoint/2010/main" val="224634502"/>
-      </p:ext>
-    </p:extLst>
   </p:cSld>
   <p:clrMapOvr>
     <a:masterClrMapping/>
@@ -1347,13 +1210,7 @@
       </p:grpSpPr>
       <p:sp>
         <p:nvSpPr>
-          <p:cNvPr id="2" name="Title 1">
-            <a:extLst>
-              <a:ext uri="{FF2B5EF4-FFF2-40B4-BE49-F238E27FC236}">
-                <a16:creationId xmlns:a16="http://schemas.microsoft.com/office/drawing/2014/main" id="{AD2C5E08-CE8A-45BE-8C3E-C04A49CC8A66}"/>
-              </a:ext>
-            </a:extLst>
-          </p:cNvPr>
+          <p:cNvPr id="2" name="Title 1"/>
           <p:cNvSpPr>
             <a:spLocks noGrp="1"/>
           </p:cNvSpPr>
@@ -1376,13 +1233,7 @@
       </p:sp>
       <p:sp>
         <p:nvSpPr>
-          <p:cNvPr id="3" name="Content Placeholder 2">
-            <a:extLst>
-              <a:ext uri="{FF2B5EF4-FFF2-40B4-BE49-F238E27FC236}">
-                <a16:creationId xmlns:a16="http://schemas.microsoft.com/office/drawing/2014/main" id="{65FCCB0C-95AB-4F7A-955D-2DC18750BFD4}"/>
-              </a:ext>
-            </a:extLst>
-          </p:cNvPr>
+          <p:cNvPr id="3" name="Content Placeholder 2"/>
           <p:cNvSpPr>
             <a:spLocks noGrp="1"/>
           </p:cNvSpPr>
@@ -1400,6 +1251,7 @@
               <a:rPr lang="en-US"/>
               <a:t>Click to edit Master text styles</a:t>
             </a:r>
+            <a:endParaRPr lang="en-US"/>
           </a:p>
           <a:p>
             <a:pPr lvl="1"/>
@@ -1407,6 +1259,7 @@
               <a:rPr lang="en-US"/>
               <a:t>Second level</a:t>
             </a:r>
+            <a:endParaRPr lang="en-US"/>
           </a:p>
           <a:p>
             <a:pPr lvl="2"/>
@@ -1414,6 +1267,7 @@
               <a:rPr lang="en-US"/>
               <a:t>Third level</a:t>
             </a:r>
+            <a:endParaRPr lang="en-US"/>
           </a:p>
           <a:p>
             <a:pPr lvl="3"/>
@@ -1421,6 +1275,7 @@
               <a:rPr lang="en-US"/>
               <a:t>Fourth level</a:t>
             </a:r>
+            <a:endParaRPr lang="en-US"/>
           </a:p>
           <a:p>
             <a:pPr lvl="4"/>
@@ -1434,13 +1289,7 @@
       </p:sp>
       <p:sp>
         <p:nvSpPr>
-          <p:cNvPr id="4" name="Date Placeholder 3">
-            <a:extLst>
-              <a:ext uri="{FF2B5EF4-FFF2-40B4-BE49-F238E27FC236}">
-                <a16:creationId xmlns:a16="http://schemas.microsoft.com/office/drawing/2014/main" id="{FE96DA85-2FDE-4136-B9F6-AF0965475E5A}"/>
-              </a:ext>
-            </a:extLst>
-          </p:cNvPr>
+          <p:cNvPr id="4" name="Date Placeholder 3"/>
           <p:cNvSpPr>
             <a:spLocks noGrp="1"/>
           </p:cNvSpPr>
@@ -1455,7 +1304,6 @@
           <a:p>
             <a:fld id="{2AF27EEE-1B67-445E-AA5D-351EC91D1DEB}" type="datetimeFigureOut">
               <a:rPr lang="en-IN" smtClean="0"/>
-              <a:t>30-09-2026</a:t>
             </a:fld>
             <a:endParaRPr lang="en-IN"/>
           </a:p>
@@ -1463,13 +1311,7 @@
       </p:sp>
       <p:sp>
         <p:nvSpPr>
-          <p:cNvPr id="5" name="Footer Placeholder 4">
-            <a:extLst>
-              <a:ext uri="{FF2B5EF4-FFF2-40B4-BE49-F238E27FC236}">
-                <a16:creationId xmlns:a16="http://schemas.microsoft.com/office/drawing/2014/main" id="{299B0367-ACE7-48B9-82C8-A7BFD1F98E99}"/>
-              </a:ext>
-            </a:extLst>
-          </p:cNvPr>
+          <p:cNvPr id="5" name="Footer Placeholder 4"/>
           <p:cNvSpPr>
             <a:spLocks noGrp="1"/>
           </p:cNvSpPr>
@@ -1488,13 +1330,7 @@
       </p:sp>
       <p:sp>
         <p:nvSpPr>
-          <p:cNvPr id="6" name="Slide Number Placeholder 5">
-            <a:extLst>
-              <a:ext uri="{FF2B5EF4-FFF2-40B4-BE49-F238E27FC236}">
-                <a16:creationId xmlns:a16="http://schemas.microsoft.com/office/drawing/2014/main" id="{CC09A210-6017-4F71-9E78-B2C329B4A7E3}"/>
-              </a:ext>
-            </a:extLst>
-          </p:cNvPr>
+          <p:cNvPr id="6" name="Slide Number Placeholder 5"/>
           <p:cNvSpPr>
             <a:spLocks noGrp="1"/>
           </p:cNvSpPr>
@@ -1509,18 +1345,12 @@
           <a:p>
             <a:fld id="{BF5B04A4-2082-4D7E-8466-9BA22C990A78}" type="slidenum">
               <a:rPr lang="en-IN" smtClean="0"/>
-              <a:t>‹#›</a:t>
             </a:fld>
             <a:endParaRPr lang="en-IN"/>
           </a:p>
         </p:txBody>
       </p:sp>
     </p:spTree>
-    <p:extLst>
-      <p:ext uri="{BB962C8B-B14F-4D97-AF65-F5344CB8AC3E}">
-        <p14:creationId xmlns:p14="http://schemas.microsoft.com/office/powerpoint/2010/main" val="3158124763"/>
-      </p:ext>
-    </p:extLst>
   </p:cSld>
   <p:clrMapOvr>
     <a:masterClrMapping/>
@@ -1547,13 +1377,7 @@
       </p:grpSpPr>
       <p:sp>
         <p:nvSpPr>
-          <p:cNvPr id="2" name="Title 1">
-            <a:extLst>
-              <a:ext uri="{FF2B5EF4-FFF2-40B4-BE49-F238E27FC236}">
-                <a16:creationId xmlns:a16="http://schemas.microsoft.com/office/drawing/2014/main" id="{D1CAE6C5-6752-4963-B842-280808B201DB}"/>
-              </a:ext>
-            </a:extLst>
-          </p:cNvPr>
+          <p:cNvPr id="2" name="Title 1"/>
           <p:cNvSpPr>
             <a:spLocks noGrp="1"/>
           </p:cNvSpPr>
@@ -1585,13 +1409,7 @@
       </p:sp>
       <p:sp>
         <p:nvSpPr>
-          <p:cNvPr id="3" name="Text Placeholder 2">
-            <a:extLst>
-              <a:ext uri="{FF2B5EF4-FFF2-40B4-BE49-F238E27FC236}">
-                <a16:creationId xmlns:a16="http://schemas.microsoft.com/office/drawing/2014/main" id="{2FEA6DFC-697D-4605-86C0-8572E022BEC1}"/>
-              </a:ext>
-            </a:extLst>
-          </p:cNvPr>
+          <p:cNvPr id="3" name="Text Placeholder 2"/>
           <p:cNvSpPr>
             <a:spLocks noGrp="1"/>
           </p:cNvSpPr>
@@ -1705,18 +1523,13 @@
               <a:rPr lang="en-US"/>
               <a:t>Click to edit Master text styles</a:t>
             </a:r>
-          </a:p>
-        </p:txBody>
-      </p:sp>
-      <p:sp>
-        <p:nvSpPr>
-          <p:cNvPr id="4" name="Date Placeholder 3">
-            <a:extLst>
-              <a:ext uri="{FF2B5EF4-FFF2-40B4-BE49-F238E27FC236}">
-                <a16:creationId xmlns:a16="http://schemas.microsoft.com/office/drawing/2014/main" id="{CA341469-A18C-498E-BACC-28BCBFE904BB}"/>
-              </a:ext>
-            </a:extLst>
-          </p:cNvPr>
+            <a:endParaRPr lang="en-US"/>
+          </a:p>
+        </p:txBody>
+      </p:sp>
+      <p:sp>
+        <p:nvSpPr>
+          <p:cNvPr id="4" name="Date Placeholder 3"/>
           <p:cNvSpPr>
             <a:spLocks noGrp="1"/>
           </p:cNvSpPr>
@@ -1731,7 +1544,6 @@
           <a:p>
             <a:fld id="{2AF27EEE-1B67-445E-AA5D-351EC91D1DEB}" type="datetimeFigureOut">
               <a:rPr lang="en-IN" smtClean="0"/>
-              <a:t>30-09-2026</a:t>
             </a:fld>
             <a:endParaRPr lang="en-IN"/>
           </a:p>
@@ -1739,13 +1551,7 @@
       </p:sp>
       <p:sp>
         <p:nvSpPr>
-          <p:cNvPr id="5" name="Footer Placeholder 4">
-            <a:extLst>
-              <a:ext uri="{FF2B5EF4-FFF2-40B4-BE49-F238E27FC236}">
-                <a16:creationId xmlns:a16="http://schemas.microsoft.com/office/drawing/2014/main" id="{FAED5D3B-1983-426F-A1AE-7470C43BB0E4}"/>
-              </a:ext>
-            </a:extLst>
-          </p:cNvPr>
+          <p:cNvPr id="5" name="Footer Placeholder 4"/>
           <p:cNvSpPr>
             <a:spLocks noGrp="1"/>
           </p:cNvSpPr>
@@ -1764,13 +1570,7 @@
       </p:sp>
       <p:sp>
         <p:nvSpPr>
-          <p:cNvPr id="6" name="Slide Number Placeholder 5">
-            <a:extLst>
-              <a:ext uri="{FF2B5EF4-FFF2-40B4-BE49-F238E27FC236}">
-                <a16:creationId xmlns:a16="http://schemas.microsoft.com/office/drawing/2014/main" id="{7135ABB1-45F2-4FEA-BB5A-3B053892DBC7}"/>
-              </a:ext>
-            </a:extLst>
-          </p:cNvPr>
+          <p:cNvPr id="6" name="Slide Number Placeholder 5"/>
           <p:cNvSpPr>
             <a:spLocks noGrp="1"/>
           </p:cNvSpPr>
@@ -1785,18 +1585,12 @@
           <a:p>
             <a:fld id="{BF5B04A4-2082-4D7E-8466-9BA22C990A78}" type="slidenum">
               <a:rPr lang="en-IN" smtClean="0"/>
-              <a:t>‹#›</a:t>
             </a:fld>
             <a:endParaRPr lang="en-IN"/>
           </a:p>
         </p:txBody>
       </p:sp>
     </p:spTree>
-    <p:extLst>
-      <p:ext uri="{BB962C8B-B14F-4D97-AF65-F5344CB8AC3E}">
-        <p14:creationId xmlns:p14="http://schemas.microsoft.com/office/powerpoint/2010/main" val="1026530123"/>
-      </p:ext>
-    </p:extLst>
   </p:cSld>
   <p:clrMapOvr>
     <a:masterClrMapping/>
@@ -1823,13 +1617,7 @@
       </p:grpSpPr>
       <p:sp>
         <p:nvSpPr>
-          <p:cNvPr id="2" name="Title 1">
-            <a:extLst>
-              <a:ext uri="{FF2B5EF4-FFF2-40B4-BE49-F238E27FC236}">
-                <a16:creationId xmlns:a16="http://schemas.microsoft.com/office/drawing/2014/main" id="{D2A3F4AE-F142-401B-A5D1-4A52FF92CA0A}"/>
-              </a:ext>
-            </a:extLst>
-          </p:cNvPr>
+          <p:cNvPr id="2" name="Title 1"/>
           <p:cNvSpPr>
             <a:spLocks noGrp="1"/>
           </p:cNvSpPr>
@@ -1852,13 +1640,7 @@
       </p:sp>
       <p:sp>
         <p:nvSpPr>
-          <p:cNvPr id="3" name="Content Placeholder 2">
-            <a:extLst>
-              <a:ext uri="{FF2B5EF4-FFF2-40B4-BE49-F238E27FC236}">
-                <a16:creationId xmlns:a16="http://schemas.microsoft.com/office/drawing/2014/main" id="{BC7C9BD1-2876-4C52-83CF-1CBA9D931B3C}"/>
-              </a:ext>
-            </a:extLst>
-          </p:cNvPr>
+          <p:cNvPr id="3" name="Content Placeholder 2"/>
           <p:cNvSpPr>
             <a:spLocks noGrp="1"/>
           </p:cNvSpPr>
@@ -1881,6 +1663,7 @@
               <a:rPr lang="en-US"/>
               <a:t>Click to edit Master text styles</a:t>
             </a:r>
+            <a:endParaRPr lang="en-US"/>
           </a:p>
           <a:p>
             <a:pPr lvl="1"/>
@@ -1888,6 +1671,7 @@
               <a:rPr lang="en-US"/>
               <a:t>Second level</a:t>
             </a:r>
+            <a:endParaRPr lang="en-US"/>
           </a:p>
           <a:p>
             <a:pPr lvl="2"/>
@@ -1895,6 +1679,7 @@
               <a:rPr lang="en-US"/>
               <a:t>Third level</a:t>
             </a:r>
+            <a:endParaRPr lang="en-US"/>
           </a:p>
           <a:p>
             <a:pPr lvl="3"/>
@@ -1902,6 +1687,7 @@
               <a:rPr lang="en-US"/>
               <a:t>Fourth level</a:t>
             </a:r>
+            <a:endParaRPr lang="en-US"/>
           </a:p>
           <a:p>
             <a:pPr lvl="4"/>
@@ -1915,13 +1701,7 @@
       </p:sp>
       <p:sp>
         <p:nvSpPr>
-          <p:cNvPr id="4" name="Content Placeholder 3">
-            <a:extLst>
-              <a:ext uri="{FF2B5EF4-FFF2-40B4-BE49-F238E27FC236}">
-                <a16:creationId xmlns:a16="http://schemas.microsoft.com/office/drawing/2014/main" id="{6CE624D8-76A7-478F-ACA3-5749DEFD0E0C}"/>
-              </a:ext>
-            </a:extLst>
-          </p:cNvPr>
+          <p:cNvPr id="4" name="Content Placeholder 3"/>
           <p:cNvSpPr>
             <a:spLocks noGrp="1"/>
           </p:cNvSpPr>
@@ -1944,6 +1724,7 @@
               <a:rPr lang="en-US"/>
               <a:t>Click to edit Master text styles</a:t>
             </a:r>
+            <a:endParaRPr lang="en-US"/>
           </a:p>
           <a:p>
             <a:pPr lvl="1"/>
@@ -1951,6 +1732,7 @@
               <a:rPr lang="en-US"/>
               <a:t>Second level</a:t>
             </a:r>
+            <a:endParaRPr lang="en-US"/>
           </a:p>
           <a:p>
             <a:pPr lvl="2"/>
@@ -1958,6 +1740,7 @@
               <a:rPr lang="en-US"/>
               <a:t>Third level</a:t>
             </a:r>
+            <a:endParaRPr lang="en-US"/>
           </a:p>
           <a:p>
             <a:pPr lvl="3"/>
@@ -1965,6 +1748,7 @@
               <a:rPr lang="en-US"/>
               <a:t>Fourth level</a:t>
             </a:r>
+            <a:endParaRPr lang="en-US"/>
           </a:p>
           <a:p>
             <a:pPr lvl="4"/>
@@ -1978,13 +1762,7 @@
       </p:sp>
       <p:sp>
         <p:nvSpPr>
-          <p:cNvPr id="5" name="Date Placeholder 4">
-            <a:extLst>
-              <a:ext uri="{FF2B5EF4-FFF2-40B4-BE49-F238E27FC236}">
-                <a16:creationId xmlns:a16="http://schemas.microsoft.com/office/drawing/2014/main" id="{0F29A939-0957-4E96-B38D-0B2E39D4137F}"/>
-              </a:ext>
-            </a:extLst>
-          </p:cNvPr>
+          <p:cNvPr id="5" name="Date Placeholder 4"/>
           <p:cNvSpPr>
             <a:spLocks noGrp="1"/>
           </p:cNvSpPr>
@@ -1999,7 +1777,6 @@
           <a:p>
             <a:fld id="{2AF27EEE-1B67-445E-AA5D-351EC91D1DEB}" type="datetimeFigureOut">
               <a:rPr lang="en-IN" smtClean="0"/>
-              <a:t>30-09-2026</a:t>
             </a:fld>
             <a:endParaRPr lang="en-IN"/>
           </a:p>
@@ -2007,13 +1784,7 @@
       </p:sp>
       <p:sp>
         <p:nvSpPr>
-          <p:cNvPr id="6" name="Footer Placeholder 5">
-            <a:extLst>
-              <a:ext uri="{FF2B5EF4-FFF2-40B4-BE49-F238E27FC236}">
-                <a16:creationId xmlns:a16="http://schemas.microsoft.com/office/drawing/2014/main" id="{C89D44E1-B8BA-490F-B30A-538CC4D48FFC}"/>
-              </a:ext>
-            </a:extLst>
-          </p:cNvPr>
+          <p:cNvPr id="6" name="Footer Placeholder 5"/>
           <p:cNvSpPr>
             <a:spLocks noGrp="1"/>
           </p:cNvSpPr>
@@ -2032,13 +1803,7 @@
       </p:sp>
       <p:sp>
         <p:nvSpPr>
-          <p:cNvPr id="7" name="Slide Number Placeholder 6">
-            <a:extLst>
-              <a:ext uri="{FF2B5EF4-FFF2-40B4-BE49-F238E27FC236}">
-                <a16:creationId xmlns:a16="http://schemas.microsoft.com/office/drawing/2014/main" id="{9184BB79-7CA5-414E-B5B6-6A8E9AEE4A94}"/>
-              </a:ext>
-            </a:extLst>
-          </p:cNvPr>
+          <p:cNvPr id="7" name="Slide Number Placeholder 6"/>
           <p:cNvSpPr>
             <a:spLocks noGrp="1"/>
           </p:cNvSpPr>
@@ -2053,18 +1818,12 @@
           <a:p>
             <a:fld id="{BF5B04A4-2082-4D7E-8466-9BA22C990A78}" type="slidenum">
               <a:rPr lang="en-IN" smtClean="0"/>
-              <a:t>‹#›</a:t>
             </a:fld>
             <a:endParaRPr lang="en-IN"/>
           </a:p>
         </p:txBody>
       </p:sp>
     </p:spTree>
-    <p:extLst>
-      <p:ext uri="{BB962C8B-B14F-4D97-AF65-F5344CB8AC3E}">
-        <p14:creationId xmlns:p14="http://schemas.microsoft.com/office/powerpoint/2010/main" val="274354285"/>
-      </p:ext>
-    </p:extLst>
   </p:cSld>
   <p:clrMapOvr>
     <a:masterClrMapping/>
@@ -2091,13 +1850,7 @@
       </p:grpSpPr>
       <p:sp>
         <p:nvSpPr>
-          <p:cNvPr id="2" name="Title 1">
-            <a:extLst>
-              <a:ext uri="{FF2B5EF4-FFF2-40B4-BE49-F238E27FC236}">
-                <a16:creationId xmlns:a16="http://schemas.microsoft.com/office/drawing/2014/main" id="{2B586CE8-8BA4-4FB1-ACAA-E38F8ED7F745}"/>
-              </a:ext>
-            </a:extLst>
-          </p:cNvPr>
+          <p:cNvPr id="2" name="Title 1"/>
           <p:cNvSpPr>
             <a:spLocks noGrp="1"/>
           </p:cNvSpPr>
@@ -2125,13 +1878,7 @@
       </p:sp>
       <p:sp>
         <p:nvSpPr>
-          <p:cNvPr id="3" name="Text Placeholder 2">
-            <a:extLst>
-              <a:ext uri="{FF2B5EF4-FFF2-40B4-BE49-F238E27FC236}">
-                <a16:creationId xmlns:a16="http://schemas.microsoft.com/office/drawing/2014/main" id="{A2570902-F321-482A-924A-FF9A87CA5D6E}"/>
-              </a:ext>
-            </a:extLst>
-          </p:cNvPr>
+          <p:cNvPr id="3" name="Text Placeholder 2"/>
           <p:cNvSpPr>
             <a:spLocks noGrp="1"/>
           </p:cNvSpPr>
@@ -2191,18 +1938,13 @@
               <a:rPr lang="en-US"/>
               <a:t>Click to edit Master text styles</a:t>
             </a:r>
-          </a:p>
-        </p:txBody>
-      </p:sp>
-      <p:sp>
-        <p:nvSpPr>
-          <p:cNvPr id="4" name="Content Placeholder 3">
-            <a:extLst>
-              <a:ext uri="{FF2B5EF4-FFF2-40B4-BE49-F238E27FC236}">
-                <a16:creationId xmlns:a16="http://schemas.microsoft.com/office/drawing/2014/main" id="{885B6F67-E437-4FE8-851B-B016F33CFE99}"/>
-              </a:ext>
-            </a:extLst>
-          </p:cNvPr>
+            <a:endParaRPr lang="en-US"/>
+          </a:p>
+        </p:txBody>
+      </p:sp>
+      <p:sp>
+        <p:nvSpPr>
+          <p:cNvPr id="4" name="Content Placeholder 3"/>
           <p:cNvSpPr>
             <a:spLocks noGrp="1"/>
           </p:cNvSpPr>
@@ -2225,6 +1967,7 @@
               <a:rPr lang="en-US"/>
               <a:t>Click to edit Master text styles</a:t>
             </a:r>
+            <a:endParaRPr lang="en-US"/>
           </a:p>
           <a:p>
             <a:pPr lvl="1"/>
@@ -2232,6 +1975,7 @@
               <a:rPr lang="en-US"/>
               <a:t>Second level</a:t>
             </a:r>
+            <a:endParaRPr lang="en-US"/>
           </a:p>
           <a:p>
             <a:pPr lvl="2"/>
@@ -2239,6 +1983,7 @@
               <a:rPr lang="en-US"/>
               <a:t>Third level</a:t>
             </a:r>
+            <a:endParaRPr lang="en-US"/>
           </a:p>
           <a:p>
             <a:pPr lvl="3"/>
@@ -2246,6 +1991,7 @@
               <a:rPr lang="en-US"/>
               <a:t>Fourth level</a:t>
             </a:r>
+            <a:endParaRPr lang="en-US"/>
           </a:p>
           <a:p>
             <a:pPr lvl="4"/>
@@ -2259,13 +2005,7 @@
       </p:sp>
       <p:sp>
         <p:nvSpPr>
-          <p:cNvPr id="5" name="Text Placeholder 4">
-            <a:extLst>
-              <a:ext uri="{FF2B5EF4-FFF2-40B4-BE49-F238E27FC236}">
-                <a16:creationId xmlns:a16="http://schemas.microsoft.com/office/drawing/2014/main" id="{37CE7897-2D17-49F8-8762-68F8D5794FB6}"/>
-              </a:ext>
-            </a:extLst>
-          </p:cNvPr>
+          <p:cNvPr id="5" name="Text Placeholder 4"/>
           <p:cNvSpPr>
             <a:spLocks noGrp="1"/>
           </p:cNvSpPr>
@@ -2325,18 +2065,13 @@
               <a:rPr lang="en-US"/>
               <a:t>Click to edit Master text styles</a:t>
             </a:r>
-          </a:p>
-        </p:txBody>
-      </p:sp>
-      <p:sp>
-        <p:nvSpPr>
-          <p:cNvPr id="6" name="Content Placeholder 5">
-            <a:extLst>
-              <a:ext uri="{FF2B5EF4-FFF2-40B4-BE49-F238E27FC236}">
-                <a16:creationId xmlns:a16="http://schemas.microsoft.com/office/drawing/2014/main" id="{163AE8E8-43BB-400D-8934-6D6B21D3A58E}"/>
-              </a:ext>
-            </a:extLst>
-          </p:cNvPr>
+            <a:endParaRPr lang="en-US"/>
+          </a:p>
+        </p:txBody>
+      </p:sp>
+      <p:sp>
+        <p:nvSpPr>
+          <p:cNvPr id="6" name="Content Placeholder 5"/>
           <p:cNvSpPr>
             <a:spLocks noGrp="1"/>
           </p:cNvSpPr>
@@ -2359,6 +2094,7 @@
               <a:rPr lang="en-US"/>
               <a:t>Click to edit Master text styles</a:t>
             </a:r>
+            <a:endParaRPr lang="en-US"/>
           </a:p>
           <a:p>
             <a:pPr lvl="1"/>
@@ -2366,6 +2102,7 @@
               <a:rPr lang="en-US"/>
               <a:t>Second level</a:t>
             </a:r>
+            <a:endParaRPr lang="en-US"/>
           </a:p>
           <a:p>
             <a:pPr lvl="2"/>
@@ -2373,6 +2110,7 @@
               <a:rPr lang="en-US"/>
               <a:t>Third level</a:t>
             </a:r>
+            <a:endParaRPr lang="en-US"/>
           </a:p>
           <a:p>
             <a:pPr lvl="3"/>
@@ -2380,6 +2118,7 @@
               <a:rPr lang="en-US"/>
               <a:t>Fourth level</a:t>
             </a:r>
+            <a:endParaRPr lang="en-US"/>
           </a:p>
           <a:p>
             <a:pPr lvl="4"/>
@@ -2393,13 +2132,7 @@
       </p:sp>
       <p:sp>
         <p:nvSpPr>
-          <p:cNvPr id="7" name="Date Placeholder 6">
-            <a:extLst>
-              <a:ext uri="{FF2B5EF4-FFF2-40B4-BE49-F238E27FC236}">
-                <a16:creationId xmlns:a16="http://schemas.microsoft.com/office/drawing/2014/main" id="{2FDB6608-03F3-45EF-80BD-C6E305C07128}"/>
-              </a:ext>
-            </a:extLst>
-          </p:cNvPr>
+          <p:cNvPr id="7" name="Date Placeholder 6"/>
           <p:cNvSpPr>
             <a:spLocks noGrp="1"/>
           </p:cNvSpPr>
@@ -2414,7 +2147,6 @@
           <a:p>
             <a:fld id="{2AF27EEE-1B67-445E-AA5D-351EC91D1DEB}" type="datetimeFigureOut">
               <a:rPr lang="en-IN" smtClean="0"/>
-              <a:t>30-09-2026</a:t>
             </a:fld>
             <a:endParaRPr lang="en-IN"/>
           </a:p>
@@ -2422,13 +2154,7 @@
       </p:sp>
       <p:sp>
         <p:nvSpPr>
-          <p:cNvPr id="8" name="Footer Placeholder 7">
-            <a:extLst>
-              <a:ext uri="{FF2B5EF4-FFF2-40B4-BE49-F238E27FC236}">
-                <a16:creationId xmlns:a16="http://schemas.microsoft.com/office/drawing/2014/main" id="{E665D75D-3AD4-4D0E-A5BC-9000973FD8E7}"/>
-              </a:ext>
-            </a:extLst>
-          </p:cNvPr>
+          <p:cNvPr id="8" name="Footer Placeholder 7"/>
           <p:cNvSpPr>
             <a:spLocks noGrp="1"/>
           </p:cNvSpPr>
@@ -2447,13 +2173,7 @@
       </p:sp>
       <p:sp>
         <p:nvSpPr>
-          <p:cNvPr id="9" name="Slide Number Placeholder 8">
-            <a:extLst>
-              <a:ext uri="{FF2B5EF4-FFF2-40B4-BE49-F238E27FC236}">
-                <a16:creationId xmlns:a16="http://schemas.microsoft.com/office/drawing/2014/main" id="{7706A546-DC61-467F-A112-3AC0277BB9A8}"/>
-              </a:ext>
-            </a:extLst>
-          </p:cNvPr>
+          <p:cNvPr id="9" name="Slide Number Placeholder 8"/>
           <p:cNvSpPr>
             <a:spLocks noGrp="1"/>
           </p:cNvSpPr>
@@ -2468,18 +2188,12 @@
           <a:p>
             <a:fld id="{BF5B04A4-2082-4D7E-8466-9BA22C990A78}" type="slidenum">
               <a:rPr lang="en-IN" smtClean="0"/>
-              <a:t>‹#›</a:t>
             </a:fld>
             <a:endParaRPr lang="en-IN"/>
           </a:p>
         </p:txBody>
       </p:sp>
     </p:spTree>
-    <p:extLst>
-      <p:ext uri="{BB962C8B-B14F-4D97-AF65-F5344CB8AC3E}">
-        <p14:creationId xmlns:p14="http://schemas.microsoft.com/office/powerpoint/2010/main" val="3171669247"/>
-      </p:ext>
-    </p:extLst>
   </p:cSld>
   <p:clrMapOvr>
     <a:masterClrMapping/>
@@ -2506,13 +2220,7 @@
       </p:grpSpPr>
       <p:sp>
         <p:nvSpPr>
-          <p:cNvPr id="2" name="Title 1">
-            <a:extLst>
-              <a:ext uri="{FF2B5EF4-FFF2-40B4-BE49-F238E27FC236}">
-                <a16:creationId xmlns:a16="http://schemas.microsoft.com/office/drawing/2014/main" id="{22CC8549-E392-4F05-B762-B5370E51C922}"/>
-              </a:ext>
-            </a:extLst>
-          </p:cNvPr>
+          <p:cNvPr id="2" name="Title 1"/>
           <p:cNvSpPr>
             <a:spLocks noGrp="1"/>
           </p:cNvSpPr>
@@ -2535,13 +2243,7 @@
       </p:sp>
       <p:sp>
         <p:nvSpPr>
-          <p:cNvPr id="3" name="Date Placeholder 2">
-            <a:extLst>
-              <a:ext uri="{FF2B5EF4-FFF2-40B4-BE49-F238E27FC236}">
-                <a16:creationId xmlns:a16="http://schemas.microsoft.com/office/drawing/2014/main" id="{C1059880-A67D-4A24-9138-E937AE75075F}"/>
-              </a:ext>
-            </a:extLst>
-          </p:cNvPr>
+          <p:cNvPr id="3" name="Date Placeholder 2"/>
           <p:cNvSpPr>
             <a:spLocks noGrp="1"/>
           </p:cNvSpPr>
@@ -2556,7 +2258,6 @@
           <a:p>
             <a:fld id="{2AF27EEE-1B67-445E-AA5D-351EC91D1DEB}" type="datetimeFigureOut">
               <a:rPr lang="en-IN" smtClean="0"/>
-              <a:t>30-09-2026</a:t>
             </a:fld>
             <a:endParaRPr lang="en-IN"/>
           </a:p>
@@ -2564,13 +2265,7 @@
       </p:sp>
       <p:sp>
         <p:nvSpPr>
-          <p:cNvPr id="4" name="Footer Placeholder 3">
-            <a:extLst>
-              <a:ext uri="{FF2B5EF4-FFF2-40B4-BE49-F238E27FC236}">
-                <a16:creationId xmlns:a16="http://schemas.microsoft.com/office/drawing/2014/main" id="{01BF6EC7-BFAB-4137-9343-C66B7829AB57}"/>
-              </a:ext>
-            </a:extLst>
-          </p:cNvPr>
+          <p:cNvPr id="4" name="Footer Placeholder 3"/>
           <p:cNvSpPr>
             <a:spLocks noGrp="1"/>
           </p:cNvSpPr>
@@ -2589,13 +2284,7 @@
       </p:sp>
       <p:sp>
         <p:nvSpPr>
-          <p:cNvPr id="5" name="Slide Number Placeholder 4">
-            <a:extLst>
-              <a:ext uri="{FF2B5EF4-FFF2-40B4-BE49-F238E27FC236}">
-                <a16:creationId xmlns:a16="http://schemas.microsoft.com/office/drawing/2014/main" id="{8FA6B929-B579-4261-8171-35357AE9A33C}"/>
-              </a:ext>
-            </a:extLst>
-          </p:cNvPr>
+          <p:cNvPr id="5" name="Slide Number Placeholder 4"/>
           <p:cNvSpPr>
             <a:spLocks noGrp="1"/>
           </p:cNvSpPr>
@@ -2610,18 +2299,12 @@
           <a:p>
             <a:fld id="{BF5B04A4-2082-4D7E-8466-9BA22C990A78}" type="slidenum">
               <a:rPr lang="en-IN" smtClean="0"/>
-              <a:t>‹#›</a:t>
             </a:fld>
             <a:endParaRPr lang="en-IN"/>
           </a:p>
         </p:txBody>
       </p:sp>
     </p:spTree>
-    <p:extLst>
-      <p:ext uri="{BB962C8B-B14F-4D97-AF65-F5344CB8AC3E}">
-        <p14:creationId xmlns:p14="http://schemas.microsoft.com/office/powerpoint/2010/main" val="2337294502"/>
-      </p:ext>
-    </p:extLst>
   </p:cSld>
   <p:clrMapOvr>
     <a:masterClrMapping/>
@@ -2648,13 +2331,7 @@
       </p:grpSpPr>
       <p:sp>
         <p:nvSpPr>
-          <p:cNvPr id="2" name="Date Placeholder 1">
-            <a:extLst>
-              <a:ext uri="{FF2B5EF4-FFF2-40B4-BE49-F238E27FC236}">
-                <a16:creationId xmlns:a16="http://schemas.microsoft.com/office/drawing/2014/main" id="{0CBAFEDF-BA35-4A7C-9388-604C048D57D0}"/>
-              </a:ext>
-            </a:extLst>
-          </p:cNvPr>
+          <p:cNvPr id="2" name="Date Placeholder 1"/>
           <p:cNvSpPr>
             <a:spLocks noGrp="1"/>
           </p:cNvSpPr>
@@ -2669,7 +2346,6 @@
           <a:p>
             <a:fld id="{2AF27EEE-1B67-445E-AA5D-351EC91D1DEB}" type="datetimeFigureOut">
               <a:rPr lang="en-IN" smtClean="0"/>
-              <a:t>30-09-2026</a:t>
             </a:fld>
             <a:endParaRPr lang="en-IN"/>
           </a:p>
@@ -2677,13 +2353,7 @@
       </p:sp>
       <p:sp>
         <p:nvSpPr>
-          <p:cNvPr id="3" name="Footer Placeholder 2">
-            <a:extLst>
-              <a:ext uri="{FF2B5EF4-FFF2-40B4-BE49-F238E27FC236}">
-                <a16:creationId xmlns:a16="http://schemas.microsoft.com/office/drawing/2014/main" id="{11C80271-5700-43CC-A9BA-B2AAB47B2145}"/>
-              </a:ext>
-            </a:extLst>
-          </p:cNvPr>
+          <p:cNvPr id="3" name="Footer Placeholder 2"/>
           <p:cNvSpPr>
             <a:spLocks noGrp="1"/>
           </p:cNvSpPr>
@@ -2702,13 +2372,7 @@
       </p:sp>
       <p:sp>
         <p:nvSpPr>
-          <p:cNvPr id="4" name="Slide Number Placeholder 3">
-            <a:extLst>
-              <a:ext uri="{FF2B5EF4-FFF2-40B4-BE49-F238E27FC236}">
-                <a16:creationId xmlns:a16="http://schemas.microsoft.com/office/drawing/2014/main" id="{7EA712EA-BE6D-4AE5-B09E-215DE5B0EE93}"/>
-              </a:ext>
-            </a:extLst>
-          </p:cNvPr>
+          <p:cNvPr id="4" name="Slide Number Placeholder 3"/>
           <p:cNvSpPr>
             <a:spLocks noGrp="1"/>
           </p:cNvSpPr>
@@ -2723,18 +2387,12 @@
           <a:p>
             <a:fld id="{BF5B04A4-2082-4D7E-8466-9BA22C990A78}" type="slidenum">
               <a:rPr lang="en-IN" smtClean="0"/>
-              <a:t>‹#›</a:t>
             </a:fld>
             <a:endParaRPr lang="en-IN"/>
           </a:p>
         </p:txBody>
       </p:sp>
     </p:spTree>
-    <p:extLst>
-      <p:ext uri="{BB962C8B-B14F-4D97-AF65-F5344CB8AC3E}">
-        <p14:creationId xmlns:p14="http://schemas.microsoft.com/office/powerpoint/2010/main" val="1759072129"/>
-      </p:ext>
-    </p:extLst>
   </p:cSld>
   <p:clrMapOvr>
     <a:masterClrMapping/>
@@ -2761,13 +2419,7 @@
       </p:grpSpPr>
       <p:sp>
         <p:nvSpPr>
-          <p:cNvPr id="2" name="Title 1">
-            <a:extLst>
-              <a:ext uri="{FF2B5EF4-FFF2-40B4-BE49-F238E27FC236}">
-                <a16:creationId xmlns:a16="http://schemas.microsoft.com/office/drawing/2014/main" id="{E02A6235-A416-4C23-BE8E-8FC1CF0EC17E}"/>
-              </a:ext>
-            </a:extLst>
-          </p:cNvPr>
+          <p:cNvPr id="2" name="Title 1"/>
           <p:cNvSpPr>
             <a:spLocks noGrp="1"/>
           </p:cNvSpPr>
@@ -2799,13 +2451,7 @@
       </p:sp>
       <p:sp>
         <p:nvSpPr>
-          <p:cNvPr id="3" name="Content Placeholder 2">
-            <a:extLst>
-              <a:ext uri="{FF2B5EF4-FFF2-40B4-BE49-F238E27FC236}">
-                <a16:creationId xmlns:a16="http://schemas.microsoft.com/office/drawing/2014/main" id="{B4A2C36B-7DDF-4371-9F0A-6E5B64554F5E}"/>
-              </a:ext>
-            </a:extLst>
-          </p:cNvPr>
+          <p:cNvPr id="3" name="Content Placeholder 2"/>
           <p:cNvSpPr>
             <a:spLocks noGrp="1"/>
           </p:cNvSpPr>
@@ -2856,6 +2502,7 @@
               <a:rPr lang="en-US"/>
               <a:t>Click to edit Master text styles</a:t>
             </a:r>
+            <a:endParaRPr lang="en-US"/>
           </a:p>
           <a:p>
             <a:pPr lvl="1"/>
@@ -2863,6 +2510,7 @@
               <a:rPr lang="en-US"/>
               <a:t>Second level</a:t>
             </a:r>
+            <a:endParaRPr lang="en-US"/>
           </a:p>
           <a:p>
             <a:pPr lvl="2"/>
@@ -2870,6 +2518,7 @@
               <a:rPr lang="en-US"/>
               <a:t>Third level</a:t>
             </a:r>
+            <a:endParaRPr lang="en-US"/>
           </a:p>
           <a:p>
             <a:pPr lvl="3"/>
@@ -2877,6 +2526,7 @@
               <a:rPr lang="en-US"/>
               <a:t>Fourth level</a:t>
             </a:r>
+            <a:endParaRPr lang="en-US"/>
           </a:p>
           <a:p>
             <a:pPr lvl="4"/>
@@ -2890,13 +2540,7 @@
       </p:sp>
       <p:sp>
         <p:nvSpPr>
-          <p:cNvPr id="4" name="Text Placeholder 3">
-            <a:extLst>
-              <a:ext uri="{FF2B5EF4-FFF2-40B4-BE49-F238E27FC236}">
-                <a16:creationId xmlns:a16="http://schemas.microsoft.com/office/drawing/2014/main" id="{813FA19A-E15E-47EA-B9B9-5F7FD0AA0B7C}"/>
-              </a:ext>
-            </a:extLst>
-          </p:cNvPr>
+          <p:cNvPr id="4" name="Text Placeholder 3"/>
           <p:cNvSpPr>
             <a:spLocks noGrp="1"/>
           </p:cNvSpPr>
@@ -2956,18 +2600,13 @@
               <a:rPr lang="en-US"/>
               <a:t>Click to edit Master text styles</a:t>
             </a:r>
-          </a:p>
-        </p:txBody>
-      </p:sp>
-      <p:sp>
-        <p:nvSpPr>
-          <p:cNvPr id="5" name="Date Placeholder 4">
-            <a:extLst>
-              <a:ext uri="{FF2B5EF4-FFF2-40B4-BE49-F238E27FC236}">
-                <a16:creationId xmlns:a16="http://schemas.microsoft.com/office/drawing/2014/main" id="{79E84724-CA93-4332-A03F-0909AC5249AD}"/>
-              </a:ext>
-            </a:extLst>
-          </p:cNvPr>
+            <a:endParaRPr lang="en-US"/>
+          </a:p>
+        </p:txBody>
+      </p:sp>
+      <p:sp>
+        <p:nvSpPr>
+          <p:cNvPr id="5" name="Date Placeholder 4"/>
           <p:cNvSpPr>
             <a:spLocks noGrp="1"/>
           </p:cNvSpPr>
@@ -2982,7 +2621,6 @@
           <a:p>
             <a:fld id="{2AF27EEE-1B67-445E-AA5D-351EC91D1DEB}" type="datetimeFigureOut">
               <a:rPr lang="en-IN" smtClean="0"/>
-              <a:t>30-09-2026</a:t>
             </a:fld>
             <a:endParaRPr lang="en-IN"/>
           </a:p>
@@ -2990,13 +2628,7 @@
       </p:sp>
       <p:sp>
         <p:nvSpPr>
-          <p:cNvPr id="6" name="Footer Placeholder 5">
-            <a:extLst>
-              <a:ext uri="{FF2B5EF4-FFF2-40B4-BE49-F238E27FC236}">
-                <a16:creationId xmlns:a16="http://schemas.microsoft.com/office/drawing/2014/main" id="{E403302F-D853-499A-BB91-3BD5366E6776}"/>
-              </a:ext>
-            </a:extLst>
-          </p:cNvPr>
+          <p:cNvPr id="6" name="Footer Placeholder 5"/>
           <p:cNvSpPr>
             <a:spLocks noGrp="1"/>
           </p:cNvSpPr>
@@ -3015,13 +2647,7 @@
       </p:sp>
       <p:sp>
         <p:nvSpPr>
-          <p:cNvPr id="7" name="Slide Number Placeholder 6">
-            <a:extLst>
-              <a:ext uri="{FF2B5EF4-FFF2-40B4-BE49-F238E27FC236}">
-                <a16:creationId xmlns:a16="http://schemas.microsoft.com/office/drawing/2014/main" id="{234AD427-BF9D-4A47-AF08-E4983B90C65A}"/>
-              </a:ext>
-            </a:extLst>
-          </p:cNvPr>
+          <p:cNvPr id="7" name="Slide Number Placeholder 6"/>
           <p:cNvSpPr>
             <a:spLocks noGrp="1"/>
           </p:cNvSpPr>
@@ -3036,18 +2662,12 @@
           <a:p>
             <a:fld id="{BF5B04A4-2082-4D7E-8466-9BA22C990A78}" type="slidenum">
               <a:rPr lang="en-IN" smtClean="0"/>
-              <a:t>‹#›</a:t>
             </a:fld>
             <a:endParaRPr lang="en-IN"/>
           </a:p>
         </p:txBody>
       </p:sp>
     </p:spTree>
-    <p:extLst>
-      <p:ext uri="{BB962C8B-B14F-4D97-AF65-F5344CB8AC3E}">
-        <p14:creationId xmlns:p14="http://schemas.microsoft.com/office/powerpoint/2010/main" val="4041188080"/>
-      </p:ext>
-    </p:extLst>
   </p:cSld>
   <p:clrMapOvr>
     <a:masterClrMapping/>
@@ -3074,13 +2694,7 @@
       </p:grpSpPr>
       <p:sp>
         <p:nvSpPr>
-          <p:cNvPr id="2" name="Title 1">
-            <a:extLst>
-              <a:ext uri="{FF2B5EF4-FFF2-40B4-BE49-F238E27FC236}">
-                <a16:creationId xmlns:a16="http://schemas.microsoft.com/office/drawing/2014/main" id="{73C1B540-7747-44F5-A3A4-69F051F36320}"/>
-              </a:ext>
-            </a:extLst>
-          </p:cNvPr>
+          <p:cNvPr id="2" name="Title 1"/>
           <p:cNvSpPr>
             <a:spLocks noGrp="1"/>
           </p:cNvSpPr>
@@ -3112,13 +2726,7 @@
       </p:sp>
       <p:sp>
         <p:nvSpPr>
-          <p:cNvPr id="3" name="Picture Placeholder 2">
-            <a:extLst>
-              <a:ext uri="{FF2B5EF4-FFF2-40B4-BE49-F238E27FC236}">
-                <a16:creationId xmlns:a16="http://schemas.microsoft.com/office/drawing/2014/main" id="{FA4392B5-0943-4B18-9708-C9FA86F83539}"/>
-              </a:ext>
-            </a:extLst>
-          </p:cNvPr>
+          <p:cNvPr id="3" name="Picture Placeholder 2"/>
           <p:cNvSpPr>
             <a:spLocks noGrp="1"/>
           </p:cNvSpPr>
@@ -3179,13 +2787,7 @@
       </p:sp>
       <p:sp>
         <p:nvSpPr>
-          <p:cNvPr id="4" name="Text Placeholder 3">
-            <a:extLst>
-              <a:ext uri="{FF2B5EF4-FFF2-40B4-BE49-F238E27FC236}">
-                <a16:creationId xmlns:a16="http://schemas.microsoft.com/office/drawing/2014/main" id="{547DFA04-BB4C-4DC0-9831-EB32549F5EAE}"/>
-              </a:ext>
-            </a:extLst>
-          </p:cNvPr>
+          <p:cNvPr id="4" name="Text Placeholder 3"/>
           <p:cNvSpPr>
             <a:spLocks noGrp="1"/>
           </p:cNvSpPr>
@@ -3245,18 +2847,13 @@
               <a:rPr lang="en-US"/>
               <a:t>Click to edit Master text styles</a:t>
             </a:r>
-          </a:p>
-        </p:txBody>
-      </p:sp>
-      <p:sp>
-        <p:nvSpPr>
-          <p:cNvPr id="5" name="Date Placeholder 4">
-            <a:extLst>
-              <a:ext uri="{FF2B5EF4-FFF2-40B4-BE49-F238E27FC236}">
-                <a16:creationId xmlns:a16="http://schemas.microsoft.com/office/drawing/2014/main" id="{B101BDBD-01E1-44D7-AB93-513FF196A2C4}"/>
-              </a:ext>
-            </a:extLst>
-          </p:cNvPr>
+            <a:endParaRPr lang="en-US"/>
+          </a:p>
+        </p:txBody>
+      </p:sp>
+      <p:sp>
+        <p:nvSpPr>
+          <p:cNvPr id="5" name="Date Placeholder 4"/>
           <p:cNvSpPr>
             <a:spLocks noGrp="1"/>
           </p:cNvSpPr>
@@ -3271,7 +2868,6 @@
           <a:p>
             <a:fld id="{2AF27EEE-1B67-445E-AA5D-351EC91D1DEB}" type="datetimeFigureOut">
               <a:rPr lang="en-IN" smtClean="0"/>
-              <a:t>30-09-2026</a:t>
             </a:fld>
             <a:endParaRPr lang="en-IN"/>
           </a:p>
@@ -3279,13 +2875,7 @@
       </p:sp>
       <p:sp>
         <p:nvSpPr>
-          <p:cNvPr id="6" name="Footer Placeholder 5">
-            <a:extLst>
-              <a:ext uri="{FF2B5EF4-FFF2-40B4-BE49-F238E27FC236}">
-                <a16:creationId xmlns:a16="http://schemas.microsoft.com/office/drawing/2014/main" id="{D87D7BDB-9CCD-44F3-A4FB-D4BAE589BE31}"/>
-              </a:ext>
-            </a:extLst>
-          </p:cNvPr>
+          <p:cNvPr id="6" name="Footer Placeholder 5"/>
           <p:cNvSpPr>
             <a:spLocks noGrp="1"/>
           </p:cNvSpPr>
@@ -3304,13 +2894,7 @@
       </p:sp>
       <p:sp>
         <p:nvSpPr>
-          <p:cNvPr id="7" name="Slide Number Placeholder 6">
-            <a:extLst>
-              <a:ext uri="{FF2B5EF4-FFF2-40B4-BE49-F238E27FC236}">
-                <a16:creationId xmlns:a16="http://schemas.microsoft.com/office/drawing/2014/main" id="{7ABC8D8A-A70C-4D57-8271-DCF5EEFC33AE}"/>
-              </a:ext>
-            </a:extLst>
-          </p:cNvPr>
+          <p:cNvPr id="7" name="Slide Number Placeholder 6"/>
           <p:cNvSpPr>
             <a:spLocks noGrp="1"/>
           </p:cNvSpPr>
@@ -3325,18 +2909,12 @@
           <a:p>
             <a:fld id="{BF5B04A4-2082-4D7E-8466-9BA22C990A78}" type="slidenum">
               <a:rPr lang="en-IN" smtClean="0"/>
-              <a:t>‹#›</a:t>
             </a:fld>
             <a:endParaRPr lang="en-IN"/>
           </a:p>
         </p:txBody>
       </p:sp>
     </p:spTree>
-    <p:extLst>
-      <p:ext uri="{BB962C8B-B14F-4D97-AF65-F5344CB8AC3E}">
-        <p14:creationId xmlns:p14="http://schemas.microsoft.com/office/powerpoint/2010/main" val="212236247"/>
-      </p:ext>
-    </p:extLst>
   </p:cSld>
   <p:clrMapOvr>
     <a:masterClrMapping/>
@@ -3368,13 +2946,7 @@
       </p:grpSpPr>
       <p:sp>
         <p:nvSpPr>
-          <p:cNvPr id="2" name="Title Placeholder 1">
-            <a:extLst>
-              <a:ext uri="{FF2B5EF4-FFF2-40B4-BE49-F238E27FC236}">
-                <a16:creationId xmlns:a16="http://schemas.microsoft.com/office/drawing/2014/main" id="{0CE67A62-7E64-4BE9-8EDF-4904E871A047}"/>
-              </a:ext>
-            </a:extLst>
-          </p:cNvPr>
+          <p:cNvPr id="2" name="Title Placeholder 1"/>
           <p:cNvSpPr>
             <a:spLocks noGrp="1"/>
           </p:cNvSpPr>
@@ -3407,13 +2979,7 @@
       </p:sp>
       <p:sp>
         <p:nvSpPr>
-          <p:cNvPr id="3" name="Text Placeholder 2">
-            <a:extLst>
-              <a:ext uri="{FF2B5EF4-FFF2-40B4-BE49-F238E27FC236}">
-                <a16:creationId xmlns:a16="http://schemas.microsoft.com/office/drawing/2014/main" id="{F8CA73B9-1A82-4479-978C-9C873CC677B8}"/>
-              </a:ext>
-            </a:extLst>
-          </p:cNvPr>
+          <p:cNvPr id="3" name="Text Placeholder 2"/>
           <p:cNvSpPr>
             <a:spLocks noGrp="1"/>
           </p:cNvSpPr>
@@ -3441,6 +3007,7 @@
               <a:rPr lang="en-US"/>
               <a:t>Click to edit Master text styles</a:t>
             </a:r>
+            <a:endParaRPr lang="en-US"/>
           </a:p>
           <a:p>
             <a:pPr lvl="1"/>
@@ -3448,6 +3015,7 @@
               <a:rPr lang="en-US"/>
               <a:t>Second level</a:t>
             </a:r>
+            <a:endParaRPr lang="en-US"/>
           </a:p>
           <a:p>
             <a:pPr lvl="2"/>
@@ -3455,6 +3023,7 @@
               <a:rPr lang="en-US"/>
               <a:t>Third level</a:t>
             </a:r>
+            <a:endParaRPr lang="en-US"/>
           </a:p>
           <a:p>
             <a:pPr lvl="3"/>
@@ -3462,6 +3031,7 @@
               <a:rPr lang="en-US"/>
               <a:t>Fourth level</a:t>
             </a:r>
+            <a:endParaRPr lang="en-US"/>
           </a:p>
           <a:p>
             <a:pPr lvl="4"/>
@@ -3475,13 +3045,7 @@
       </p:sp>
       <p:sp>
         <p:nvSpPr>
-          <p:cNvPr id="4" name="Date Placeholder 3">
-            <a:extLst>
-              <a:ext uri="{FF2B5EF4-FFF2-40B4-BE49-F238E27FC236}">
-                <a16:creationId xmlns:a16="http://schemas.microsoft.com/office/drawing/2014/main" id="{F9977FC6-3D78-48A7-A3DB-BFC7C0EA3E8E}"/>
-              </a:ext>
-            </a:extLst>
-          </p:cNvPr>
+          <p:cNvPr id="4" name="Date Placeholder 3"/>
           <p:cNvSpPr>
             <a:spLocks noGrp="1"/>
           </p:cNvSpPr>
@@ -3514,7 +3078,6 @@
           <a:p>
             <a:fld id="{2AF27EEE-1B67-445E-AA5D-351EC91D1DEB}" type="datetimeFigureOut">
               <a:rPr lang="en-IN" smtClean="0"/>
-              <a:t>30-09-2026</a:t>
             </a:fld>
             <a:endParaRPr lang="en-IN"/>
           </a:p>
@@ -3522,13 +3085,7 @@
       </p:sp>
       <p:sp>
         <p:nvSpPr>
-          <p:cNvPr id="5" name="Footer Placeholder 4">
-            <a:extLst>
-              <a:ext uri="{FF2B5EF4-FFF2-40B4-BE49-F238E27FC236}">
-                <a16:creationId xmlns:a16="http://schemas.microsoft.com/office/drawing/2014/main" id="{27CDC877-1137-446E-919A-C66E313317C6}"/>
-              </a:ext>
-            </a:extLst>
-          </p:cNvPr>
+          <p:cNvPr id="5" name="Footer Placeholder 4"/>
           <p:cNvSpPr>
             <a:spLocks noGrp="1"/>
           </p:cNvSpPr>
@@ -3565,13 +3122,7 @@
       </p:sp>
       <p:sp>
         <p:nvSpPr>
-          <p:cNvPr id="6" name="Slide Number Placeholder 5">
-            <a:extLst>
-              <a:ext uri="{FF2B5EF4-FFF2-40B4-BE49-F238E27FC236}">
-                <a16:creationId xmlns:a16="http://schemas.microsoft.com/office/drawing/2014/main" id="{8A258D39-C9B6-4DA9-9C05-38A0ECD4CE48}"/>
-              </a:ext>
-            </a:extLst>
-          </p:cNvPr>
+          <p:cNvPr id="6" name="Slide Number Placeholder 5"/>
           <p:cNvSpPr>
             <a:spLocks noGrp="1"/>
           </p:cNvSpPr>
@@ -3604,18 +3155,12 @@
           <a:p>
             <a:fld id="{BF5B04A4-2082-4D7E-8466-9BA22C990A78}" type="slidenum">
               <a:rPr lang="en-IN" smtClean="0"/>
-              <a:t>‹#›</a:t>
             </a:fld>
             <a:endParaRPr lang="en-IN"/>
           </a:p>
         </p:txBody>
       </p:sp>
     </p:spTree>
-    <p:extLst>
-      <p:ext uri="{BB962C8B-B14F-4D97-AF65-F5344CB8AC3E}">
-        <p14:creationId xmlns:p14="http://schemas.microsoft.com/office/powerpoint/2010/main" val="3279178249"/>
-      </p:ext>
-    </p:extLst>
   </p:cSld>
   <p:clrMap bg1="lt1" tx1="dk1" bg2="lt2" tx2="dk2" accent1="accent1" accent2="accent2" accent3="accent3" accent4="accent4" accent5="accent5" accent6="accent6" hlink="hlink" folHlink="folHlink"/>
   <p:sldLayoutIdLst>
@@ -3974,7 +3519,6 @@
             <a:avLst/>
           </a:prstGeom>
           <a:noFill/>
-          <a:ln/>
         </p:spPr>
         <p:txBody>
           <a:bodyPr wrap="square" lIns="0" tIns="0" rIns="0" bIns="0" rtlCol="0" anchor="ctr"/>
@@ -3988,9 +3532,9 @@
                 <a:solidFill>
                   <a:srgbClr val="6D28D9"/>
                 </a:solidFill>
-                <a:latin typeface="Arial" pitchFamily="34" charset="0"/>
-                <a:ea typeface="Arial" pitchFamily="34" charset="-122"/>
-                <a:cs typeface="Arial" pitchFamily="34" charset="-120"/>
+                <a:latin typeface="Arial" panose="020B0604020202020204" pitchFamily="34" charset="0"/>
+                <a:ea typeface="Arial" panose="020B0604020202020204" pitchFamily="34" charset="-122"/>
+                <a:cs typeface="Arial" panose="020B0604020202020204" pitchFamily="34" charset="-120"/>
               </a:rPr>
               <a:t>SAMSUNG PRISM</a:t>
             </a:r>
@@ -4013,7 +3557,6 @@
             <a:avLst/>
           </a:prstGeom>
           <a:noFill/>
-          <a:ln/>
         </p:spPr>
         <p:txBody>
           <a:bodyPr wrap="square" lIns="0" tIns="0" rIns="0" bIns="0" rtlCol="0" anchor="ctr"/>
@@ -4027,9 +3570,9 @@
                 <a:solidFill>
                   <a:srgbClr val="14142B"/>
                 </a:solidFill>
-                <a:latin typeface="Arial" pitchFamily="34" charset="0"/>
-                <a:ea typeface="Arial" pitchFamily="34" charset="-122"/>
-                <a:cs typeface="Arial" pitchFamily="34" charset="-120"/>
+                <a:latin typeface="Arial" panose="020B0604020202020204" pitchFamily="34" charset="0"/>
+                <a:ea typeface="Arial" panose="020B0604020202020204" pitchFamily="34" charset="-122"/>
+                <a:cs typeface="Arial" panose="020B0604020202020204" pitchFamily="34" charset="-120"/>
               </a:rPr>
               <a:t>Generative AI</a:t>
             </a:r>
@@ -4052,7 +3595,6 @@
             <a:avLst/>
           </a:prstGeom>
           <a:noFill/>
-          <a:ln/>
         </p:spPr>
         <p:txBody>
           <a:bodyPr wrap="square" lIns="0" tIns="0" rIns="0" bIns="0" rtlCol="0" anchor="ctr"/>
@@ -4066,9 +3608,9 @@
                 <a:solidFill>
                   <a:srgbClr val="6D28D9"/>
                 </a:solidFill>
-                <a:latin typeface="Arial" pitchFamily="34" charset="0"/>
-                <a:ea typeface="Arial" pitchFamily="34" charset="-122"/>
-                <a:cs typeface="Arial" pitchFamily="34" charset="-120"/>
+                <a:latin typeface="Arial" panose="020B0604020202020204" pitchFamily="34" charset="0"/>
+                <a:ea typeface="Arial" panose="020B0604020202020204" pitchFamily="34" charset="-122"/>
+                <a:cs typeface="Arial" panose="020B0604020202020204" pitchFamily="34" charset="-120"/>
               </a:rPr>
               <a:t>Hackathon</a:t>
             </a:r>
@@ -4091,7 +3633,6 @@
             <a:avLst/>
           </a:prstGeom>
           <a:noFill/>
-          <a:ln/>
         </p:spPr>
         <p:txBody>
           <a:bodyPr wrap="square" lIns="0" tIns="0" rIns="0" bIns="0" rtlCol="0" anchor="ctr"/>
@@ -4105,9 +3646,9 @@
                 <a:solidFill>
                   <a:srgbClr val="14142B"/>
                 </a:solidFill>
-                <a:latin typeface="Arial" pitchFamily="34" charset="0"/>
-                <a:ea typeface="Arial" pitchFamily="34" charset="-122"/>
-                <a:cs typeface="Arial" pitchFamily="34" charset="-120"/>
+                <a:latin typeface="Arial" panose="020B0604020202020204" pitchFamily="34" charset="0"/>
+                <a:ea typeface="Arial" panose="020B0604020202020204" pitchFamily="34" charset="-122"/>
+                <a:cs typeface="Arial" panose="020B0604020202020204" pitchFamily="34" charset="-120"/>
               </a:rPr>
               <a:t>3rd Edition</a:t>
             </a:r>
@@ -4116,9 +3657,9 @@
                 <a:solidFill>
                   <a:srgbClr val="63637E"/>
                 </a:solidFill>
-                <a:latin typeface="Calibri" pitchFamily="34" charset="0"/>
-                <a:ea typeface="Calibri" pitchFamily="34" charset="-122"/>
-                <a:cs typeface="Calibri" pitchFamily="34" charset="-120"/>
+                <a:latin typeface="Calibri" panose="020F0502020204030204" pitchFamily="34" charset="0"/>
+                <a:ea typeface="Calibri" panose="020F0502020204030204" pitchFamily="34" charset="-122"/>
+                <a:cs typeface="Calibri" panose="020F0502020204030204" pitchFamily="34" charset="-120"/>
               </a:rPr>
               <a:t>   2026 – 27</a:t>
             </a:r>
@@ -4141,7 +3682,6 @@
             <a:avLst/>
           </a:prstGeom>
           <a:noFill/>
-          <a:ln/>
         </p:spPr>
         <p:txBody>
           <a:bodyPr wrap="square" lIns="0" tIns="0" rIns="0" bIns="0" rtlCol="0" anchor="t"/>
@@ -4159,12 +3699,20 @@
                 <a:solidFill>
                   <a:srgbClr val="63637E"/>
                 </a:solidFill>
-                <a:latin typeface="Calibri"/>
-                <a:ea typeface="Calibri"/>
-                <a:cs typeface="Calibri"/>
+                <a:latin typeface="Calibri" panose="020F0502020204030204"/>
+                <a:ea typeface="Calibri" panose="020F0502020204030204"/>
+                <a:cs typeface="Calibri" panose="020F0502020204030204"/>
               </a:rPr>
               <a:t>Theme ID - 05</a:t>
             </a:r>
+            <a:endParaRPr lang="en-US" sz="1600">
+              <a:solidFill>
+                <a:srgbClr val="63637E"/>
+              </a:solidFill>
+              <a:latin typeface="Calibri" panose="020F0502020204030204"/>
+              <a:ea typeface="Calibri" panose="020F0502020204030204"/>
+              <a:cs typeface="Calibri" panose="020F0502020204030204"/>
+            </a:endParaRPr>
           </a:p>
           <a:p>
             <a:pPr marL="177800" indent="-177800">
@@ -4179,12 +3727,20 @@
                 <a:solidFill>
                   <a:srgbClr val="63637E"/>
                 </a:solidFill>
-                <a:latin typeface="Calibri"/>
-                <a:ea typeface="Calibri"/>
-                <a:cs typeface="Calibri"/>
+                <a:latin typeface="Calibri" panose="020F0502020204030204"/>
+                <a:ea typeface="Calibri" panose="020F0502020204030204"/>
+                <a:cs typeface="Calibri" panose="020F0502020204030204"/>
               </a:rPr>
               <a:t>Team Name - Autonomous Partners</a:t>
             </a:r>
+            <a:endParaRPr lang="en-US" sz="1600">
+              <a:solidFill>
+                <a:srgbClr val="63637E"/>
+              </a:solidFill>
+              <a:latin typeface="Calibri" panose="020F0502020204030204"/>
+              <a:ea typeface="Calibri" panose="020F0502020204030204"/>
+              <a:cs typeface="Calibri" panose="020F0502020204030204"/>
+            </a:endParaRPr>
           </a:p>
           <a:p>
             <a:pPr marL="177800" indent="-177800">
@@ -4199,12 +3755,20 @@
                 <a:solidFill>
                   <a:srgbClr val="63637E"/>
                 </a:solidFill>
-                <a:latin typeface="Calibri"/>
-                <a:ea typeface="Calibri"/>
-                <a:cs typeface="Calibri"/>
+                <a:latin typeface="Calibri" panose="020F0502020204030204"/>
+                <a:ea typeface="Calibri" panose="020F0502020204030204"/>
+                <a:cs typeface="Calibri" panose="020F0502020204030204"/>
               </a:rPr>
               <a:t>College Name – SRM Institute of Science and Technology</a:t>
             </a:r>
+            <a:endParaRPr lang="en-US" sz="1600">
+              <a:solidFill>
+                <a:srgbClr val="63637E"/>
+              </a:solidFill>
+              <a:latin typeface="Calibri" panose="020F0502020204030204"/>
+              <a:ea typeface="Calibri" panose="020F0502020204030204"/>
+              <a:cs typeface="Calibri" panose="020F0502020204030204"/>
+            </a:endParaRPr>
           </a:p>
           <a:p>
             <a:pPr marL="177800" indent="-177800">
@@ -4219,12 +3783,20 @@
                 <a:solidFill>
                   <a:srgbClr val="63637E"/>
                 </a:solidFill>
-                <a:latin typeface="Calibri"/>
-                <a:ea typeface="Calibri"/>
-                <a:cs typeface="Calibri"/>
+                <a:latin typeface="Calibri" panose="020F0502020204030204"/>
+                <a:ea typeface="Calibri" panose="020F0502020204030204"/>
+                <a:cs typeface="Calibri" panose="020F0502020204030204"/>
               </a:rPr>
               <a:t>Member Name &amp; Email 1- Pavithra V G &amp; pv2496@srmist.edu.in</a:t>
             </a:r>
+            <a:endParaRPr lang="en-US" sz="1600">
+              <a:solidFill>
+                <a:srgbClr val="63637E"/>
+              </a:solidFill>
+              <a:latin typeface="Calibri" panose="020F0502020204030204"/>
+              <a:ea typeface="Calibri" panose="020F0502020204030204"/>
+              <a:cs typeface="Calibri" panose="020F0502020204030204"/>
+            </a:endParaRPr>
           </a:p>
           <a:p>
             <a:pPr marL="177800" indent="-177800">
@@ -4239,12 +3811,20 @@
                 <a:solidFill>
                   <a:srgbClr val="63637E"/>
                 </a:solidFill>
-                <a:latin typeface="Calibri"/>
-                <a:ea typeface="Calibri"/>
-                <a:cs typeface="Calibri"/>
+                <a:latin typeface="Calibri" panose="020F0502020204030204"/>
+                <a:ea typeface="Calibri" panose="020F0502020204030204"/>
+                <a:cs typeface="Calibri" panose="020F0502020204030204"/>
               </a:rPr>
               <a:t>Member Name &amp; Email 2- Gawtham Prasath &amp; gs3548@srmist.edu.in</a:t>
             </a:r>
+            <a:endParaRPr lang="en-US" sz="1600">
+              <a:solidFill>
+                <a:srgbClr val="63637E"/>
+              </a:solidFill>
+              <a:latin typeface="Calibri" panose="020F0502020204030204"/>
+              <a:ea typeface="Calibri" panose="020F0502020204030204"/>
+              <a:cs typeface="Calibri" panose="020F0502020204030204"/>
+            </a:endParaRPr>
           </a:p>
           <a:p>
             <a:pPr marL="177800" indent="-177800">
@@ -4260,9 +3840,9 @@
                 <a:solidFill>
                   <a:srgbClr val="63637E"/>
                 </a:solidFill>
-                <a:latin typeface="Calibri"/>
-                <a:ea typeface="Calibri"/>
-                <a:cs typeface="Calibri"/>
+                <a:latin typeface="Calibri" panose="020F0502020204030204"/>
+                <a:ea typeface="Calibri" panose="020F0502020204030204"/>
+                <a:cs typeface="Calibri" panose="020F0502020204030204"/>
               </a:rPr>
               <a:t>Member Name &amp; Email 3- </a:t>
             </a:r>
@@ -4271,9 +3851,9 @@
                 <a:solidFill>
                   <a:srgbClr val="63637E"/>
                 </a:solidFill>
-                <a:latin typeface="Calibri"/>
-                <a:ea typeface="Calibri"/>
-                <a:cs typeface="Calibri"/>
+                <a:latin typeface="Calibri" panose="020F0502020204030204"/>
+                <a:ea typeface="Calibri" panose="020F0502020204030204"/>
+                <a:cs typeface="Calibri" panose="020F0502020204030204"/>
               </a:rPr>
               <a:t>Thenamudhan</a:t>
             </a:r>
@@ -4282,12 +3862,20 @@
                 <a:solidFill>
                   <a:srgbClr val="63637E"/>
                 </a:solidFill>
-                <a:latin typeface="Calibri"/>
-                <a:ea typeface="Calibri"/>
-                <a:cs typeface="Calibri"/>
+                <a:latin typeface="Calibri" panose="020F0502020204030204"/>
+                <a:ea typeface="Calibri" panose="020F0502020204030204"/>
+                <a:cs typeface="Calibri" panose="020F0502020204030204"/>
               </a:rPr>
               <a:t> S &amp; ts1255@gmail.com</a:t>
             </a:r>
+            <a:endParaRPr lang="en-US" sz="1600">
+              <a:solidFill>
+                <a:srgbClr val="63637E"/>
+              </a:solidFill>
+              <a:latin typeface="Calibri" panose="020F0502020204030204"/>
+              <a:ea typeface="Calibri" panose="020F0502020204030204"/>
+              <a:cs typeface="Calibri" panose="020F0502020204030204"/>
+            </a:endParaRPr>
           </a:p>
           <a:p>
             <a:pPr marL="177800" indent="-177800">
@@ -4303,9 +3891,9 @@
                 <a:solidFill>
                   <a:srgbClr val="63637E"/>
                 </a:solidFill>
-                <a:latin typeface="Calibri"/>
-                <a:ea typeface="Calibri"/>
-                <a:cs typeface="Calibri"/>
+                <a:latin typeface="Calibri" panose="020F0502020204030204"/>
+                <a:ea typeface="Calibri" panose="020F0502020204030204"/>
+                <a:cs typeface="Calibri" panose="020F0502020204030204"/>
               </a:rPr>
               <a:t>Submission </a:t>
             </a:r>
@@ -4314,9 +3902,9 @@
                 <a:solidFill>
                   <a:srgbClr val="63637E"/>
                 </a:solidFill>
-                <a:latin typeface="Calibri"/>
-                <a:ea typeface="Calibri"/>
-                <a:cs typeface="Calibri"/>
+                <a:latin typeface="Calibri" panose="020F0502020204030204"/>
+                <a:ea typeface="Calibri" panose="020F0502020204030204"/>
+                <a:cs typeface="Calibri" panose="020F0502020204030204"/>
               </a:rPr>
               <a:t>Github</a:t>
             </a:r>
@@ -4325,12 +3913,20 @@
                 <a:solidFill>
                   <a:srgbClr val="63637E"/>
                 </a:solidFill>
-                <a:latin typeface="Calibri"/>
-                <a:ea typeface="Calibri"/>
-                <a:cs typeface="Calibri"/>
+                <a:latin typeface="Calibri" panose="020F0502020204030204"/>
+                <a:ea typeface="Calibri" panose="020F0502020204030204"/>
+                <a:cs typeface="Calibri" panose="020F0502020204030204"/>
               </a:rPr>
               <a:t> link - </a:t>
             </a:r>
+            <a:endParaRPr lang="en-US" sz="1600">
+              <a:solidFill>
+                <a:srgbClr val="63637E"/>
+              </a:solidFill>
+              <a:latin typeface="Calibri" panose="020F0502020204030204"/>
+              <a:ea typeface="Calibri" panose="020F0502020204030204"/>
+              <a:cs typeface="Calibri" panose="020F0502020204030204"/>
+            </a:endParaRPr>
           </a:p>
           <a:p>
             <a:pPr marL="177800" indent="-177800">
@@ -4344,9 +3940,9 @@
               <a:solidFill>
                 <a:srgbClr val="63637E"/>
               </a:solidFill>
-              <a:latin typeface="Calibri" pitchFamily="34" charset="0"/>
-              <a:ea typeface="Calibri" pitchFamily="34" charset="-122"/>
-              <a:cs typeface="Calibri" pitchFamily="34" charset="-120"/>
+              <a:latin typeface="Calibri" panose="020F0502020204030204" pitchFamily="34" charset="0"/>
+              <a:ea typeface="Calibri" panose="020F0502020204030204" pitchFamily="34" charset="-122"/>
+              <a:cs typeface="Calibri" panose="020F0502020204030204" pitchFamily="34" charset="-120"/>
             </a:endParaRPr>
           </a:p>
         </p:txBody>
@@ -4360,7 +3956,7 @@
           <p:nvPr/>
         </p:nvPicPr>
         <p:blipFill>
-          <a:blip r:embed="rId3"/>
+          <a:blip r:embed="rId1"/>
           <a:stretch>
             <a:fillRect/>
           </a:stretch>
@@ -4402,13 +3998,7 @@
       </p:grpSpPr>
       <p:sp>
         <p:nvSpPr>
-          <p:cNvPr id="2" name="Title 1">
-            <a:extLst>
-              <a:ext uri="{FF2B5EF4-FFF2-40B4-BE49-F238E27FC236}">
-                <a16:creationId xmlns:a16="http://schemas.microsoft.com/office/drawing/2014/main" id="{51353DB3-FB86-4452-A4FB-E7F4BEA62856}"/>
-              </a:ext>
-            </a:extLst>
-          </p:cNvPr>
+          <p:cNvPr id="2" name="Title 1"/>
           <p:cNvSpPr>
             <a:spLocks noGrp="1"/>
           </p:cNvSpPr>
@@ -4437,9 +4027,9 @@
                 <a:solidFill>
                   <a:srgbClr val="704EA6"/>
                 </a:solidFill>
-                <a:latin typeface="Calibri" pitchFamily="34" charset="0"/>
-                <a:ea typeface="Calibri" pitchFamily="34" charset="-122"/>
-                <a:cs typeface="Calibri" pitchFamily="34" charset="-120"/>
+                <a:latin typeface="Calibri" panose="020F0502020204030204" pitchFamily="34" charset="0"/>
+                <a:ea typeface="Calibri" panose="020F0502020204030204" pitchFamily="34" charset="-122"/>
+                <a:cs typeface="Calibri" panose="020F0502020204030204" pitchFamily="34" charset="-120"/>
               </a:rPr>
               <a:t>Brownie points slide</a:t>
             </a:r>
@@ -4453,13 +4043,7 @@
       </p:sp>
       <p:sp>
         <p:nvSpPr>
-          <p:cNvPr id="5" name="Rounded Rectangle 3">
-            <a:extLst>
-              <a:ext uri="{FF2B5EF4-FFF2-40B4-BE49-F238E27FC236}">
-                <a16:creationId xmlns:a16="http://schemas.microsoft.com/office/drawing/2014/main" id="{A3E154B2-DED2-9B43-B0F8-E958D60E8419}"/>
-              </a:ext>
-            </a:extLst>
-          </p:cNvPr>
+          <p:cNvPr id="5" name="Rounded Rectangle 3"/>
           <p:cNvSpPr/>
           <p:nvPr/>
         </p:nvSpPr>
@@ -4499,19 +4083,12 @@
           <a:lstStyle/>
           <a:p>
             <a:pPr algn="ctr"/>
-            <a:endParaRPr/>
-          </a:p>
-        </p:txBody>
-      </p:sp>
-      <p:sp>
-        <p:nvSpPr>
-          <p:cNvPr id="7" name="TextBox 6">
-            <a:extLst>
-              <a:ext uri="{FF2B5EF4-FFF2-40B4-BE49-F238E27FC236}">
-                <a16:creationId xmlns:a16="http://schemas.microsoft.com/office/drawing/2014/main" id="{71287177-6AFF-0988-0C5F-52FE706CA331}"/>
-              </a:ext>
-            </a:extLst>
-          </p:cNvPr>
+          </a:p>
+        </p:txBody>
+      </p:sp>
+      <p:sp>
+        <p:nvSpPr>
+          <p:cNvPr id="7" name="TextBox 6"/>
           <p:cNvSpPr txBox="1"/>
           <p:nvPr/>
         </p:nvSpPr>
@@ -4545,18 +4122,18 @@
               </a:rPr>
               <a:t>Interrupts are a first-class event</a:t>
             </a:r>
-          </a:p>
-        </p:txBody>
-      </p:sp>
-      <p:sp>
-        <p:nvSpPr>
-          <p:cNvPr id="9" name="TextBox 8">
-            <a:extLst>
-              <a:ext uri="{FF2B5EF4-FFF2-40B4-BE49-F238E27FC236}">
-                <a16:creationId xmlns:a16="http://schemas.microsoft.com/office/drawing/2014/main" id="{65021668-D4BE-F7A7-F267-DA4A0A55FE4B}"/>
-              </a:ext>
-            </a:extLst>
-          </p:cNvPr>
+            <a:endParaRPr sz="1500" b="1" i="1">
+              <a:solidFill>
+                <a:srgbClr val="7030A0"/>
+              </a:solidFill>
+              <a:latin typeface="Aptos"/>
+            </a:endParaRPr>
+          </a:p>
+        </p:txBody>
+      </p:sp>
+      <p:sp>
+        <p:nvSpPr>
+          <p:cNvPr id="9" name="TextBox 8"/>
           <p:cNvSpPr txBox="1"/>
           <p:nvPr/>
         </p:nvSpPr>
@@ -4590,18 +4167,18 @@
               </a:rPr>
               <a:t>Not a UI trick: barge-in changes agent state and the live stream.</a:t>
             </a:r>
-          </a:p>
-        </p:txBody>
-      </p:sp>
-      <p:sp>
-        <p:nvSpPr>
-          <p:cNvPr id="11" name="Rounded Rectangle 6">
-            <a:extLst>
-              <a:ext uri="{FF2B5EF4-FFF2-40B4-BE49-F238E27FC236}">
-                <a16:creationId xmlns:a16="http://schemas.microsoft.com/office/drawing/2014/main" id="{8A160D0B-754B-492E-CB32-63EA041CABA6}"/>
-              </a:ext>
-            </a:extLst>
-          </p:cNvPr>
+            <a:endParaRPr sz="1400" b="1">
+              <a:solidFill>
+                <a:srgbClr val="232337"/>
+              </a:solidFill>
+              <a:latin typeface="Aptos"/>
+            </a:endParaRPr>
+          </a:p>
+        </p:txBody>
+      </p:sp>
+      <p:sp>
+        <p:nvSpPr>
+          <p:cNvPr id="11" name="Rounded Rectangle 6"/>
           <p:cNvSpPr/>
           <p:nvPr/>
         </p:nvSpPr>
@@ -4641,19 +4218,12 @@
           <a:lstStyle/>
           <a:p>
             <a:pPr algn="ctr"/>
-            <a:endParaRPr/>
-          </a:p>
-        </p:txBody>
-      </p:sp>
-      <p:sp>
-        <p:nvSpPr>
-          <p:cNvPr id="13" name="TextBox 12">
-            <a:extLst>
-              <a:ext uri="{FF2B5EF4-FFF2-40B4-BE49-F238E27FC236}">
-                <a16:creationId xmlns:a16="http://schemas.microsoft.com/office/drawing/2014/main" id="{6897A878-92F8-3343-811E-870EAB229412}"/>
-              </a:ext>
-            </a:extLst>
-          </p:cNvPr>
+          </a:p>
+        </p:txBody>
+      </p:sp>
+      <p:sp>
+        <p:nvSpPr>
+          <p:cNvPr id="13" name="TextBox 12"/>
           <p:cNvSpPr txBox="1"/>
           <p:nvPr/>
         </p:nvSpPr>
@@ -4687,18 +4257,18 @@
               </a:rPr>
               <a:t>Reasoning before speaking</a:t>
             </a:r>
-          </a:p>
-        </p:txBody>
-      </p:sp>
-      <p:sp>
-        <p:nvSpPr>
-          <p:cNvPr id="15" name="TextBox 14">
-            <a:extLst>
-              <a:ext uri="{FF2B5EF4-FFF2-40B4-BE49-F238E27FC236}">
-                <a16:creationId xmlns:a16="http://schemas.microsoft.com/office/drawing/2014/main" id="{751CF6FF-A031-D214-A998-4BEEBB01EAB1}"/>
-              </a:ext>
-            </a:extLst>
-          </p:cNvPr>
+            <a:endParaRPr sz="1500" b="1" i="1">
+              <a:solidFill>
+                <a:srgbClr val="7030A0"/>
+              </a:solidFill>
+              <a:latin typeface="Aptos"/>
+            </a:endParaRPr>
+          </a:p>
+        </p:txBody>
+      </p:sp>
+      <p:sp>
+        <p:nvSpPr>
+          <p:cNvPr id="15" name="TextBox 14"/>
           <p:cNvSpPr txBox="1"/>
           <p:nvPr/>
         </p:nvSpPr>
@@ -4732,18 +4302,18 @@
               </a:rPr>
               <a:t>Teacher–Critic–Student deliberation produces a refined answer before vocalization.</a:t>
             </a:r>
-          </a:p>
-        </p:txBody>
-      </p:sp>
-      <p:sp>
-        <p:nvSpPr>
-          <p:cNvPr id="17" name="Rounded Rectangle 9">
-            <a:extLst>
-              <a:ext uri="{FF2B5EF4-FFF2-40B4-BE49-F238E27FC236}">
-                <a16:creationId xmlns:a16="http://schemas.microsoft.com/office/drawing/2014/main" id="{B54DB215-7097-BA62-A7A7-FBC99BF20F29}"/>
-              </a:ext>
-            </a:extLst>
-          </p:cNvPr>
+            <a:endParaRPr sz="1400" b="1">
+              <a:solidFill>
+                <a:srgbClr val="232337"/>
+              </a:solidFill>
+              <a:latin typeface="Aptos"/>
+            </a:endParaRPr>
+          </a:p>
+        </p:txBody>
+      </p:sp>
+      <p:sp>
+        <p:nvSpPr>
+          <p:cNvPr id="17" name="Rounded Rectangle 9"/>
           <p:cNvSpPr/>
           <p:nvPr/>
         </p:nvSpPr>
@@ -4783,19 +4353,12 @@
           <a:lstStyle/>
           <a:p>
             <a:pPr algn="ctr"/>
-            <a:endParaRPr/>
-          </a:p>
-        </p:txBody>
-      </p:sp>
-      <p:sp>
-        <p:nvSpPr>
-          <p:cNvPr id="19" name="TextBox 18">
-            <a:extLst>
-              <a:ext uri="{FF2B5EF4-FFF2-40B4-BE49-F238E27FC236}">
-                <a16:creationId xmlns:a16="http://schemas.microsoft.com/office/drawing/2014/main" id="{85391BC6-E27D-DA9B-B3A3-40449F623A70}"/>
-              </a:ext>
-            </a:extLst>
-          </p:cNvPr>
+          </a:p>
+        </p:txBody>
+      </p:sp>
+      <p:sp>
+        <p:nvSpPr>
+          <p:cNvPr id="19" name="TextBox 18"/>
           <p:cNvSpPr txBox="1"/>
           <p:nvPr/>
         </p:nvSpPr>
@@ -4829,18 +4392,18 @@
               </a:rPr>
               <a:t>Proactive, not passive</a:t>
             </a:r>
-          </a:p>
-        </p:txBody>
-      </p:sp>
-      <p:sp>
-        <p:nvSpPr>
-          <p:cNvPr id="21" name="TextBox 20">
-            <a:extLst>
-              <a:ext uri="{FF2B5EF4-FFF2-40B4-BE49-F238E27FC236}">
-                <a16:creationId xmlns:a16="http://schemas.microsoft.com/office/drawing/2014/main" id="{F77CA3B1-67AA-4A32-3D1C-2DE351C97577}"/>
-              </a:ext>
-            </a:extLst>
-          </p:cNvPr>
+            <a:endParaRPr sz="1500" b="1" i="1">
+              <a:solidFill>
+                <a:srgbClr val="7030A0"/>
+              </a:solidFill>
+              <a:latin typeface="Aptos"/>
+            </a:endParaRPr>
+          </a:p>
+        </p:txBody>
+      </p:sp>
+      <p:sp>
+        <p:nvSpPr>
+          <p:cNvPr id="21" name="TextBox 20"/>
           <p:cNvSpPr txBox="1"/>
           <p:nvPr/>
         </p:nvSpPr>
@@ -4883,18 +4446,18 @@
               </a:rPr>
               <a:t> can observe stagnation and initiate a contextual intervention.</a:t>
             </a:r>
-          </a:p>
-        </p:txBody>
-      </p:sp>
-      <p:sp>
-        <p:nvSpPr>
-          <p:cNvPr id="23" name="Rounded Rectangle 12">
-            <a:extLst>
-              <a:ext uri="{FF2B5EF4-FFF2-40B4-BE49-F238E27FC236}">
-                <a16:creationId xmlns:a16="http://schemas.microsoft.com/office/drawing/2014/main" id="{C74CC050-BAD0-9A13-11EB-93751EE81044}"/>
-              </a:ext>
-            </a:extLst>
-          </p:cNvPr>
+            <a:endParaRPr sz="1400" b="1">
+              <a:solidFill>
+                <a:srgbClr val="232337"/>
+              </a:solidFill>
+              <a:latin typeface="Aptos"/>
+            </a:endParaRPr>
+          </a:p>
+        </p:txBody>
+      </p:sp>
+      <p:sp>
+        <p:nvSpPr>
+          <p:cNvPr id="23" name="Rounded Rectangle 12"/>
           <p:cNvSpPr/>
           <p:nvPr/>
         </p:nvSpPr>
@@ -4934,19 +4497,12 @@
           <a:lstStyle/>
           <a:p>
             <a:pPr algn="ctr"/>
-            <a:endParaRPr/>
-          </a:p>
-        </p:txBody>
-      </p:sp>
-      <p:sp>
-        <p:nvSpPr>
-          <p:cNvPr id="25" name="TextBox 24">
-            <a:extLst>
-              <a:ext uri="{FF2B5EF4-FFF2-40B4-BE49-F238E27FC236}">
-                <a16:creationId xmlns:a16="http://schemas.microsoft.com/office/drawing/2014/main" id="{15727603-5F1D-23AA-D921-2F62DF2449DD}"/>
-              </a:ext>
-            </a:extLst>
-          </p:cNvPr>
+          </a:p>
+        </p:txBody>
+      </p:sp>
+      <p:sp>
+        <p:nvSpPr>
+          <p:cNvPr id="25" name="TextBox 24"/>
           <p:cNvSpPr txBox="1"/>
           <p:nvPr/>
         </p:nvSpPr>
@@ -4980,18 +4536,18 @@
               </a:rPr>
               <a:t>Memory that compounds</a:t>
             </a:r>
-          </a:p>
-        </p:txBody>
-      </p:sp>
-      <p:sp>
-        <p:nvSpPr>
-          <p:cNvPr id="27" name="TextBox 26">
-            <a:extLst>
-              <a:ext uri="{FF2B5EF4-FFF2-40B4-BE49-F238E27FC236}">
-                <a16:creationId xmlns:a16="http://schemas.microsoft.com/office/drawing/2014/main" id="{909510A6-DBFA-487A-9F64-8D6B2B0C3C82}"/>
-              </a:ext>
-            </a:extLst>
-          </p:cNvPr>
+            <a:endParaRPr sz="1500" b="1" i="1">
+              <a:solidFill>
+                <a:srgbClr val="7030A0"/>
+              </a:solidFill>
+              <a:latin typeface="Aptos"/>
+            </a:endParaRPr>
+          </a:p>
+        </p:txBody>
+      </p:sp>
+      <p:sp>
+        <p:nvSpPr>
+          <p:cNvPr id="27" name="TextBox 26"/>
           <p:cNvSpPr txBox="1"/>
           <p:nvPr/>
         </p:nvSpPr>
@@ -5025,18 +4581,18 @@
               </a:rPr>
               <a:t>Voyager converts solved workflows into reusable local skills.</a:t>
             </a:r>
-          </a:p>
-        </p:txBody>
-      </p:sp>
-      <p:sp>
-        <p:nvSpPr>
-          <p:cNvPr id="29" name="Rounded Rectangle 15">
-            <a:extLst>
-              <a:ext uri="{FF2B5EF4-FFF2-40B4-BE49-F238E27FC236}">
-                <a16:creationId xmlns:a16="http://schemas.microsoft.com/office/drawing/2014/main" id="{DE08B9E8-B8F9-4702-80E9-05690405D73A}"/>
-              </a:ext>
-            </a:extLst>
-          </p:cNvPr>
+            <a:endParaRPr sz="1400" b="1">
+              <a:solidFill>
+                <a:srgbClr val="232337"/>
+              </a:solidFill>
+              <a:latin typeface="Aptos"/>
+            </a:endParaRPr>
+          </a:p>
+        </p:txBody>
+      </p:sp>
+      <p:sp>
+        <p:nvSpPr>
+          <p:cNvPr id="29" name="Rounded Rectangle 15"/>
           <p:cNvSpPr/>
           <p:nvPr/>
         </p:nvSpPr>
@@ -5076,19 +4632,12 @@
           <a:lstStyle/>
           <a:p>
             <a:pPr algn="ctr"/>
-            <a:endParaRPr/>
-          </a:p>
-        </p:txBody>
-      </p:sp>
-      <p:sp>
-        <p:nvSpPr>
-          <p:cNvPr id="31" name="TextBox 30">
-            <a:extLst>
-              <a:ext uri="{FF2B5EF4-FFF2-40B4-BE49-F238E27FC236}">
-                <a16:creationId xmlns:a16="http://schemas.microsoft.com/office/drawing/2014/main" id="{06F1DB47-2231-C3F4-AAD8-88EF369CAC56}"/>
-              </a:ext>
-            </a:extLst>
-          </p:cNvPr>
+          </a:p>
+        </p:txBody>
+      </p:sp>
+      <p:sp>
+        <p:nvSpPr>
+          <p:cNvPr id="31" name="TextBox 30"/>
           <p:cNvSpPr txBox="1"/>
           <p:nvPr/>
         </p:nvSpPr>
@@ -5122,18 +4671,18 @@
               </a:rPr>
               <a:t>Privacy by design</a:t>
             </a:r>
-          </a:p>
-        </p:txBody>
-      </p:sp>
-      <p:sp>
-        <p:nvSpPr>
-          <p:cNvPr id="33" name="TextBox 32">
-            <a:extLst>
-              <a:ext uri="{FF2B5EF4-FFF2-40B4-BE49-F238E27FC236}">
-                <a16:creationId xmlns:a16="http://schemas.microsoft.com/office/drawing/2014/main" id="{B9FF750C-1E37-7707-157F-5E0D06EC88EC}"/>
-              </a:ext>
-            </a:extLst>
-          </p:cNvPr>
+            <a:endParaRPr sz="1500" b="1" i="1">
+              <a:solidFill>
+                <a:srgbClr val="7030A0"/>
+              </a:solidFill>
+              <a:latin typeface="Aptos"/>
+            </a:endParaRPr>
+          </a:p>
+        </p:txBody>
+      </p:sp>
+      <p:sp>
+        <p:nvSpPr>
+          <p:cNvPr id="33" name="TextBox 32"/>
           <p:cNvSpPr txBox="1"/>
           <p:nvPr/>
         </p:nvSpPr>
@@ -5167,18 +4716,18 @@
               </a:rPr>
               <a:t>Local Vault + Electron isolation keep conversational memory on-device by default.</a:t>
             </a:r>
-          </a:p>
-        </p:txBody>
-      </p:sp>
-      <p:sp>
-        <p:nvSpPr>
-          <p:cNvPr id="35" name="TextBox 34">
-            <a:extLst>
-              <a:ext uri="{FF2B5EF4-FFF2-40B4-BE49-F238E27FC236}">
-                <a16:creationId xmlns:a16="http://schemas.microsoft.com/office/drawing/2014/main" id="{1F27C321-DAB1-2EA9-106B-3D96695232FE}"/>
-              </a:ext>
-            </a:extLst>
-          </p:cNvPr>
+            <a:endParaRPr sz="1400" b="1">
+              <a:solidFill>
+                <a:srgbClr val="232337"/>
+              </a:solidFill>
+              <a:latin typeface="Aptos"/>
+            </a:endParaRPr>
+          </a:p>
+        </p:txBody>
+      </p:sp>
+      <p:sp>
+        <p:nvSpPr>
+          <p:cNvPr id="35" name="TextBox 34"/>
           <p:cNvSpPr txBox="1"/>
           <p:nvPr/>
         </p:nvSpPr>
@@ -5214,11 +4763,6 @@
         </p:txBody>
       </p:sp>
     </p:spTree>
-    <p:extLst>
-      <p:ext uri="{BB962C8B-B14F-4D97-AF65-F5344CB8AC3E}">
-        <p14:creationId xmlns:p14="http://schemas.microsoft.com/office/powerpoint/2010/main" val="2095517687"/>
-      </p:ext>
-    </p:extLst>
   </p:cSld>
   <p:clrMapOvr>
     <a:masterClrMapping/>
@@ -5245,13 +4789,7 @@
       </p:grpSpPr>
       <p:sp>
         <p:nvSpPr>
-          <p:cNvPr id="2" name="Title 1">
-            <a:extLst>
-              <a:ext uri="{FF2B5EF4-FFF2-40B4-BE49-F238E27FC236}">
-                <a16:creationId xmlns:a16="http://schemas.microsoft.com/office/drawing/2014/main" id="{2F04E28A-8ABF-4E15-B9E1-B0F49C0EE29F}"/>
-              </a:ext>
-            </a:extLst>
-          </p:cNvPr>
+          <p:cNvPr id="2" name="Title 1"/>
           <p:cNvSpPr>
             <a:spLocks noGrp="1"/>
           </p:cNvSpPr>
@@ -5273,18 +4811,18 @@
               </a:rPr>
               <a:t>Checklist- Updated on Public GitHub</a:t>
             </a:r>
-          </a:p>
-        </p:txBody>
-      </p:sp>
-      <p:sp>
-        <p:nvSpPr>
-          <p:cNvPr id="3" name="Content Placeholder 2">
-            <a:extLst>
-              <a:ext uri="{FF2B5EF4-FFF2-40B4-BE49-F238E27FC236}">
-                <a16:creationId xmlns:a16="http://schemas.microsoft.com/office/drawing/2014/main" id="{DAB3E6F6-9D00-4480-90E6-EC3C876F2628}"/>
-              </a:ext>
-            </a:extLst>
-          </p:cNvPr>
+            <a:endParaRPr lang="en-IN" b="1">
+              <a:solidFill>
+                <a:srgbClr val="704EA6"/>
+              </a:solidFill>
+              <a:latin typeface="+mn-lt"/>
+            </a:endParaRPr>
+          </a:p>
+        </p:txBody>
+      </p:sp>
+      <p:sp>
+        <p:nvSpPr>
+          <p:cNvPr id="3" name="Content Placeholder 2"/>
           <p:cNvSpPr>
             <a:spLocks noGrp="1"/>
           </p:cNvSpPr>
@@ -5309,9 +4847,9 @@
                 <a:solidFill>
                   <a:srgbClr val="63637E"/>
                 </a:solidFill>
-                <a:latin typeface="Calibri" pitchFamily="34" charset="0"/>
-                <a:ea typeface="Calibri" pitchFamily="34" charset="-122"/>
-                <a:cs typeface="Calibri" pitchFamily="34" charset="-120"/>
+                <a:latin typeface="Calibri" panose="020F0502020204030204" pitchFamily="34" charset="0"/>
+                <a:ea typeface="Calibri" panose="020F0502020204030204" pitchFamily="34" charset="-122"/>
+                <a:cs typeface="Calibri" panose="020F0502020204030204" pitchFamily="34" charset="-120"/>
               </a:rPr>
               <a:t>Working prototype code — public or shared GitHub repo (Y/N)</a:t>
             </a:r>
@@ -5330,9 +4868,9 @@
                 <a:solidFill>
                   <a:srgbClr val="63637E"/>
                 </a:solidFill>
-                <a:latin typeface="Calibri" pitchFamily="34" charset="0"/>
-                <a:ea typeface="Calibri" pitchFamily="34" charset="-122"/>
-                <a:cs typeface="Calibri" pitchFamily="34" charset="-120"/>
+                <a:latin typeface="Calibri" panose="020F0502020204030204" pitchFamily="34" charset="0"/>
+                <a:ea typeface="Calibri" panose="020F0502020204030204" pitchFamily="34" charset="-122"/>
+                <a:cs typeface="Calibri" panose="020F0502020204030204" pitchFamily="34" charset="-120"/>
               </a:rPr>
               <a:t>README with reproducible setup instructions (Y/N)</a:t>
             </a:r>
@@ -5351,9 +4889,9 @@
                 <a:solidFill>
                   <a:srgbClr val="63637E"/>
                 </a:solidFill>
-                <a:latin typeface="Calibri" pitchFamily="34" charset="0"/>
-                <a:ea typeface="Calibri" pitchFamily="34" charset="-122"/>
-                <a:cs typeface="Calibri" pitchFamily="34" charset="-120"/>
+                <a:latin typeface="Calibri" panose="020F0502020204030204" pitchFamily="34" charset="0"/>
+                <a:ea typeface="Calibri" panose="020F0502020204030204" pitchFamily="34" charset="-122"/>
+                <a:cs typeface="Calibri" panose="020F0502020204030204" pitchFamily="34" charset="-120"/>
               </a:rPr>
               <a:t>Demo video, max 5 minutes (YouTube or Drive link)</a:t>
             </a:r>
@@ -5372,9 +4910,9 @@
                 <a:solidFill>
                   <a:srgbClr val="63637E"/>
                 </a:solidFill>
-                <a:latin typeface="Calibri" pitchFamily="34" charset="0"/>
-                <a:ea typeface="Calibri" pitchFamily="34" charset="-122"/>
-                <a:cs typeface="Calibri" pitchFamily="34" charset="-120"/>
+                <a:latin typeface="Calibri" panose="020F0502020204030204" pitchFamily="34" charset="0"/>
+                <a:ea typeface="Calibri" panose="020F0502020204030204" pitchFamily="34" charset="-122"/>
+                <a:cs typeface="Calibri" panose="020F0502020204030204" pitchFamily="34" charset="-120"/>
               </a:rPr>
               <a:t>Presentation file (PPT or PDF) (Y/N)</a:t>
             </a:r>
@@ -5389,11 +4927,6 @@
         </p:txBody>
       </p:sp>
     </p:spTree>
-    <p:extLst>
-      <p:ext uri="{BB962C8B-B14F-4D97-AF65-F5344CB8AC3E}">
-        <p14:creationId xmlns:p14="http://schemas.microsoft.com/office/powerpoint/2010/main" val="180699301"/>
-      </p:ext>
-    </p:extLst>
   </p:cSld>
   <p:clrMapOvr>
     <a:masterClrMapping/>
@@ -5433,7 +4966,6 @@
             <a:avLst/>
           </a:prstGeom>
           <a:noFill/>
-          <a:ln/>
         </p:spPr>
         <p:txBody>
           <a:bodyPr wrap="square" lIns="0" tIns="0" rIns="0" bIns="0" rtlCol="0" anchor="ctr"/>
@@ -5447,9 +4979,9 @@
                 <a:solidFill>
                   <a:srgbClr val="14142B"/>
                 </a:solidFill>
-                <a:latin typeface="Arial" pitchFamily="34" charset="0"/>
-                <a:ea typeface="Arial" pitchFamily="34" charset="-122"/>
-                <a:cs typeface="Arial" pitchFamily="34" charset="-120"/>
+                <a:latin typeface="Arial" panose="020B0604020202020204" pitchFamily="34" charset="0"/>
+                <a:ea typeface="Arial" panose="020B0604020202020204" pitchFamily="34" charset="-122"/>
+                <a:cs typeface="Arial" panose="020B0604020202020204" pitchFamily="34" charset="-120"/>
               </a:rPr>
               <a:t>Thank you</a:t>
             </a:r>
@@ -5472,7 +5004,6 @@
             <a:avLst/>
           </a:prstGeom>
           <a:noFill/>
-          <a:ln/>
         </p:spPr>
         <p:txBody>
           <a:bodyPr wrap="square" lIns="0" tIns="0" rIns="0" bIns="0" rtlCol="0" anchor="ctr"/>
@@ -5486,9 +5017,9 @@
                 <a:solidFill>
                   <a:srgbClr val="63637E"/>
                 </a:solidFill>
-                <a:latin typeface="Calibri" pitchFamily="34" charset="0"/>
-                <a:ea typeface="Calibri" pitchFamily="34" charset="-122"/>
-                <a:cs typeface="Calibri" pitchFamily="34" charset="-120"/>
+                <a:latin typeface="Calibri" panose="020F0502020204030204" pitchFamily="34" charset="0"/>
+                <a:ea typeface="Calibri" panose="020F0502020204030204" pitchFamily="34" charset="-122"/>
+                <a:cs typeface="Calibri" panose="020F0502020204030204" pitchFamily="34" charset="-120"/>
               </a:rPr>
               <a:t>Organised by the Language AI Team and the PRISM Team, Samsung R&amp;D Institute India</a:t>
             </a:r>
@@ -5498,13 +5029,7 @@
       </p:sp>
       <p:sp>
         <p:nvSpPr>
-          <p:cNvPr id="4" name="TextBox 3">
-            <a:extLst>
-              <a:ext uri="{FF2B5EF4-FFF2-40B4-BE49-F238E27FC236}">
-                <a16:creationId xmlns:a16="http://schemas.microsoft.com/office/drawing/2014/main" id="{58725AD1-F481-4540-06B2-56E78BDF7E44}"/>
-              </a:ext>
-            </a:extLst>
-          </p:cNvPr>
+          <p:cNvPr id="4" name="TextBox 3"/>
           <p:cNvSpPr txBox="1"/>
           <p:nvPr/>
         </p:nvSpPr>
@@ -5558,13 +5083,7 @@
       </p:sp>
       <p:sp>
         <p:nvSpPr>
-          <p:cNvPr id="6" name="TextBox 5">
-            <a:extLst>
-              <a:ext uri="{FF2B5EF4-FFF2-40B4-BE49-F238E27FC236}">
-                <a16:creationId xmlns:a16="http://schemas.microsoft.com/office/drawing/2014/main" id="{69AC107C-78DC-54FE-F1F1-D9C42595F167}"/>
-              </a:ext>
-            </a:extLst>
-          </p:cNvPr>
+          <p:cNvPr id="6" name="TextBox 5"/>
           <p:cNvSpPr txBox="1"/>
           <p:nvPr/>
         </p:nvSpPr>
@@ -5599,6 +5118,12 @@
               <a:t>Samsung PRISM Generative AI Hackathon • Theme 05
 Autonomous Partners • SRM Institute of Science and Technology</a:t>
             </a:r>
+            <a:endParaRPr sz="1400" b="0">
+              <a:solidFill>
+                <a:srgbClr val="69697D"/>
+              </a:solidFill>
+              <a:latin typeface="Aptos"/>
+            </a:endParaRPr>
           </a:p>
         </p:txBody>
       </p:sp>
@@ -5629,13 +5154,7 @@
       </p:grpSpPr>
       <p:sp>
         <p:nvSpPr>
-          <p:cNvPr id="10" name="Rounded Rectangle 3">
-            <a:extLst>
-              <a:ext uri="{FF2B5EF4-FFF2-40B4-BE49-F238E27FC236}">
-                <a16:creationId xmlns:a16="http://schemas.microsoft.com/office/drawing/2014/main" id="{4213E9BD-2140-3C3D-00D2-108337414A31}"/>
-              </a:ext>
-            </a:extLst>
-          </p:cNvPr>
+          <p:cNvPr id="10" name="Rounded Rectangle 3"/>
           <p:cNvSpPr>
             <a:spLocks noGrp="1" noRot="1" noMove="1" noResize="1" noEditPoints="1" noAdjustHandles="1" noChangeArrowheads="1" noChangeShapeType="1"/>
           </p:cNvSpPr>
@@ -5787,13 +5306,7 @@
       </p:sp>
       <p:sp>
         <p:nvSpPr>
-          <p:cNvPr id="9" name="Rounded Rectangle 3">
-            <a:extLst>
-              <a:ext uri="{FF2B5EF4-FFF2-40B4-BE49-F238E27FC236}">
-                <a16:creationId xmlns:a16="http://schemas.microsoft.com/office/drawing/2014/main" id="{B860E10A-1645-E66A-221C-30E82825A5BE}"/>
-              </a:ext>
-            </a:extLst>
-          </p:cNvPr>
+          <p:cNvPr id="9" name="Rounded Rectangle 3"/>
           <p:cNvSpPr>
             <a:spLocks noGrp="1" noRot="1" noMove="1" noResize="1" noEditPoints="1" noAdjustHandles="1" noChangeArrowheads="1" noChangeShapeType="1"/>
           </p:cNvSpPr>
@@ -5929,19 +5442,12 @@
           </a:lstStyle>
           <a:p>
             <a:pPr algn="ctr"/>
-            <a:endParaRPr/>
-          </a:p>
-        </p:txBody>
-      </p:sp>
-      <p:sp>
-        <p:nvSpPr>
-          <p:cNvPr id="2" name="Title 1">
-            <a:extLst>
-              <a:ext uri="{FF2B5EF4-FFF2-40B4-BE49-F238E27FC236}">
-                <a16:creationId xmlns:a16="http://schemas.microsoft.com/office/drawing/2014/main" id="{51353DB3-FB86-4452-A4FB-E7F4BEA62856}"/>
-              </a:ext>
-            </a:extLst>
-          </p:cNvPr>
+          </a:p>
+        </p:txBody>
+      </p:sp>
+      <p:sp>
+        <p:nvSpPr>
+          <p:cNvPr id="2" name="Title 1"/>
           <p:cNvSpPr>
             <a:spLocks noGrp="1"/>
           </p:cNvSpPr>
@@ -5967,7 +5473,7 @@
                   <a:srgbClr val="704EA6"/>
                 </a:solidFill>
                 <a:latin typeface="+mn-lt"/>
-                <a:cs typeface="Arial" pitchFamily="34" charset="-120"/>
+                <a:cs typeface="Arial" panose="020B0604020202020204" pitchFamily="34" charset="-120"/>
               </a:rPr>
               <a:t>Theme – 05</a:t>
             </a:r>
@@ -5977,7 +5483,7 @@
                   <a:srgbClr val="704EA6"/>
                 </a:solidFill>
                 <a:latin typeface="+mn-lt"/>
-                <a:cs typeface="Arial" pitchFamily="34" charset="-120"/>
+                <a:cs typeface="Arial" panose="020B0604020202020204" pitchFamily="34" charset="-120"/>
               </a:rPr>
             </a:br>
             <a:r>
@@ -6002,20 +5508,14 @@
                 <a:srgbClr val="704EA6"/>
               </a:solidFill>
               <a:latin typeface="+mn-lt"/>
-              <a:cs typeface="Arial" pitchFamily="34" charset="-120"/>
+              <a:cs typeface="Arial" panose="020B0604020202020204" pitchFamily="34" charset="-120"/>
             </a:endParaRPr>
           </a:p>
         </p:txBody>
       </p:sp>
       <p:sp>
         <p:nvSpPr>
-          <p:cNvPr id="6" name="TextBox 5">
-            <a:extLst>
-              <a:ext uri="{FF2B5EF4-FFF2-40B4-BE49-F238E27FC236}">
-                <a16:creationId xmlns:a16="http://schemas.microsoft.com/office/drawing/2014/main" id="{D18C22BD-30B8-119E-351E-38C4D78DEBD8}"/>
-              </a:ext>
-            </a:extLst>
-          </p:cNvPr>
+          <p:cNvPr id="6" name="TextBox 5"/>
           <p:cNvSpPr txBox="1"/>
           <p:nvPr/>
         </p:nvSpPr>
@@ -6044,6 +5544,12 @@
               </a:rPr>
               <a:t>What the challenge asks</a:t>
             </a:r>
+            <a:endParaRPr lang="en-IN" sz="2400" b="1">
+              <a:solidFill>
+                <a:srgbClr val="6B3FBE"/>
+              </a:solidFill>
+              <a:latin typeface="Aptos"/>
+            </a:endParaRPr>
           </a:p>
           <a:p>
             <a:endParaRPr lang="en-IN"/>
@@ -6052,13 +5558,7 @@
       </p:sp>
       <p:sp>
         <p:nvSpPr>
-          <p:cNvPr id="8" name="TextBox 7">
-            <a:extLst>
-              <a:ext uri="{FF2B5EF4-FFF2-40B4-BE49-F238E27FC236}">
-                <a16:creationId xmlns:a16="http://schemas.microsoft.com/office/drawing/2014/main" id="{4B142559-4F52-56A4-AECF-4F21027949CB}"/>
-              </a:ext>
-            </a:extLst>
-          </p:cNvPr>
+          <p:cNvPr id="8" name="TextBox 7"/>
           <p:cNvSpPr txBox="1"/>
           <p:nvPr/>
         </p:nvSpPr>
@@ -6092,18 +5592,18 @@
               </a:rPr>
               <a:t>Our solution - KAIZEN's interpretation</a:t>
             </a:r>
-          </a:p>
-        </p:txBody>
-      </p:sp>
-      <p:sp>
-        <p:nvSpPr>
-          <p:cNvPr id="12" name="TextBox 11">
-            <a:extLst>
-              <a:ext uri="{FF2B5EF4-FFF2-40B4-BE49-F238E27FC236}">
-                <a16:creationId xmlns:a16="http://schemas.microsoft.com/office/drawing/2014/main" id="{F2353A97-DC2C-3A37-2DEA-9D9EEE815727}"/>
-              </a:ext>
-            </a:extLst>
-          </p:cNvPr>
+            <a:endParaRPr lang="en-IN" sz="2400" b="1">
+              <a:solidFill>
+                <a:srgbClr val="1CB8C2"/>
+              </a:solidFill>
+              <a:latin typeface="Aptos"/>
+            </a:endParaRPr>
+          </a:p>
+        </p:txBody>
+      </p:sp>
+      <p:sp>
+        <p:nvSpPr>
+          <p:cNvPr id="12" name="TextBox 11"/>
           <p:cNvSpPr txBox="1"/>
           <p:nvPr/>
         </p:nvSpPr>
@@ -6138,6 +5638,7 @@
               <a:rPr lang="en-US" sz="2000"/>
               <a:t>• Keep the conversation alive while the agent reasons.</a:t>
             </a:r>
+            <a:endParaRPr lang="en-US" sz="2000"/>
           </a:p>
           <a:p>
             <a:pPr>
@@ -6155,6 +5656,7 @@
               <a:rPr lang="en-US" sz="2000"/>
               <a:t>• Recover cleanly from mid-turn interruptions instead of restarting.</a:t>
             </a:r>
+            <a:endParaRPr lang="en-US" sz="2000"/>
           </a:p>
           <a:p>
             <a:pPr>
@@ -6172,6 +5674,7 @@
               <a:rPr lang="en-US" sz="2000"/>
               <a:t>• Adapt when the user's goal changes without losing relevant session context.</a:t>
             </a:r>
+            <a:endParaRPr lang="en-US" sz="2000"/>
           </a:p>
           <a:p>
             <a:pPr>
@@ -6189,18 +5692,13 @@
               <a:rPr lang="en-US" sz="2000"/>
               <a:t>• Build a reliable real-time agent structure, not just a chat wrapper.</a:t>
             </a:r>
-          </a:p>
-        </p:txBody>
-      </p:sp>
-      <p:sp>
-        <p:nvSpPr>
-          <p:cNvPr id="14" name="TextBox 13">
-            <a:extLst>
-              <a:ext uri="{FF2B5EF4-FFF2-40B4-BE49-F238E27FC236}">
-                <a16:creationId xmlns:a16="http://schemas.microsoft.com/office/drawing/2014/main" id="{154A16C5-C0DF-03ED-A17C-61BF5AFAB7D5}"/>
-              </a:ext>
-            </a:extLst>
-          </p:cNvPr>
+            <a:endParaRPr lang="en-US" sz="2000"/>
+          </a:p>
+        </p:txBody>
+      </p:sp>
+      <p:sp>
+        <p:nvSpPr>
+          <p:cNvPr id="14" name="TextBox 13"/>
           <p:cNvSpPr txBox="1"/>
           <p:nvPr/>
         </p:nvSpPr>
@@ -6235,6 +5733,7 @@
               <a:rPr lang="en-US" sz="2000"/>
               <a:t>• Full-duplex voice with real-time audio streaming.</a:t>
             </a:r>
+            <a:endParaRPr lang="en-US" sz="2000"/>
           </a:p>
           <a:p>
             <a:pPr>
@@ -6252,6 +5751,7 @@
               <a:rPr lang="en-US" sz="2000"/>
               <a:t>• Barge-in handling that flushes speech and marks the turn interrupted.</a:t>
             </a:r>
+            <a:endParaRPr lang="en-US" sz="2000"/>
           </a:p>
           <a:p>
             <a:pPr>
@@ -6269,6 +5769,7 @@
               <a:rPr lang="en-US" sz="2000"/>
               <a:t>• State-aware UI with idle / listening / reasoning / speaking / interrupted modes.</a:t>
             </a:r>
+            <a:endParaRPr lang="en-US" sz="2000"/>
           </a:p>
           <a:p>
             <a:pPr>
@@ -6286,15 +5787,11 @@
               <a:rPr lang="en-US" sz="2000"/>
               <a:t>• Session-local memory vault + observer + learning loop keep context alive.</a:t>
             </a:r>
+            <a:endParaRPr lang="en-US" sz="2000"/>
           </a:p>
         </p:txBody>
       </p:sp>
     </p:spTree>
-    <p:extLst>
-      <p:ext uri="{BB962C8B-B14F-4D97-AF65-F5344CB8AC3E}">
-        <p14:creationId xmlns:p14="http://schemas.microsoft.com/office/powerpoint/2010/main" val="256478858"/>
-      </p:ext>
-    </p:extLst>
   </p:cSld>
   <p:clrMapOvr>
     <a:masterClrMapping/>
@@ -6321,13 +5818,7 @@
       </p:grpSpPr>
       <p:sp>
         <p:nvSpPr>
-          <p:cNvPr id="2" name="Title 1">
-            <a:extLst>
-              <a:ext uri="{FF2B5EF4-FFF2-40B4-BE49-F238E27FC236}">
-                <a16:creationId xmlns:a16="http://schemas.microsoft.com/office/drawing/2014/main" id="{51353DB3-FB86-4452-A4FB-E7F4BEA62856}"/>
-              </a:ext>
-            </a:extLst>
-          </p:cNvPr>
+          <p:cNvPr id="2" name="Title 1"/>
           <p:cNvSpPr>
             <a:spLocks noGrp="1"/>
           </p:cNvSpPr>
@@ -6354,22 +5845,23 @@
                   <a:srgbClr val="704EA6"/>
                 </a:solidFill>
                 <a:latin typeface="+mn-lt"/>
-                <a:cs typeface="Arial" pitchFamily="34" charset="-120"/>
+                <a:cs typeface="Arial" panose="020B0604020202020204" pitchFamily="34" charset="-120"/>
               </a:rPr>
               <a:t>Existing Solutions &amp; Gaps</a:t>
             </a:r>
-          </a:p>
-        </p:txBody>
-      </p:sp>
-      <p:sp>
-        <p:nvSpPr>
-          <p:cNvPr id="5" name="TextBox 4">
-            <a:extLst>
-              <a:ext uri="{FF2B5EF4-FFF2-40B4-BE49-F238E27FC236}">
-                <a16:creationId xmlns:a16="http://schemas.microsoft.com/office/drawing/2014/main" id="{8DFE6AC3-AB5E-32F7-F1C4-3BDF1B337D35}"/>
-              </a:ext>
-            </a:extLst>
-          </p:cNvPr>
+            <a:endParaRPr lang="en-IN" b="1">
+              <a:solidFill>
+                <a:srgbClr val="704EA6"/>
+              </a:solidFill>
+              <a:latin typeface="+mn-lt"/>
+              <a:cs typeface="Arial" panose="020B0604020202020204" pitchFamily="34" charset="-120"/>
+            </a:endParaRPr>
+          </a:p>
+        </p:txBody>
+      </p:sp>
+      <p:sp>
+        <p:nvSpPr>
+          <p:cNvPr id="5" name="TextBox 4"/>
           <p:cNvSpPr txBox="1"/>
           <p:nvPr/>
         </p:nvSpPr>
@@ -6403,6 +5895,12 @@
               </a:rPr>
               <a:t>Most assistants follow a linear loop: listen → think → speak. </a:t>
             </a:r>
+            <a:endParaRPr lang="en-US" sz="2000" b="1">
+              <a:solidFill>
+                <a:srgbClr val="181837"/>
+              </a:solidFill>
+              <a:latin typeface="Aptos"/>
+            </a:endParaRPr>
           </a:p>
           <a:p>
             <a:pPr algn="ctr">
@@ -6419,18 +5917,18 @@
               </a:rPr>
               <a:t>A user interruption often breaks that loop.</a:t>
             </a:r>
-          </a:p>
-        </p:txBody>
-      </p:sp>
-      <p:sp>
-        <p:nvSpPr>
-          <p:cNvPr id="7" name="TextBox 6">
-            <a:extLst>
-              <a:ext uri="{FF2B5EF4-FFF2-40B4-BE49-F238E27FC236}">
-                <a16:creationId xmlns:a16="http://schemas.microsoft.com/office/drawing/2014/main" id="{58D2B85B-DD4D-43B5-BC09-3FC651D4E29E}"/>
-              </a:ext>
-            </a:extLst>
-          </p:cNvPr>
+            <a:endParaRPr lang="en-US" sz="2000" b="1">
+              <a:solidFill>
+                <a:srgbClr val="181837"/>
+              </a:solidFill>
+              <a:latin typeface="Aptos"/>
+            </a:endParaRPr>
+          </a:p>
+        </p:txBody>
+      </p:sp>
+      <p:sp>
+        <p:nvSpPr>
+          <p:cNvPr id="7" name="TextBox 6"/>
           <p:cNvSpPr txBox="1"/>
           <p:nvPr/>
         </p:nvSpPr>
@@ -6464,18 +5962,18 @@
               </a:rPr>
               <a:t>Typical approach</a:t>
             </a:r>
-          </a:p>
-        </p:txBody>
-      </p:sp>
-      <p:sp>
-        <p:nvSpPr>
-          <p:cNvPr id="9" name="Rounded Rectangle 8">
-            <a:extLst>
-              <a:ext uri="{FF2B5EF4-FFF2-40B4-BE49-F238E27FC236}">
-                <a16:creationId xmlns:a16="http://schemas.microsoft.com/office/drawing/2014/main" id="{6C16EBC4-770F-39ED-4382-BAAA48938ADD}"/>
-              </a:ext>
-            </a:extLst>
-          </p:cNvPr>
+            <a:endParaRPr sz="1500" b="1">
+              <a:solidFill>
+                <a:srgbClr val="6B3FBE"/>
+              </a:solidFill>
+              <a:latin typeface="Aptos"/>
+            </a:endParaRPr>
+          </a:p>
+        </p:txBody>
+      </p:sp>
+      <p:sp>
+        <p:nvSpPr>
+          <p:cNvPr id="9" name="Rounded Rectangle 8"/>
           <p:cNvSpPr/>
           <p:nvPr/>
         </p:nvSpPr>
@@ -6515,19 +6013,12 @@
           <a:lstStyle/>
           <a:p>
             <a:pPr algn="ctr"/>
-            <a:endParaRPr/>
-          </a:p>
-        </p:txBody>
-      </p:sp>
-      <p:sp>
-        <p:nvSpPr>
-          <p:cNvPr id="11" name="TextBox 10">
-            <a:extLst>
-              <a:ext uri="{FF2B5EF4-FFF2-40B4-BE49-F238E27FC236}">
-                <a16:creationId xmlns:a16="http://schemas.microsoft.com/office/drawing/2014/main" id="{4B8AA140-51E7-0E23-E012-1BE58630F34F}"/>
-              </a:ext>
-            </a:extLst>
-          </p:cNvPr>
+          </a:p>
+        </p:txBody>
+      </p:sp>
+      <p:sp>
+        <p:nvSpPr>
+          <p:cNvPr id="11" name="TextBox 10"/>
           <p:cNvSpPr txBox="1"/>
           <p:nvPr/>
         </p:nvSpPr>
@@ -6561,18 +6052,18 @@
               </a:rPr>
               <a:t>Turn-based voice</a:t>
             </a:r>
-          </a:p>
-        </p:txBody>
-      </p:sp>
-      <p:sp>
-        <p:nvSpPr>
-          <p:cNvPr id="13" name="Rounded Rectangle 14">
-            <a:extLst>
-              <a:ext uri="{FF2B5EF4-FFF2-40B4-BE49-F238E27FC236}">
-                <a16:creationId xmlns:a16="http://schemas.microsoft.com/office/drawing/2014/main" id="{52A3B4F5-9E11-1BEB-86A8-B58E25728A3C}"/>
-              </a:ext>
-            </a:extLst>
-          </p:cNvPr>
+            <a:endParaRPr sz="1400" b="1">
+              <a:solidFill>
+                <a:srgbClr val="232337"/>
+              </a:solidFill>
+              <a:latin typeface="Aptos"/>
+            </a:endParaRPr>
+          </a:p>
+        </p:txBody>
+      </p:sp>
+      <p:sp>
+        <p:nvSpPr>
+          <p:cNvPr id="13" name="Rounded Rectangle 14"/>
           <p:cNvSpPr/>
           <p:nvPr/>
         </p:nvSpPr>
@@ -6618,13 +6109,7 @@
       </p:sp>
       <p:sp>
         <p:nvSpPr>
-          <p:cNvPr id="15" name="TextBox 14">
-            <a:extLst>
-              <a:ext uri="{FF2B5EF4-FFF2-40B4-BE49-F238E27FC236}">
-                <a16:creationId xmlns:a16="http://schemas.microsoft.com/office/drawing/2014/main" id="{02E0FFCD-6184-BBFE-C43D-07199379922C}"/>
-              </a:ext>
-            </a:extLst>
-          </p:cNvPr>
+          <p:cNvPr id="15" name="TextBox 14"/>
           <p:cNvSpPr txBox="1"/>
           <p:nvPr/>
         </p:nvSpPr>
@@ -6658,18 +6143,18 @@
               </a:rPr>
               <a:t>Restart on change</a:t>
             </a:r>
-          </a:p>
-        </p:txBody>
-      </p:sp>
-      <p:sp>
-        <p:nvSpPr>
-          <p:cNvPr id="17" name="Rounded Rectangle 20">
-            <a:extLst>
-              <a:ext uri="{FF2B5EF4-FFF2-40B4-BE49-F238E27FC236}">
-                <a16:creationId xmlns:a16="http://schemas.microsoft.com/office/drawing/2014/main" id="{74A437C3-6F39-AAC4-8692-70670A3CC08B}"/>
-              </a:ext>
-            </a:extLst>
-          </p:cNvPr>
+            <a:endParaRPr sz="1400" b="1">
+              <a:solidFill>
+                <a:srgbClr val="232337"/>
+              </a:solidFill>
+              <a:latin typeface="Aptos"/>
+            </a:endParaRPr>
+          </a:p>
+        </p:txBody>
+      </p:sp>
+      <p:sp>
+        <p:nvSpPr>
+          <p:cNvPr id="17" name="Rounded Rectangle 20"/>
           <p:cNvSpPr/>
           <p:nvPr/>
         </p:nvSpPr>
@@ -6715,13 +6200,7 @@
       </p:sp>
       <p:sp>
         <p:nvSpPr>
-          <p:cNvPr id="19" name="TextBox 18">
-            <a:extLst>
-              <a:ext uri="{FF2B5EF4-FFF2-40B4-BE49-F238E27FC236}">
-                <a16:creationId xmlns:a16="http://schemas.microsoft.com/office/drawing/2014/main" id="{DB8E94CA-47FC-86C7-E26E-6017936C38B2}"/>
-              </a:ext>
-            </a:extLst>
-          </p:cNvPr>
+          <p:cNvPr id="19" name="TextBox 18"/>
           <p:cNvSpPr txBox="1"/>
           <p:nvPr/>
         </p:nvSpPr>
@@ -6755,18 +6234,18 @@
               </a:rPr>
               <a:t>Passive context</a:t>
             </a:r>
-          </a:p>
-        </p:txBody>
-      </p:sp>
-      <p:sp>
-        <p:nvSpPr>
-          <p:cNvPr id="21" name="Rounded Rectangle 26">
-            <a:extLst>
-              <a:ext uri="{FF2B5EF4-FFF2-40B4-BE49-F238E27FC236}">
-                <a16:creationId xmlns:a16="http://schemas.microsoft.com/office/drawing/2014/main" id="{72A269D9-FCC2-D9EC-1231-533ED9FA95B3}"/>
-              </a:ext>
-            </a:extLst>
-          </p:cNvPr>
+            <a:endParaRPr sz="1400" b="1">
+              <a:solidFill>
+                <a:srgbClr val="232337"/>
+              </a:solidFill>
+              <a:latin typeface="Aptos"/>
+            </a:endParaRPr>
+          </a:p>
+        </p:txBody>
+      </p:sp>
+      <p:sp>
+        <p:nvSpPr>
+          <p:cNvPr id="21" name="Rounded Rectangle 26"/>
           <p:cNvSpPr/>
           <p:nvPr/>
         </p:nvSpPr>
@@ -6812,13 +6291,7 @@
       </p:sp>
       <p:sp>
         <p:nvSpPr>
-          <p:cNvPr id="23" name="TextBox 22">
-            <a:extLst>
-              <a:ext uri="{FF2B5EF4-FFF2-40B4-BE49-F238E27FC236}">
-                <a16:creationId xmlns:a16="http://schemas.microsoft.com/office/drawing/2014/main" id="{EEE180AA-6ECB-A63F-A082-90E5E56C9FAC}"/>
-              </a:ext>
-            </a:extLst>
-          </p:cNvPr>
+          <p:cNvPr id="23" name="TextBox 22"/>
           <p:cNvSpPr txBox="1"/>
           <p:nvPr/>
         </p:nvSpPr>
@@ -6852,18 +6325,18 @@
               </a:rPr>
               <a:t>One-shot learning</a:t>
             </a:r>
-          </a:p>
-        </p:txBody>
-      </p:sp>
-      <p:sp>
-        <p:nvSpPr>
-          <p:cNvPr id="25" name="TextBox 24">
-            <a:extLst>
-              <a:ext uri="{FF2B5EF4-FFF2-40B4-BE49-F238E27FC236}">
-                <a16:creationId xmlns:a16="http://schemas.microsoft.com/office/drawing/2014/main" id="{15755B37-63A5-D31D-A754-97873476CB37}"/>
-              </a:ext>
-            </a:extLst>
-          </p:cNvPr>
+            <a:endParaRPr sz="1400" b="1">
+              <a:solidFill>
+                <a:srgbClr val="232337"/>
+              </a:solidFill>
+              <a:latin typeface="Aptos"/>
+            </a:endParaRPr>
+          </a:p>
+        </p:txBody>
+      </p:sp>
+      <p:sp>
+        <p:nvSpPr>
+          <p:cNvPr id="25" name="TextBox 24"/>
           <p:cNvSpPr txBox="1"/>
           <p:nvPr/>
         </p:nvSpPr>
@@ -6897,18 +6370,18 @@
               </a:rPr>
               <a:t>What goes wrong</a:t>
             </a:r>
-          </a:p>
-        </p:txBody>
-      </p:sp>
-      <p:sp>
-        <p:nvSpPr>
-          <p:cNvPr id="27" name="Rounded Rectangle 10">
-            <a:extLst>
-              <a:ext uri="{FF2B5EF4-FFF2-40B4-BE49-F238E27FC236}">
-                <a16:creationId xmlns:a16="http://schemas.microsoft.com/office/drawing/2014/main" id="{FD6500DC-DDC2-9B03-05FA-AF206FBFD6CC}"/>
-              </a:ext>
-            </a:extLst>
-          </p:cNvPr>
+            <a:endParaRPr sz="1500" b="1">
+              <a:solidFill>
+                <a:srgbClr val="6B3FBE"/>
+              </a:solidFill>
+              <a:latin typeface="Aptos"/>
+            </a:endParaRPr>
+          </a:p>
+        </p:txBody>
+      </p:sp>
+      <p:sp>
+        <p:nvSpPr>
+          <p:cNvPr id="27" name="Rounded Rectangle 10"/>
           <p:cNvSpPr/>
           <p:nvPr/>
         </p:nvSpPr>
@@ -6948,19 +6421,12 @@
           <a:lstStyle/>
           <a:p>
             <a:pPr algn="ctr"/>
-            <a:endParaRPr/>
-          </a:p>
-        </p:txBody>
-      </p:sp>
-      <p:sp>
-        <p:nvSpPr>
-          <p:cNvPr id="29" name="TextBox 28">
-            <a:extLst>
-              <a:ext uri="{FF2B5EF4-FFF2-40B4-BE49-F238E27FC236}">
-                <a16:creationId xmlns:a16="http://schemas.microsoft.com/office/drawing/2014/main" id="{7E4F46B7-B42F-4E4B-253C-D827065FF228}"/>
-              </a:ext>
-            </a:extLst>
-          </p:cNvPr>
+          </a:p>
+        </p:txBody>
+      </p:sp>
+      <p:sp>
+        <p:nvSpPr>
+          <p:cNvPr id="29" name="TextBox 28"/>
           <p:cNvSpPr txBox="1"/>
           <p:nvPr/>
         </p:nvSpPr>
@@ -6994,18 +6460,18 @@
               </a:rPr>
               <a:t>Waits for a turn to finish before adapting</a:t>
             </a:r>
-          </a:p>
-        </p:txBody>
-      </p:sp>
-      <p:sp>
-        <p:nvSpPr>
-          <p:cNvPr id="31" name="Rounded Rectangle 16">
-            <a:extLst>
-              <a:ext uri="{FF2B5EF4-FFF2-40B4-BE49-F238E27FC236}">
-                <a16:creationId xmlns:a16="http://schemas.microsoft.com/office/drawing/2014/main" id="{3E5023C2-5FFB-7654-BC2C-729B81A19C96}"/>
-              </a:ext>
-            </a:extLst>
-          </p:cNvPr>
+            <a:endParaRPr sz="1400" b="1">
+              <a:solidFill>
+                <a:srgbClr val="232337"/>
+              </a:solidFill>
+              <a:latin typeface="Aptos"/>
+            </a:endParaRPr>
+          </a:p>
+        </p:txBody>
+      </p:sp>
+      <p:sp>
+        <p:nvSpPr>
+          <p:cNvPr id="31" name="Rounded Rectangle 16"/>
           <p:cNvSpPr/>
           <p:nvPr/>
         </p:nvSpPr>
@@ -7051,13 +6517,7 @@
       </p:sp>
       <p:sp>
         <p:nvSpPr>
-          <p:cNvPr id="33" name="TextBox 32">
-            <a:extLst>
-              <a:ext uri="{FF2B5EF4-FFF2-40B4-BE49-F238E27FC236}">
-                <a16:creationId xmlns:a16="http://schemas.microsoft.com/office/drawing/2014/main" id="{893821D6-88A6-112B-EA0D-E99346B5E286}"/>
-              </a:ext>
-            </a:extLst>
-          </p:cNvPr>
+          <p:cNvPr id="33" name="TextBox 32"/>
           <p:cNvSpPr txBox="1"/>
           <p:nvPr/>
         </p:nvSpPr>
@@ -7091,18 +6551,18 @@
               </a:rPr>
               <a:t>Drops progress when the goal shifts</a:t>
             </a:r>
-          </a:p>
-        </p:txBody>
-      </p:sp>
-      <p:sp>
-        <p:nvSpPr>
-          <p:cNvPr id="35" name="Rounded Rectangle 22">
-            <a:extLst>
-              <a:ext uri="{FF2B5EF4-FFF2-40B4-BE49-F238E27FC236}">
-                <a16:creationId xmlns:a16="http://schemas.microsoft.com/office/drawing/2014/main" id="{923D20A2-1EE1-BBFB-C5AE-3AE60CC046D8}"/>
-              </a:ext>
-            </a:extLst>
-          </p:cNvPr>
+            <a:endParaRPr sz="1400" b="1">
+              <a:solidFill>
+                <a:srgbClr val="232337"/>
+              </a:solidFill>
+              <a:latin typeface="Aptos"/>
+            </a:endParaRPr>
+          </a:p>
+        </p:txBody>
+      </p:sp>
+      <p:sp>
+        <p:nvSpPr>
+          <p:cNvPr id="35" name="Rounded Rectangle 22"/>
           <p:cNvSpPr/>
           <p:nvPr/>
         </p:nvSpPr>
@@ -7148,13 +6608,7 @@
       </p:sp>
       <p:sp>
         <p:nvSpPr>
-          <p:cNvPr id="37" name="TextBox 36">
-            <a:extLst>
-              <a:ext uri="{FF2B5EF4-FFF2-40B4-BE49-F238E27FC236}">
-                <a16:creationId xmlns:a16="http://schemas.microsoft.com/office/drawing/2014/main" id="{FBF58EE9-9A6A-2373-14C8-C10753B11079}"/>
-              </a:ext>
-            </a:extLst>
-          </p:cNvPr>
+          <p:cNvPr id="37" name="TextBox 36"/>
           <p:cNvSpPr txBox="1"/>
           <p:nvPr/>
         </p:nvSpPr>
@@ -7188,18 +6642,18 @@
               </a:rPr>
               <a:t>Sees only the current utterance</a:t>
             </a:r>
-          </a:p>
-        </p:txBody>
-      </p:sp>
-      <p:sp>
-        <p:nvSpPr>
-          <p:cNvPr id="39" name="Rounded Rectangle 28">
-            <a:extLst>
-              <a:ext uri="{FF2B5EF4-FFF2-40B4-BE49-F238E27FC236}">
-                <a16:creationId xmlns:a16="http://schemas.microsoft.com/office/drawing/2014/main" id="{0F129807-326B-EA99-9C6D-9FF0F86FE560}"/>
-              </a:ext>
-            </a:extLst>
-          </p:cNvPr>
+            <a:endParaRPr sz="1400" b="1">
+              <a:solidFill>
+                <a:srgbClr val="232337"/>
+              </a:solidFill>
+              <a:latin typeface="Aptos"/>
+            </a:endParaRPr>
+          </a:p>
+        </p:txBody>
+      </p:sp>
+      <p:sp>
+        <p:nvSpPr>
+          <p:cNvPr id="39" name="Rounded Rectangle 28"/>
           <p:cNvSpPr/>
           <p:nvPr/>
         </p:nvSpPr>
@@ -7245,13 +6699,7 @@
       </p:sp>
       <p:sp>
         <p:nvSpPr>
-          <p:cNvPr id="41" name="TextBox 40">
-            <a:extLst>
-              <a:ext uri="{FF2B5EF4-FFF2-40B4-BE49-F238E27FC236}">
-                <a16:creationId xmlns:a16="http://schemas.microsoft.com/office/drawing/2014/main" id="{4C24EE2F-A379-56C3-F374-A9AC92FE1BAB}"/>
-              </a:ext>
-            </a:extLst>
-          </p:cNvPr>
+          <p:cNvPr id="41" name="TextBox 40"/>
           <p:cNvSpPr txBox="1"/>
           <p:nvPr/>
         </p:nvSpPr>
@@ -7285,18 +6733,18 @@
               </a:rPr>
               <a:t>Answers disappear after the task</a:t>
             </a:r>
-          </a:p>
-        </p:txBody>
-      </p:sp>
-      <p:sp>
-        <p:nvSpPr>
-          <p:cNvPr id="43" name="TextBox 42">
-            <a:extLst>
-              <a:ext uri="{FF2B5EF4-FFF2-40B4-BE49-F238E27FC236}">
-                <a16:creationId xmlns:a16="http://schemas.microsoft.com/office/drawing/2014/main" id="{4ED64193-81EE-9A7C-349C-2C8E753B953C}"/>
-              </a:ext>
-            </a:extLst>
-          </p:cNvPr>
+            <a:endParaRPr sz="1400" b="1">
+              <a:solidFill>
+                <a:srgbClr val="232337"/>
+              </a:solidFill>
+              <a:latin typeface="Aptos"/>
+            </a:endParaRPr>
+          </a:p>
+        </p:txBody>
+      </p:sp>
+      <p:sp>
+        <p:nvSpPr>
+          <p:cNvPr id="43" name="TextBox 42"/>
           <p:cNvSpPr txBox="1"/>
           <p:nvPr/>
         </p:nvSpPr>
@@ -7348,18 +6796,18 @@
               </a:rPr>
               <a:t> response</a:t>
             </a:r>
-          </a:p>
-        </p:txBody>
-      </p:sp>
-      <p:sp>
-        <p:nvSpPr>
-          <p:cNvPr id="45" name="Rounded Rectangle 12">
-            <a:extLst>
-              <a:ext uri="{FF2B5EF4-FFF2-40B4-BE49-F238E27FC236}">
-                <a16:creationId xmlns:a16="http://schemas.microsoft.com/office/drawing/2014/main" id="{CDB18F41-E560-61C3-BF3E-6B5544DB7D26}"/>
-              </a:ext>
-            </a:extLst>
-          </p:cNvPr>
+            <a:endParaRPr sz="1500" b="1">
+              <a:solidFill>
+                <a:srgbClr val="6B3FBE"/>
+              </a:solidFill>
+              <a:latin typeface="Aptos"/>
+            </a:endParaRPr>
+          </a:p>
+        </p:txBody>
+      </p:sp>
+      <p:sp>
+        <p:nvSpPr>
+          <p:cNvPr id="45" name="Rounded Rectangle 12"/>
           <p:cNvSpPr/>
           <p:nvPr/>
         </p:nvSpPr>
@@ -7399,19 +6847,12 @@
           <a:lstStyle/>
           <a:p>
             <a:pPr algn="ctr"/>
-            <a:endParaRPr/>
-          </a:p>
-        </p:txBody>
-      </p:sp>
-      <p:sp>
-        <p:nvSpPr>
-          <p:cNvPr id="47" name="TextBox 46">
-            <a:extLst>
-              <a:ext uri="{FF2B5EF4-FFF2-40B4-BE49-F238E27FC236}">
-                <a16:creationId xmlns:a16="http://schemas.microsoft.com/office/drawing/2014/main" id="{996FB034-D742-6B99-0091-D60D4C4EF645}"/>
-              </a:ext>
-            </a:extLst>
-          </p:cNvPr>
+          </a:p>
+        </p:txBody>
+      </p:sp>
+      <p:sp>
+        <p:nvSpPr>
+          <p:cNvPr id="47" name="TextBox 46"/>
           <p:cNvSpPr txBox="1"/>
           <p:nvPr/>
         </p:nvSpPr>
@@ -7445,18 +6886,18 @@
               </a:rPr>
               <a:t>Streams input/output and supports barge-in</a:t>
             </a:r>
-          </a:p>
-        </p:txBody>
-      </p:sp>
-      <p:sp>
-        <p:nvSpPr>
-          <p:cNvPr id="49" name="Rounded Rectangle 18">
-            <a:extLst>
-              <a:ext uri="{FF2B5EF4-FFF2-40B4-BE49-F238E27FC236}">
-                <a16:creationId xmlns:a16="http://schemas.microsoft.com/office/drawing/2014/main" id="{8A14D67A-1208-1BEB-611A-0CECE0FEBA1A}"/>
-              </a:ext>
-            </a:extLst>
-          </p:cNvPr>
+            <a:endParaRPr sz="1400" b="1">
+              <a:solidFill>
+                <a:srgbClr val="232337"/>
+              </a:solidFill>
+              <a:latin typeface="Aptos"/>
+            </a:endParaRPr>
+          </a:p>
+        </p:txBody>
+      </p:sp>
+      <p:sp>
+        <p:nvSpPr>
+          <p:cNvPr id="49" name="Rounded Rectangle 18"/>
           <p:cNvSpPr/>
           <p:nvPr/>
         </p:nvSpPr>
@@ -7502,13 +6943,7 @@
       </p:sp>
       <p:sp>
         <p:nvSpPr>
-          <p:cNvPr id="51" name="TextBox 50">
-            <a:extLst>
-              <a:ext uri="{FF2B5EF4-FFF2-40B4-BE49-F238E27FC236}">
-                <a16:creationId xmlns:a16="http://schemas.microsoft.com/office/drawing/2014/main" id="{2AE0EB1D-DB4B-7B2B-CC14-10724B95B290}"/>
-              </a:ext>
-            </a:extLst>
-          </p:cNvPr>
+          <p:cNvPr id="51" name="TextBox 50"/>
           <p:cNvSpPr txBox="1"/>
           <p:nvPr/>
         </p:nvSpPr>
@@ -7542,18 +6977,18 @@
               </a:rPr>
               <a:t>Preserves session state and routes the new intent</a:t>
             </a:r>
-          </a:p>
-        </p:txBody>
-      </p:sp>
-      <p:sp>
-        <p:nvSpPr>
-          <p:cNvPr id="53" name="Rounded Rectangle 24">
-            <a:extLst>
-              <a:ext uri="{FF2B5EF4-FFF2-40B4-BE49-F238E27FC236}">
-                <a16:creationId xmlns:a16="http://schemas.microsoft.com/office/drawing/2014/main" id="{6C84C3A8-2772-B2CA-2764-AEB3E9B9DF66}"/>
-              </a:ext>
-            </a:extLst>
-          </p:cNvPr>
+            <a:endParaRPr sz="1400" b="1">
+              <a:solidFill>
+                <a:srgbClr val="232337"/>
+              </a:solidFill>
+              <a:latin typeface="Aptos"/>
+            </a:endParaRPr>
+          </a:p>
+        </p:txBody>
+      </p:sp>
+      <p:sp>
+        <p:nvSpPr>
+          <p:cNvPr id="53" name="Rounded Rectangle 24"/>
           <p:cNvSpPr/>
           <p:nvPr/>
         </p:nvSpPr>
@@ -7599,13 +7034,7 @@
       </p:sp>
       <p:sp>
         <p:nvSpPr>
-          <p:cNvPr id="55" name="TextBox 54">
-            <a:extLst>
-              <a:ext uri="{FF2B5EF4-FFF2-40B4-BE49-F238E27FC236}">
-                <a16:creationId xmlns:a16="http://schemas.microsoft.com/office/drawing/2014/main" id="{1F1A5292-ABBE-51F0-BC95-FEA8179AE8B6}"/>
-              </a:ext>
-            </a:extLst>
-          </p:cNvPr>
+          <p:cNvPr id="55" name="TextBox 54"/>
           <p:cNvSpPr txBox="1"/>
           <p:nvPr/>
         </p:nvSpPr>
@@ -7639,18 +7068,18 @@
               </a:rPr>
               <a:t>Observer + local Vault add workflow context</a:t>
             </a:r>
-          </a:p>
-        </p:txBody>
-      </p:sp>
-      <p:sp>
-        <p:nvSpPr>
-          <p:cNvPr id="57" name="Rounded Rectangle 30">
-            <a:extLst>
-              <a:ext uri="{FF2B5EF4-FFF2-40B4-BE49-F238E27FC236}">
-                <a16:creationId xmlns:a16="http://schemas.microsoft.com/office/drawing/2014/main" id="{918F47DE-23BE-B8F5-42C8-7DBB832812D0}"/>
-              </a:ext>
-            </a:extLst>
-          </p:cNvPr>
+            <a:endParaRPr sz="1400" b="1">
+              <a:solidFill>
+                <a:srgbClr val="232337"/>
+              </a:solidFill>
+              <a:latin typeface="Aptos"/>
+            </a:endParaRPr>
+          </a:p>
+        </p:txBody>
+      </p:sp>
+      <p:sp>
+        <p:nvSpPr>
+          <p:cNvPr id="57" name="Rounded Rectangle 30"/>
           <p:cNvSpPr/>
           <p:nvPr/>
         </p:nvSpPr>
@@ -7696,13 +7125,7 @@
       </p:sp>
       <p:sp>
         <p:nvSpPr>
-          <p:cNvPr id="59" name="TextBox 58">
-            <a:extLst>
-              <a:ext uri="{FF2B5EF4-FFF2-40B4-BE49-F238E27FC236}">
-                <a16:creationId xmlns:a16="http://schemas.microsoft.com/office/drawing/2014/main" id="{E6ABA1D2-8D3B-0529-4E32-985FFA3B6749}"/>
-              </a:ext>
-            </a:extLst>
-          </p:cNvPr>
+          <p:cNvPr id="59" name="TextBox 58"/>
           <p:cNvSpPr txBox="1"/>
           <p:nvPr/>
         </p:nvSpPr>
@@ -7736,15 +7159,16 @@
               </a:rPr>
               <a:t>Voyager compiles solved workflows into reusable skills</a:t>
             </a:r>
+            <a:endParaRPr sz="1400" b="1">
+              <a:solidFill>
+                <a:srgbClr val="232337"/>
+              </a:solidFill>
+              <a:latin typeface="Aptos"/>
+            </a:endParaRPr>
           </a:p>
         </p:txBody>
       </p:sp>
     </p:spTree>
-    <p:extLst>
-      <p:ext uri="{BB962C8B-B14F-4D97-AF65-F5344CB8AC3E}">
-        <p14:creationId xmlns:p14="http://schemas.microsoft.com/office/powerpoint/2010/main" val="1549970416"/>
-      </p:ext>
-    </p:extLst>
   </p:cSld>
   <p:clrMapOvr>
     <a:masterClrMapping/>
@@ -7776,13 +7200,7 @@
       </p:grpSpPr>
       <p:sp>
         <p:nvSpPr>
-          <p:cNvPr id="2" name="Title 1">
-            <a:extLst>
-              <a:ext uri="{FF2B5EF4-FFF2-40B4-BE49-F238E27FC236}">
-                <a16:creationId xmlns:a16="http://schemas.microsoft.com/office/drawing/2014/main" id="{51353DB3-FB86-4452-A4FB-E7F4BEA62856}"/>
-              </a:ext>
-            </a:extLst>
-          </p:cNvPr>
+          <p:cNvPr id="2" name="Title 1"/>
           <p:cNvSpPr>
             <a:spLocks noGrp="1"/>
           </p:cNvSpPr>
@@ -7809,25 +7227,25 @@
               </a:rPr>
               <a:t>Our Solutions &amp; Architecture Diagram</a:t>
             </a:r>
+            <a:endParaRPr lang="en-IN" b="1">
+              <a:solidFill>
+                <a:srgbClr val="704EA6"/>
+              </a:solidFill>
+              <a:latin typeface="+mn-lt"/>
+            </a:endParaRPr>
           </a:p>
         </p:txBody>
       </p:sp>
       <p:pic>
         <p:nvPicPr>
-          <p:cNvPr id="4" name="Picture 3" descr="The diagram illustrates a complex system for managing multi-turn interactions, with components for input processing, various execution models, and output handling, ensuring coherent communication and state management in a conversational AI or dialogue system.&#10;&#10;AI-generated content may be incorrect.">
-            <a:extLst>
-              <a:ext uri="{FF2B5EF4-FFF2-40B4-BE49-F238E27FC236}">
-                <a16:creationId xmlns:a16="http://schemas.microsoft.com/office/drawing/2014/main" id="{FADFB69B-3A68-10C3-B2A5-53E26A705D5D}"/>
-              </a:ext>
-            </a:extLst>
-          </p:cNvPr>
+          <p:cNvPr id="4" name="Picture 3" descr="The diagram illustrates a complex system for managing multi-turn interactions, with components for input processing, various execution models, and output handling, ensuring coherent communication and state management in a conversational AI or dialogue system.&#10;&#10;AI-generated content may be incorrect."/>
           <p:cNvPicPr>
             <a:picLocks noChangeAspect="1"/>
           </p:cNvPicPr>
           <p:nvPr/>
         </p:nvPicPr>
         <p:blipFill>
-          <a:blip r:embed="rId3"/>
+          <a:blip r:embed="rId1"/>
           <a:stretch>
             <a:fillRect/>
           </a:stretch>
@@ -7843,11 +7261,6 @@
         </p:spPr>
       </p:pic>
     </p:spTree>
-    <p:extLst>
-      <p:ext uri="{BB962C8B-B14F-4D97-AF65-F5344CB8AC3E}">
-        <p14:creationId xmlns:p14="http://schemas.microsoft.com/office/powerpoint/2010/main" val="2579789072"/>
-      </p:ext>
-    </p:extLst>
   </p:cSld>
   <p:clrMapOvr>
     <a:overrideClrMapping bg1="lt1" tx1="dk1" bg2="lt2" tx2="dk2" accent1="accent1" accent2="accent2" accent3="accent3" accent4="accent4" accent5="accent5" accent6="accent6" hlink="hlink" folHlink="folHlink"/>
@@ -7874,13 +7287,7 @@
       </p:grpSpPr>
       <p:sp>
         <p:nvSpPr>
-          <p:cNvPr id="2" name="Title 1">
-            <a:extLst>
-              <a:ext uri="{FF2B5EF4-FFF2-40B4-BE49-F238E27FC236}">
-                <a16:creationId xmlns:a16="http://schemas.microsoft.com/office/drawing/2014/main" id="{51353DB3-FB86-4452-A4FB-E7F4BEA62856}"/>
-              </a:ext>
-            </a:extLst>
-          </p:cNvPr>
+          <p:cNvPr id="2" name="Title 1"/>
           <p:cNvSpPr>
             <a:spLocks noGrp="1"/>
           </p:cNvSpPr>
@@ -7902,15 +7309,52 @@
               </a:rPr>
               <a:t>Demo &amp; Product Walkthrough</a:t>
             </a:r>
+            <a:endParaRPr lang="en-IN" b="1">
+              <a:solidFill>
+                <a:srgbClr val="704EA6"/>
+              </a:solidFill>
+              <a:latin typeface="+mn-lt"/>
+            </a:endParaRPr>
+          </a:p>
+        </p:txBody>
+      </p:sp>
+      <p:sp>
+        <p:nvSpPr>
+          <p:cNvPr id="3" name="Text Box 2"/>
+          <p:cNvSpPr txBox="1"/>
+          <p:nvPr/>
+        </p:nvSpPr>
+        <p:spPr>
+          <a:xfrm>
+            <a:off x="838200" y="2254250"/>
+            <a:ext cx="5674360" cy="645160"/>
+          </a:xfrm>
+          <a:prstGeom prst="rect">
+            <a:avLst/>
+          </a:prstGeom>
+          <a:noFill/>
+        </p:spPr>
+        <p:txBody>
+          <a:bodyPr wrap="square" rtlCol="0">
+            <a:spAutoFit/>
+          </a:bodyPr>
+          <a:p>
+            <a:r>
+              <a:rPr lang="en-US" b="1" i="1"/>
+              <a:t>YOUTUBE LINK FOR DEMO WALKTHROUGH :</a:t>
+            </a:r>
+            <a:endParaRPr lang="en-US" b="1" i="1"/>
+          </a:p>
+          <a:p>
+            <a:r>
+              <a:rPr lang="en-US" altLang="en-US" b="1" i="1"/>
+              <a:t>https://youtu.be/15YEf9lTi2c?si=FnWbJ3V_XjJ6Mybw</a:t>
+            </a:r>
+            <a:endParaRPr lang="en-US" altLang="en-US" b="1" i="1"/>
           </a:p>
         </p:txBody>
       </p:sp>
     </p:spTree>
-    <p:extLst>
-      <p:ext uri="{BB962C8B-B14F-4D97-AF65-F5344CB8AC3E}">
-        <p14:creationId xmlns:p14="http://schemas.microsoft.com/office/powerpoint/2010/main" val="117824493"/>
-      </p:ext>
-    </p:extLst>
   </p:cSld>
   <p:clrMapOvr>
     <a:masterClrMapping/>
@@ -7937,13 +7381,7 @@
       </p:grpSpPr>
       <p:sp>
         <p:nvSpPr>
-          <p:cNvPr id="2" name="Title 1">
-            <a:extLst>
-              <a:ext uri="{FF2B5EF4-FFF2-40B4-BE49-F238E27FC236}">
-                <a16:creationId xmlns:a16="http://schemas.microsoft.com/office/drawing/2014/main" id="{51353DB3-FB86-4452-A4FB-E7F4BEA62856}"/>
-              </a:ext>
-            </a:extLst>
-          </p:cNvPr>
+          <p:cNvPr id="2" name="Title 1"/>
           <p:cNvSpPr>
             <a:spLocks noGrp="1"/>
           </p:cNvSpPr>
@@ -7966,9 +7404,9 @@
                 <a:solidFill>
                   <a:srgbClr val="704EA6"/>
                 </a:solidFill>
-                <a:latin typeface="Calibri" pitchFamily="34" charset="0"/>
-                <a:ea typeface="Calibri" pitchFamily="34" charset="-122"/>
-                <a:cs typeface="Calibri" pitchFamily="34" charset="-120"/>
+                <a:latin typeface="Calibri" panose="020F0502020204030204" pitchFamily="34" charset="0"/>
+                <a:ea typeface="Calibri" panose="020F0502020204030204" pitchFamily="34" charset="-122"/>
+                <a:cs typeface="Calibri" panose="020F0502020204030204" pitchFamily="34" charset="-120"/>
               </a:rPr>
               <a:t>Tools and tech stack used</a:t>
             </a:r>
@@ -7982,13 +7420,7 @@
       </p:sp>
       <p:sp>
         <p:nvSpPr>
-          <p:cNvPr id="5" name="Rounded Rectangle 3">
-            <a:extLst>
-              <a:ext uri="{FF2B5EF4-FFF2-40B4-BE49-F238E27FC236}">
-                <a16:creationId xmlns:a16="http://schemas.microsoft.com/office/drawing/2014/main" id="{777D8529-63DB-4517-6141-2C52C7ACF81B}"/>
-              </a:ext>
-            </a:extLst>
-          </p:cNvPr>
+          <p:cNvPr id="5" name="Rounded Rectangle 3"/>
           <p:cNvSpPr/>
           <p:nvPr/>
         </p:nvSpPr>
@@ -8028,19 +7460,12 @@
           <a:lstStyle/>
           <a:p>
             <a:pPr algn="ctr"/>
-            <a:endParaRPr/>
-          </a:p>
-        </p:txBody>
-      </p:sp>
-      <p:sp>
-        <p:nvSpPr>
-          <p:cNvPr id="7" name="TextBox 6">
-            <a:extLst>
-              <a:ext uri="{FF2B5EF4-FFF2-40B4-BE49-F238E27FC236}">
-                <a16:creationId xmlns:a16="http://schemas.microsoft.com/office/drawing/2014/main" id="{17334425-5C29-AC39-1D45-3F1BB1AF90B1}"/>
-              </a:ext>
-            </a:extLst>
-          </p:cNvPr>
+          </a:p>
+        </p:txBody>
+      </p:sp>
+      <p:sp>
+        <p:nvSpPr>
+          <p:cNvPr id="7" name="TextBox 6"/>
           <p:cNvSpPr txBox="1"/>
           <p:nvPr/>
         </p:nvSpPr>
@@ -8074,18 +7499,18 @@
               </a:rPr>
               <a:t>Desktop</a:t>
             </a:r>
-          </a:p>
-        </p:txBody>
-      </p:sp>
-      <p:sp>
-        <p:nvSpPr>
-          <p:cNvPr id="9" name="TextBox 8">
-            <a:extLst>
-              <a:ext uri="{FF2B5EF4-FFF2-40B4-BE49-F238E27FC236}">
-                <a16:creationId xmlns:a16="http://schemas.microsoft.com/office/drawing/2014/main" id="{5DBCE2C1-0678-687E-06BD-B6221CDF44B2}"/>
-              </a:ext>
-            </a:extLst>
-          </p:cNvPr>
+            <a:endParaRPr sz="1200" b="1">
+              <a:solidFill>
+                <a:srgbClr val="6B3FBE"/>
+              </a:solidFill>
+              <a:latin typeface="Aptos"/>
+            </a:endParaRPr>
+          </a:p>
+        </p:txBody>
+      </p:sp>
+      <p:sp>
+        <p:nvSpPr>
+          <p:cNvPr id="9" name="TextBox 8"/>
           <p:cNvSpPr txBox="1"/>
           <p:nvPr/>
         </p:nvSpPr>
@@ -8119,18 +7544,18 @@
               </a:rPr>
               <a:t>Electron 35</a:t>
             </a:r>
-          </a:p>
-        </p:txBody>
-      </p:sp>
-      <p:sp>
-        <p:nvSpPr>
-          <p:cNvPr id="11" name="TextBox 10">
-            <a:extLst>
-              <a:ext uri="{FF2B5EF4-FFF2-40B4-BE49-F238E27FC236}">
-                <a16:creationId xmlns:a16="http://schemas.microsoft.com/office/drawing/2014/main" id="{4D4F07E7-E6FE-0D22-3CCC-C4806D3E341C}"/>
-              </a:ext>
-            </a:extLst>
-          </p:cNvPr>
+            <a:endParaRPr sz="1500" b="1">
+              <a:solidFill>
+                <a:srgbClr val="181837"/>
+              </a:solidFill>
+              <a:latin typeface="Aptos"/>
+            </a:endParaRPr>
+          </a:p>
+        </p:txBody>
+      </p:sp>
+      <p:sp>
+        <p:nvSpPr>
+          <p:cNvPr id="11" name="TextBox 10"/>
           <p:cNvSpPr txBox="1"/>
           <p:nvPr/>
         </p:nvSpPr>
@@ -8164,18 +7589,18 @@
               </a:rPr>
               <a:t>Native Windows app shell</a:t>
             </a:r>
-          </a:p>
-        </p:txBody>
-      </p:sp>
-      <p:sp>
-        <p:nvSpPr>
-          <p:cNvPr id="13" name="Rounded Rectangle 7">
-            <a:extLst>
-              <a:ext uri="{FF2B5EF4-FFF2-40B4-BE49-F238E27FC236}">
-                <a16:creationId xmlns:a16="http://schemas.microsoft.com/office/drawing/2014/main" id="{6B9911F8-F0CD-928F-701A-3900E7D3BBC0}"/>
-              </a:ext>
-            </a:extLst>
-          </p:cNvPr>
+            <a:endParaRPr sz="1400" b="0">
+              <a:solidFill>
+                <a:srgbClr val="69697D"/>
+              </a:solidFill>
+              <a:latin typeface="Aptos"/>
+            </a:endParaRPr>
+          </a:p>
+        </p:txBody>
+      </p:sp>
+      <p:sp>
+        <p:nvSpPr>
+          <p:cNvPr id="13" name="Rounded Rectangle 7"/>
           <p:cNvSpPr/>
           <p:nvPr/>
         </p:nvSpPr>
@@ -8215,19 +7640,12 @@
           <a:lstStyle/>
           <a:p>
             <a:pPr algn="ctr"/>
-            <a:endParaRPr/>
-          </a:p>
-        </p:txBody>
-      </p:sp>
-      <p:sp>
-        <p:nvSpPr>
-          <p:cNvPr id="15" name="TextBox 14">
-            <a:extLst>
-              <a:ext uri="{FF2B5EF4-FFF2-40B4-BE49-F238E27FC236}">
-                <a16:creationId xmlns:a16="http://schemas.microsoft.com/office/drawing/2014/main" id="{F37BF88B-3858-3370-DB68-FC5FADA9E0C9}"/>
-              </a:ext>
-            </a:extLst>
-          </p:cNvPr>
+          </a:p>
+        </p:txBody>
+      </p:sp>
+      <p:sp>
+        <p:nvSpPr>
+          <p:cNvPr id="15" name="TextBox 14"/>
           <p:cNvSpPr txBox="1"/>
           <p:nvPr/>
         </p:nvSpPr>
@@ -8261,18 +7679,18 @@
               </a:rPr>
               <a:t>Frontend</a:t>
             </a:r>
-          </a:p>
-        </p:txBody>
-      </p:sp>
-      <p:sp>
-        <p:nvSpPr>
-          <p:cNvPr id="17" name="TextBox 16">
-            <a:extLst>
-              <a:ext uri="{FF2B5EF4-FFF2-40B4-BE49-F238E27FC236}">
-                <a16:creationId xmlns:a16="http://schemas.microsoft.com/office/drawing/2014/main" id="{FBB881CE-12D7-85CA-9224-872450E6A093}"/>
-              </a:ext>
-            </a:extLst>
-          </p:cNvPr>
+            <a:endParaRPr sz="1200" b="1">
+              <a:solidFill>
+                <a:srgbClr val="6B3FBE"/>
+              </a:solidFill>
+              <a:latin typeface="Aptos"/>
+            </a:endParaRPr>
+          </a:p>
+        </p:txBody>
+      </p:sp>
+      <p:sp>
+        <p:nvSpPr>
+          <p:cNvPr id="17" name="TextBox 16"/>
           <p:cNvSpPr txBox="1"/>
           <p:nvPr/>
         </p:nvSpPr>
@@ -8306,18 +7724,18 @@
               </a:rPr>
               <a:t>React 19 + Vite 6</a:t>
             </a:r>
-          </a:p>
-        </p:txBody>
-      </p:sp>
-      <p:sp>
-        <p:nvSpPr>
-          <p:cNvPr id="19" name="TextBox 18">
-            <a:extLst>
-              <a:ext uri="{FF2B5EF4-FFF2-40B4-BE49-F238E27FC236}">
-                <a16:creationId xmlns:a16="http://schemas.microsoft.com/office/drawing/2014/main" id="{B4943087-C502-F4AC-5D4E-2155369B42F7}"/>
-              </a:ext>
-            </a:extLst>
-          </p:cNvPr>
+            <a:endParaRPr sz="1500" b="1">
+              <a:solidFill>
+                <a:srgbClr val="181837"/>
+              </a:solidFill>
+              <a:latin typeface="Aptos"/>
+            </a:endParaRPr>
+          </a:p>
+        </p:txBody>
+      </p:sp>
+      <p:sp>
+        <p:nvSpPr>
+          <p:cNvPr id="19" name="TextBox 18"/>
           <p:cNvSpPr txBox="1"/>
           <p:nvPr/>
         </p:nvSpPr>
@@ -8351,18 +7769,18 @@
               </a:rPr>
               <a:t>TypeScript UI + real-time cockpit</a:t>
             </a:r>
-          </a:p>
-        </p:txBody>
-      </p:sp>
-      <p:sp>
-        <p:nvSpPr>
-          <p:cNvPr id="21" name="Rounded Rectangle 11">
-            <a:extLst>
-              <a:ext uri="{FF2B5EF4-FFF2-40B4-BE49-F238E27FC236}">
-                <a16:creationId xmlns:a16="http://schemas.microsoft.com/office/drawing/2014/main" id="{BF2D75A7-A3CD-8653-BB16-51E2B583EE0C}"/>
-              </a:ext>
-            </a:extLst>
-          </p:cNvPr>
+            <a:endParaRPr sz="1400" b="0">
+              <a:solidFill>
+                <a:srgbClr val="69697D"/>
+              </a:solidFill>
+              <a:latin typeface="Aptos"/>
+            </a:endParaRPr>
+          </a:p>
+        </p:txBody>
+      </p:sp>
+      <p:sp>
+        <p:nvSpPr>
+          <p:cNvPr id="21" name="Rounded Rectangle 11"/>
           <p:cNvSpPr/>
           <p:nvPr/>
         </p:nvSpPr>
@@ -8402,19 +7820,12 @@
           <a:lstStyle/>
           <a:p>
             <a:pPr algn="ctr"/>
-            <a:endParaRPr/>
-          </a:p>
-        </p:txBody>
-      </p:sp>
-      <p:sp>
-        <p:nvSpPr>
-          <p:cNvPr id="23" name="TextBox 22">
-            <a:extLst>
-              <a:ext uri="{FF2B5EF4-FFF2-40B4-BE49-F238E27FC236}">
-                <a16:creationId xmlns:a16="http://schemas.microsoft.com/office/drawing/2014/main" id="{942D7EEC-2AF2-87CF-E6CB-45706ABA5F1A}"/>
-              </a:ext>
-            </a:extLst>
-          </p:cNvPr>
+          </a:p>
+        </p:txBody>
+      </p:sp>
+      <p:sp>
+        <p:nvSpPr>
+          <p:cNvPr id="23" name="TextBox 22"/>
           <p:cNvSpPr txBox="1"/>
           <p:nvPr/>
         </p:nvSpPr>
@@ -8448,18 +7859,18 @@
               </a:rPr>
               <a:t>Styling</a:t>
             </a:r>
-          </a:p>
-        </p:txBody>
-      </p:sp>
-      <p:sp>
-        <p:nvSpPr>
-          <p:cNvPr id="25" name="TextBox 24">
-            <a:extLst>
-              <a:ext uri="{FF2B5EF4-FFF2-40B4-BE49-F238E27FC236}">
-                <a16:creationId xmlns:a16="http://schemas.microsoft.com/office/drawing/2014/main" id="{E640F447-3170-93B3-3F78-1115D3F233EF}"/>
-              </a:ext>
-            </a:extLst>
-          </p:cNvPr>
+            <a:endParaRPr sz="1200" b="1">
+              <a:solidFill>
+                <a:srgbClr val="6B3FBE"/>
+              </a:solidFill>
+              <a:latin typeface="Aptos"/>
+            </a:endParaRPr>
+          </a:p>
+        </p:txBody>
+      </p:sp>
+      <p:sp>
+        <p:nvSpPr>
+          <p:cNvPr id="25" name="TextBox 24"/>
           <p:cNvSpPr txBox="1"/>
           <p:nvPr/>
         </p:nvSpPr>
@@ -8493,18 +7904,18 @@
               </a:rPr>
               <a:t>Tailwind CSS 4</a:t>
             </a:r>
-          </a:p>
-        </p:txBody>
-      </p:sp>
-      <p:sp>
-        <p:nvSpPr>
-          <p:cNvPr id="27" name="TextBox 26">
-            <a:extLst>
-              <a:ext uri="{FF2B5EF4-FFF2-40B4-BE49-F238E27FC236}">
-                <a16:creationId xmlns:a16="http://schemas.microsoft.com/office/drawing/2014/main" id="{BED875FD-1B04-4F11-9929-BC9D677059F5}"/>
-              </a:ext>
-            </a:extLst>
-          </p:cNvPr>
+            <a:endParaRPr sz="1500" b="1">
+              <a:solidFill>
+                <a:srgbClr val="181837"/>
+              </a:solidFill>
+              <a:latin typeface="Aptos"/>
+            </a:endParaRPr>
+          </a:p>
+        </p:txBody>
+      </p:sp>
+      <p:sp>
+        <p:nvSpPr>
+          <p:cNvPr id="27" name="TextBox 26"/>
           <p:cNvSpPr txBox="1"/>
           <p:nvPr/>
         </p:nvSpPr>
@@ -8538,18 +7949,18 @@
               </a:rPr>
               <a:t>Dense systems-style interface</a:t>
             </a:r>
-          </a:p>
-        </p:txBody>
-      </p:sp>
-      <p:sp>
-        <p:nvSpPr>
-          <p:cNvPr id="29" name="Rounded Rectangle 15">
-            <a:extLst>
-              <a:ext uri="{FF2B5EF4-FFF2-40B4-BE49-F238E27FC236}">
-                <a16:creationId xmlns:a16="http://schemas.microsoft.com/office/drawing/2014/main" id="{FE1A1F21-0F26-577F-CABC-CD46B012C12B}"/>
-              </a:ext>
-            </a:extLst>
-          </p:cNvPr>
+            <a:endParaRPr sz="1400" b="0">
+              <a:solidFill>
+                <a:srgbClr val="69697D"/>
+              </a:solidFill>
+              <a:latin typeface="Aptos"/>
+            </a:endParaRPr>
+          </a:p>
+        </p:txBody>
+      </p:sp>
+      <p:sp>
+        <p:nvSpPr>
+          <p:cNvPr id="29" name="Rounded Rectangle 15"/>
           <p:cNvSpPr/>
           <p:nvPr/>
         </p:nvSpPr>
@@ -8589,19 +8000,12 @@
           <a:lstStyle/>
           <a:p>
             <a:pPr algn="ctr"/>
-            <a:endParaRPr/>
-          </a:p>
-        </p:txBody>
-      </p:sp>
-      <p:sp>
-        <p:nvSpPr>
-          <p:cNvPr id="31" name="TextBox 30">
-            <a:extLst>
-              <a:ext uri="{FF2B5EF4-FFF2-40B4-BE49-F238E27FC236}">
-                <a16:creationId xmlns:a16="http://schemas.microsoft.com/office/drawing/2014/main" id="{3E15D95B-87F9-EB68-FFDA-DD48ED22AB4F}"/>
-              </a:ext>
-            </a:extLst>
-          </p:cNvPr>
+          </a:p>
+        </p:txBody>
+      </p:sp>
+      <p:sp>
+        <p:nvSpPr>
+          <p:cNvPr id="31" name="TextBox 30"/>
           <p:cNvSpPr txBox="1"/>
           <p:nvPr/>
         </p:nvSpPr>
@@ -8635,18 +8039,18 @@
               </a:rPr>
               <a:t>AI</a:t>
             </a:r>
-          </a:p>
-        </p:txBody>
-      </p:sp>
-      <p:sp>
-        <p:nvSpPr>
-          <p:cNvPr id="33" name="TextBox 32">
-            <a:extLst>
-              <a:ext uri="{FF2B5EF4-FFF2-40B4-BE49-F238E27FC236}">
-                <a16:creationId xmlns:a16="http://schemas.microsoft.com/office/drawing/2014/main" id="{47C26C9C-6986-194A-FB5A-A478034CE3A7}"/>
-              </a:ext>
-            </a:extLst>
-          </p:cNvPr>
+            <a:endParaRPr sz="1200" b="1">
+              <a:solidFill>
+                <a:srgbClr val="6B3FBE"/>
+              </a:solidFill>
+              <a:latin typeface="Aptos"/>
+            </a:endParaRPr>
+          </a:p>
+        </p:txBody>
+      </p:sp>
+      <p:sp>
+        <p:nvSpPr>
+          <p:cNvPr id="33" name="TextBox 32"/>
           <p:cNvSpPr txBox="1"/>
           <p:nvPr/>
         </p:nvSpPr>
@@ -8680,18 +8084,18 @@
               </a:rPr>
               <a:t>Google GenAI SDK</a:t>
             </a:r>
-          </a:p>
-        </p:txBody>
-      </p:sp>
-      <p:sp>
-        <p:nvSpPr>
-          <p:cNvPr id="35" name="TextBox 34">
-            <a:extLst>
-              <a:ext uri="{FF2B5EF4-FFF2-40B4-BE49-F238E27FC236}">
-                <a16:creationId xmlns:a16="http://schemas.microsoft.com/office/drawing/2014/main" id="{C9AE1126-6AEC-9FF6-F965-51C9554CA838}"/>
-              </a:ext>
-            </a:extLst>
-          </p:cNvPr>
+            <a:endParaRPr sz="1500" b="1">
+              <a:solidFill>
+                <a:srgbClr val="181837"/>
+              </a:solidFill>
+              <a:latin typeface="Aptos"/>
+            </a:endParaRPr>
+          </a:p>
+        </p:txBody>
+      </p:sp>
+      <p:sp>
+        <p:nvSpPr>
+          <p:cNvPr id="35" name="TextBox 34"/>
           <p:cNvSpPr txBox="1"/>
           <p:nvPr/>
         </p:nvSpPr>
@@ -8725,18 +8129,18 @@
               </a:rPr>
               <a:t>Gemini Live + text generation</a:t>
             </a:r>
-          </a:p>
-        </p:txBody>
-      </p:sp>
-      <p:sp>
-        <p:nvSpPr>
-          <p:cNvPr id="37" name="Rounded Rectangle 19">
-            <a:extLst>
-              <a:ext uri="{FF2B5EF4-FFF2-40B4-BE49-F238E27FC236}">
-                <a16:creationId xmlns:a16="http://schemas.microsoft.com/office/drawing/2014/main" id="{C4978C8A-3D4D-61E5-C63A-F64A1346934E}"/>
-              </a:ext>
-            </a:extLst>
-          </p:cNvPr>
+            <a:endParaRPr sz="1400" b="0">
+              <a:solidFill>
+                <a:srgbClr val="69697D"/>
+              </a:solidFill>
+              <a:latin typeface="Aptos"/>
+            </a:endParaRPr>
+          </a:p>
+        </p:txBody>
+      </p:sp>
+      <p:sp>
+        <p:nvSpPr>
+          <p:cNvPr id="37" name="Rounded Rectangle 19"/>
           <p:cNvSpPr/>
           <p:nvPr/>
         </p:nvSpPr>
@@ -8776,19 +8180,12 @@
           <a:lstStyle/>
           <a:p>
             <a:pPr algn="ctr"/>
-            <a:endParaRPr/>
-          </a:p>
-        </p:txBody>
-      </p:sp>
-      <p:sp>
-        <p:nvSpPr>
-          <p:cNvPr id="39" name="TextBox 38">
-            <a:extLst>
-              <a:ext uri="{FF2B5EF4-FFF2-40B4-BE49-F238E27FC236}">
-                <a16:creationId xmlns:a16="http://schemas.microsoft.com/office/drawing/2014/main" id="{E9E51737-FF6C-A740-617C-A89B76FA7FDC}"/>
-              </a:ext>
-            </a:extLst>
-          </p:cNvPr>
+          </a:p>
+        </p:txBody>
+      </p:sp>
+      <p:sp>
+        <p:nvSpPr>
+          <p:cNvPr id="39" name="TextBox 38"/>
           <p:cNvSpPr txBox="1"/>
           <p:nvPr/>
         </p:nvSpPr>
@@ -8822,18 +8219,18 @@
               </a:rPr>
               <a:t>Realtime</a:t>
             </a:r>
-          </a:p>
-        </p:txBody>
-      </p:sp>
-      <p:sp>
-        <p:nvSpPr>
-          <p:cNvPr id="41" name="TextBox 40">
-            <a:extLst>
-              <a:ext uri="{FF2B5EF4-FFF2-40B4-BE49-F238E27FC236}">
-                <a16:creationId xmlns:a16="http://schemas.microsoft.com/office/drawing/2014/main" id="{8904C4F4-35CB-69D4-E8D2-AB58F8CB3756}"/>
-              </a:ext>
-            </a:extLst>
-          </p:cNvPr>
+            <a:endParaRPr sz="1200" b="1">
+              <a:solidFill>
+                <a:srgbClr val="6B3FBE"/>
+              </a:solidFill>
+              <a:latin typeface="Aptos"/>
+            </a:endParaRPr>
+          </a:p>
+        </p:txBody>
+      </p:sp>
+      <p:sp>
+        <p:nvSpPr>
+          <p:cNvPr id="41" name="TextBox 40"/>
           <p:cNvSpPr txBox="1"/>
           <p:nvPr/>
         </p:nvSpPr>
@@ -8867,18 +8264,18 @@
               </a:rPr>
               <a:t>WebSocket / PCM</a:t>
             </a:r>
-          </a:p>
-        </p:txBody>
-      </p:sp>
-      <p:sp>
-        <p:nvSpPr>
-          <p:cNvPr id="43" name="TextBox 42">
-            <a:extLst>
-              <a:ext uri="{FF2B5EF4-FFF2-40B4-BE49-F238E27FC236}">
-                <a16:creationId xmlns:a16="http://schemas.microsoft.com/office/drawing/2014/main" id="{5BC23B84-E8E7-BF8B-1892-4388E0D61D91}"/>
-              </a:ext>
-            </a:extLst>
-          </p:cNvPr>
+            <a:endParaRPr sz="1500" b="1">
+              <a:solidFill>
+                <a:srgbClr val="181837"/>
+              </a:solidFill>
+              <a:latin typeface="Aptos"/>
+            </a:endParaRPr>
+          </a:p>
+        </p:txBody>
+      </p:sp>
+      <p:sp>
+        <p:nvSpPr>
+          <p:cNvPr id="43" name="TextBox 42"/>
           <p:cNvSpPr txBox="1"/>
           <p:nvPr/>
         </p:nvSpPr>
@@ -8912,18 +8309,18 @@
               </a:rPr>
               <a:t>Bidirectional 16 kHz audio stream</a:t>
             </a:r>
-          </a:p>
-        </p:txBody>
-      </p:sp>
-      <p:sp>
-        <p:nvSpPr>
-          <p:cNvPr id="45" name="Rounded Rectangle 23">
-            <a:extLst>
-              <a:ext uri="{FF2B5EF4-FFF2-40B4-BE49-F238E27FC236}">
-                <a16:creationId xmlns:a16="http://schemas.microsoft.com/office/drawing/2014/main" id="{22F1DE56-C5EC-B531-A9D3-3B87CB95BF31}"/>
-              </a:ext>
-            </a:extLst>
-          </p:cNvPr>
+            <a:endParaRPr sz="1400" b="0">
+              <a:solidFill>
+                <a:srgbClr val="69697D"/>
+              </a:solidFill>
+              <a:latin typeface="Aptos"/>
+            </a:endParaRPr>
+          </a:p>
+        </p:txBody>
+      </p:sp>
+      <p:sp>
+        <p:nvSpPr>
+          <p:cNvPr id="45" name="Rounded Rectangle 23"/>
           <p:cNvSpPr/>
           <p:nvPr/>
         </p:nvSpPr>
@@ -8963,19 +8360,12 @@
           <a:lstStyle/>
           <a:p>
             <a:pPr algn="ctr"/>
-            <a:endParaRPr/>
-          </a:p>
-        </p:txBody>
-      </p:sp>
-      <p:sp>
-        <p:nvSpPr>
-          <p:cNvPr id="47" name="TextBox 46">
-            <a:extLst>
-              <a:ext uri="{FF2B5EF4-FFF2-40B4-BE49-F238E27FC236}">
-                <a16:creationId xmlns:a16="http://schemas.microsoft.com/office/drawing/2014/main" id="{A42C1651-FED8-AB1B-8277-9F4D0F756DC8}"/>
-              </a:ext>
-            </a:extLst>
-          </p:cNvPr>
+          </a:p>
+        </p:txBody>
+      </p:sp>
+      <p:sp>
+        <p:nvSpPr>
+          <p:cNvPr id="47" name="TextBox 46"/>
           <p:cNvSpPr txBox="1"/>
           <p:nvPr/>
         </p:nvSpPr>
@@ -9009,18 +8399,18 @@
               </a:rPr>
               <a:t>Reasoning</a:t>
             </a:r>
-          </a:p>
-        </p:txBody>
-      </p:sp>
-      <p:sp>
-        <p:nvSpPr>
-          <p:cNvPr id="49" name="TextBox 48">
-            <a:extLst>
-              <a:ext uri="{FF2B5EF4-FFF2-40B4-BE49-F238E27FC236}">
-                <a16:creationId xmlns:a16="http://schemas.microsoft.com/office/drawing/2014/main" id="{EB506845-4803-E5F7-969A-7F959DC43D40}"/>
-              </a:ext>
-            </a:extLst>
-          </p:cNvPr>
+            <a:endParaRPr sz="1200" b="1">
+              <a:solidFill>
+                <a:srgbClr val="6B3FBE"/>
+              </a:solidFill>
+              <a:latin typeface="Aptos"/>
+            </a:endParaRPr>
+          </a:p>
+        </p:txBody>
+      </p:sp>
+      <p:sp>
+        <p:nvSpPr>
+          <p:cNvPr id="49" name="TextBox 48"/>
           <p:cNvSpPr txBox="1"/>
           <p:nvPr/>
         </p:nvSpPr>
@@ -9054,18 +8444,18 @@
               </a:rPr>
               <a:t>Socratic + multi-agent</a:t>
             </a:r>
-          </a:p>
-        </p:txBody>
-      </p:sp>
-      <p:sp>
-        <p:nvSpPr>
-          <p:cNvPr id="51" name="TextBox 50">
-            <a:extLst>
-              <a:ext uri="{FF2B5EF4-FFF2-40B4-BE49-F238E27FC236}">
-                <a16:creationId xmlns:a16="http://schemas.microsoft.com/office/drawing/2014/main" id="{6C71DD44-CEB3-EC95-B4B3-BE5F5E759C09}"/>
-              </a:ext>
-            </a:extLst>
-          </p:cNvPr>
+            <a:endParaRPr sz="1500" b="1">
+              <a:solidFill>
+                <a:srgbClr val="181837"/>
+              </a:solidFill>
+              <a:latin typeface="Aptos"/>
+            </a:endParaRPr>
+          </a:p>
+        </p:txBody>
+      </p:sp>
+      <p:sp>
+        <p:nvSpPr>
+          <p:cNvPr id="51" name="TextBox 50"/>
           <p:cNvSpPr txBox="1"/>
           <p:nvPr/>
         </p:nvSpPr>
@@ -9099,18 +8489,18 @@
               </a:rPr>
               <a:t>Argument graph + deliberation</a:t>
             </a:r>
-          </a:p>
-        </p:txBody>
-      </p:sp>
-      <p:sp>
-        <p:nvSpPr>
-          <p:cNvPr id="53" name="Rounded Rectangle 27">
-            <a:extLst>
-              <a:ext uri="{FF2B5EF4-FFF2-40B4-BE49-F238E27FC236}">
-                <a16:creationId xmlns:a16="http://schemas.microsoft.com/office/drawing/2014/main" id="{6320812E-084E-7F39-92E2-C2F3ECE9B5D8}"/>
-              </a:ext>
-            </a:extLst>
-          </p:cNvPr>
+            <a:endParaRPr sz="1400" b="0">
+              <a:solidFill>
+                <a:srgbClr val="69697D"/>
+              </a:solidFill>
+              <a:latin typeface="Aptos"/>
+            </a:endParaRPr>
+          </a:p>
+        </p:txBody>
+      </p:sp>
+      <p:sp>
+        <p:nvSpPr>
+          <p:cNvPr id="53" name="Rounded Rectangle 27"/>
           <p:cNvSpPr/>
           <p:nvPr/>
         </p:nvSpPr>
@@ -9150,19 +8540,12 @@
           <a:lstStyle/>
           <a:p>
             <a:pPr algn="ctr"/>
-            <a:endParaRPr/>
-          </a:p>
-        </p:txBody>
-      </p:sp>
-      <p:sp>
-        <p:nvSpPr>
-          <p:cNvPr id="55" name="TextBox 54">
-            <a:extLst>
-              <a:ext uri="{FF2B5EF4-FFF2-40B4-BE49-F238E27FC236}">
-                <a16:creationId xmlns:a16="http://schemas.microsoft.com/office/drawing/2014/main" id="{84ECE241-F980-6B78-5439-6B4AE5D03ED5}"/>
-              </a:ext>
-            </a:extLst>
-          </p:cNvPr>
+          </a:p>
+        </p:txBody>
+      </p:sp>
+      <p:sp>
+        <p:nvSpPr>
+          <p:cNvPr id="55" name="TextBox 54"/>
           <p:cNvSpPr txBox="1"/>
           <p:nvPr/>
         </p:nvSpPr>
@@ -9196,18 +8579,18 @@
               </a:rPr>
               <a:t>Context</a:t>
             </a:r>
-          </a:p>
-        </p:txBody>
-      </p:sp>
-      <p:sp>
-        <p:nvSpPr>
-          <p:cNvPr id="57" name="TextBox 56">
-            <a:extLst>
-              <a:ext uri="{FF2B5EF4-FFF2-40B4-BE49-F238E27FC236}">
-                <a16:creationId xmlns:a16="http://schemas.microsoft.com/office/drawing/2014/main" id="{36AE55C9-6553-4863-709A-3EBF19443CFD}"/>
-              </a:ext>
-            </a:extLst>
-          </p:cNvPr>
+            <a:endParaRPr sz="1200" b="1">
+              <a:solidFill>
+                <a:srgbClr val="6B3FBE"/>
+              </a:solidFill>
+              <a:latin typeface="Aptos"/>
+            </a:endParaRPr>
+          </a:p>
+        </p:txBody>
+      </p:sp>
+      <p:sp>
+        <p:nvSpPr>
+          <p:cNvPr id="57" name="TextBox 56"/>
           <p:cNvSpPr txBox="1"/>
           <p:nvPr/>
         </p:nvSpPr>
@@ -9241,18 +8624,18 @@
               </a:rPr>
               <a:t>Screenpipe observer</a:t>
             </a:r>
-          </a:p>
-        </p:txBody>
-      </p:sp>
-      <p:sp>
-        <p:nvSpPr>
-          <p:cNvPr id="59" name="TextBox 58">
-            <a:extLst>
-              <a:ext uri="{FF2B5EF4-FFF2-40B4-BE49-F238E27FC236}">
-                <a16:creationId xmlns:a16="http://schemas.microsoft.com/office/drawing/2014/main" id="{D6F5ADDD-F993-E462-3BC1-C8FCB6FE49BD}"/>
-              </a:ext>
-            </a:extLst>
-          </p:cNvPr>
+            <a:endParaRPr sz="1500" b="1">
+              <a:solidFill>
+                <a:srgbClr val="181837"/>
+              </a:solidFill>
+              <a:latin typeface="Aptos"/>
+            </a:endParaRPr>
+          </a:p>
+        </p:txBody>
+      </p:sp>
+      <p:sp>
+        <p:nvSpPr>
+          <p:cNvPr id="59" name="TextBox 58"/>
           <p:cNvSpPr txBox="1"/>
           <p:nvPr/>
         </p:nvSpPr>
@@ -9286,18 +8669,18 @@
               </a:rPr>
               <a:t>OCR/activity-informed intervention</a:t>
             </a:r>
-          </a:p>
-        </p:txBody>
-      </p:sp>
-      <p:sp>
-        <p:nvSpPr>
-          <p:cNvPr id="61" name="Rounded Rectangle 31">
-            <a:extLst>
-              <a:ext uri="{FF2B5EF4-FFF2-40B4-BE49-F238E27FC236}">
-                <a16:creationId xmlns:a16="http://schemas.microsoft.com/office/drawing/2014/main" id="{DAFFCCB0-C172-AFBE-9628-BDAFFE3B8DD8}"/>
-              </a:ext>
-            </a:extLst>
-          </p:cNvPr>
+            <a:endParaRPr sz="1400" b="0">
+              <a:solidFill>
+                <a:srgbClr val="69697D"/>
+              </a:solidFill>
+              <a:latin typeface="Aptos"/>
+            </a:endParaRPr>
+          </a:p>
+        </p:txBody>
+      </p:sp>
+      <p:sp>
+        <p:nvSpPr>
+          <p:cNvPr id="61" name="Rounded Rectangle 31"/>
           <p:cNvSpPr/>
           <p:nvPr/>
         </p:nvSpPr>
@@ -9337,19 +8720,12 @@
           <a:lstStyle/>
           <a:p>
             <a:pPr algn="ctr"/>
-            <a:endParaRPr/>
-          </a:p>
-        </p:txBody>
-      </p:sp>
-      <p:sp>
-        <p:nvSpPr>
-          <p:cNvPr id="63" name="TextBox 62">
-            <a:extLst>
-              <a:ext uri="{FF2B5EF4-FFF2-40B4-BE49-F238E27FC236}">
-                <a16:creationId xmlns:a16="http://schemas.microsoft.com/office/drawing/2014/main" id="{AD54DCC1-BBD3-8858-CB9A-EC74AA18BEBB}"/>
-              </a:ext>
-            </a:extLst>
-          </p:cNvPr>
+          </a:p>
+        </p:txBody>
+      </p:sp>
+      <p:sp>
+        <p:nvSpPr>
+          <p:cNvPr id="63" name="TextBox 62"/>
           <p:cNvSpPr txBox="1"/>
           <p:nvPr/>
         </p:nvSpPr>
@@ -9383,18 +8759,18 @@
               </a:rPr>
               <a:t>Memory</a:t>
             </a:r>
-          </a:p>
-        </p:txBody>
-      </p:sp>
-      <p:sp>
-        <p:nvSpPr>
-          <p:cNvPr id="65" name="TextBox 64">
-            <a:extLst>
-              <a:ext uri="{FF2B5EF4-FFF2-40B4-BE49-F238E27FC236}">
-                <a16:creationId xmlns:a16="http://schemas.microsoft.com/office/drawing/2014/main" id="{84D91FBE-576C-4C18-A6CF-74492F3A1B73}"/>
-              </a:ext>
-            </a:extLst>
-          </p:cNvPr>
+            <a:endParaRPr sz="1200" b="1">
+              <a:solidFill>
+                <a:srgbClr val="6B3FBE"/>
+              </a:solidFill>
+              <a:latin typeface="Aptos"/>
+            </a:endParaRPr>
+          </a:p>
+        </p:txBody>
+      </p:sp>
+      <p:sp>
+        <p:nvSpPr>
+          <p:cNvPr id="65" name="TextBox 64"/>
           <p:cNvSpPr txBox="1"/>
           <p:nvPr/>
         </p:nvSpPr>
@@ -9428,18 +8804,18 @@
               </a:rPr>
               <a:t>Local Vault</a:t>
             </a:r>
-          </a:p>
-        </p:txBody>
-      </p:sp>
-      <p:sp>
-        <p:nvSpPr>
-          <p:cNvPr id="67" name="TextBox 66">
-            <a:extLst>
-              <a:ext uri="{FF2B5EF4-FFF2-40B4-BE49-F238E27FC236}">
-                <a16:creationId xmlns:a16="http://schemas.microsoft.com/office/drawing/2014/main" id="{4AB958BF-E324-B31F-1A7E-EBB8FFF4F42F}"/>
-              </a:ext>
-            </a:extLst>
-          </p:cNvPr>
+            <a:endParaRPr sz="1500" b="1">
+              <a:solidFill>
+                <a:srgbClr val="181837"/>
+              </a:solidFill>
+              <a:latin typeface="Aptos"/>
+            </a:endParaRPr>
+          </a:p>
+        </p:txBody>
+      </p:sp>
+      <p:sp>
+        <p:nvSpPr>
+          <p:cNvPr id="67" name="TextBox 66"/>
           <p:cNvSpPr txBox="1"/>
           <p:nvPr/>
         </p:nvSpPr>
@@ -9473,18 +8849,18 @@
               </a:rPr>
               <a:t>Session memory + skill persistence</a:t>
             </a:r>
-          </a:p>
-        </p:txBody>
-      </p:sp>
-      <p:sp>
-        <p:nvSpPr>
-          <p:cNvPr id="69" name="Rounded Rectangle 35">
-            <a:extLst>
-              <a:ext uri="{FF2B5EF4-FFF2-40B4-BE49-F238E27FC236}">
-                <a16:creationId xmlns:a16="http://schemas.microsoft.com/office/drawing/2014/main" id="{7F227CA8-CEA6-6798-25F5-2B53D71C6DBF}"/>
-              </a:ext>
-            </a:extLst>
-          </p:cNvPr>
+            <a:endParaRPr sz="1400" b="0">
+              <a:solidFill>
+                <a:srgbClr val="69697D"/>
+              </a:solidFill>
+              <a:latin typeface="Aptos"/>
+            </a:endParaRPr>
+          </a:p>
+        </p:txBody>
+      </p:sp>
+      <p:sp>
+        <p:nvSpPr>
+          <p:cNvPr id="69" name="Rounded Rectangle 35"/>
           <p:cNvSpPr/>
           <p:nvPr/>
         </p:nvSpPr>
@@ -9524,19 +8900,12 @@
           <a:lstStyle/>
           <a:p>
             <a:pPr algn="ctr"/>
-            <a:endParaRPr/>
-          </a:p>
-        </p:txBody>
-      </p:sp>
-      <p:sp>
-        <p:nvSpPr>
-          <p:cNvPr id="71" name="TextBox 70">
-            <a:extLst>
-              <a:ext uri="{FF2B5EF4-FFF2-40B4-BE49-F238E27FC236}">
-                <a16:creationId xmlns:a16="http://schemas.microsoft.com/office/drawing/2014/main" id="{5CA379A5-7221-DBD9-4213-6E309D830234}"/>
-              </a:ext>
-            </a:extLst>
-          </p:cNvPr>
+          </a:p>
+        </p:txBody>
+      </p:sp>
+      <p:sp>
+        <p:nvSpPr>
+          <p:cNvPr id="71" name="TextBox 70"/>
           <p:cNvSpPr txBox="1"/>
           <p:nvPr/>
         </p:nvSpPr>
@@ -9570,18 +8939,18 @@
               </a:rPr>
               <a:t>Integration</a:t>
             </a:r>
-          </a:p>
-        </p:txBody>
-      </p:sp>
-      <p:sp>
-        <p:nvSpPr>
-          <p:cNvPr id="73" name="TextBox 72">
-            <a:extLst>
-              <a:ext uri="{FF2B5EF4-FFF2-40B4-BE49-F238E27FC236}">
-                <a16:creationId xmlns:a16="http://schemas.microsoft.com/office/drawing/2014/main" id="{5527A758-0E53-6467-E9B3-58F8336250A0}"/>
-              </a:ext>
-            </a:extLst>
-          </p:cNvPr>
+            <a:endParaRPr sz="1200" b="1">
+              <a:solidFill>
+                <a:srgbClr val="6B3FBE"/>
+              </a:solidFill>
+              <a:latin typeface="Aptos"/>
+            </a:endParaRPr>
+          </a:p>
+        </p:txBody>
+      </p:sp>
+      <p:sp>
+        <p:nvSpPr>
+          <p:cNvPr id="73" name="TextBox 72"/>
           <p:cNvSpPr txBox="1"/>
           <p:nvPr/>
         </p:nvSpPr>
@@ -9615,18 +8984,18 @@
               </a:rPr>
               <a:t>Google Workspace</a:t>
             </a:r>
-          </a:p>
-        </p:txBody>
-      </p:sp>
-      <p:sp>
-        <p:nvSpPr>
-          <p:cNvPr id="75" name="TextBox 74">
-            <a:extLst>
-              <a:ext uri="{FF2B5EF4-FFF2-40B4-BE49-F238E27FC236}">
-                <a16:creationId xmlns:a16="http://schemas.microsoft.com/office/drawing/2014/main" id="{02720C7F-5828-B965-992B-023DB29FC303}"/>
-              </a:ext>
-            </a:extLst>
-          </p:cNvPr>
+            <a:endParaRPr sz="1500" b="1">
+              <a:solidFill>
+                <a:srgbClr val="181837"/>
+              </a:solidFill>
+              <a:latin typeface="Aptos"/>
+            </a:endParaRPr>
+          </a:p>
+        </p:txBody>
+      </p:sp>
+      <p:sp>
+        <p:nvSpPr>
+          <p:cNvPr id="75" name="TextBox 74"/>
           <p:cNvSpPr txBox="1"/>
           <p:nvPr/>
         </p:nvSpPr>
@@ -9660,15 +9029,16 @@
               </a:rPr>
               <a:t>Gmail, Drive &amp; Tasks via OAuth</a:t>
             </a:r>
+            <a:endParaRPr sz="1400" b="0">
+              <a:solidFill>
+                <a:srgbClr val="69697D"/>
+              </a:solidFill>
+              <a:latin typeface="Aptos"/>
+            </a:endParaRPr>
           </a:p>
         </p:txBody>
       </p:sp>
     </p:spTree>
-    <p:extLst>
-      <p:ext uri="{BB962C8B-B14F-4D97-AF65-F5344CB8AC3E}">
-        <p14:creationId xmlns:p14="http://schemas.microsoft.com/office/powerpoint/2010/main" val="3724828803"/>
-      </p:ext>
-    </p:extLst>
   </p:cSld>
   <p:clrMapOvr>
     <a:masterClrMapping/>
@@ -9695,13 +9065,7 @@
       </p:grpSpPr>
       <p:sp>
         <p:nvSpPr>
-          <p:cNvPr id="2" name="Title 1">
-            <a:extLst>
-              <a:ext uri="{FF2B5EF4-FFF2-40B4-BE49-F238E27FC236}">
-                <a16:creationId xmlns:a16="http://schemas.microsoft.com/office/drawing/2014/main" id="{51353DB3-FB86-4452-A4FB-E7F4BEA62856}"/>
-              </a:ext>
-            </a:extLst>
-          </p:cNvPr>
+          <p:cNvPr id="2" name="Title 1"/>
           <p:cNvSpPr>
             <a:spLocks noGrp="1"/>
           </p:cNvSpPr>
@@ -9724,9 +9088,9 @@
                 <a:solidFill>
                   <a:srgbClr val="704EA6"/>
                 </a:solidFill>
-                <a:latin typeface="Calibri" pitchFamily="34" charset="0"/>
-                <a:ea typeface="Calibri" pitchFamily="34" charset="-122"/>
-                <a:cs typeface="Calibri" pitchFamily="34" charset="-120"/>
+                <a:latin typeface="Calibri" panose="020F0502020204030204" pitchFamily="34" charset="0"/>
+                <a:ea typeface="Calibri" panose="020F0502020204030204" pitchFamily="34" charset="-122"/>
+                <a:cs typeface="Calibri" panose="020F0502020204030204" pitchFamily="34" charset="-120"/>
               </a:rPr>
               <a:t>Impact &amp; Use case</a:t>
             </a:r>
@@ -9740,13 +9104,7 @@
       </p:sp>
       <p:sp>
         <p:nvSpPr>
-          <p:cNvPr id="5" name="TextBox 4">
-            <a:extLst>
-              <a:ext uri="{FF2B5EF4-FFF2-40B4-BE49-F238E27FC236}">
-                <a16:creationId xmlns:a16="http://schemas.microsoft.com/office/drawing/2014/main" id="{D57E353E-05AC-0312-DFA7-D7C9276C4230}"/>
-              </a:ext>
-            </a:extLst>
-          </p:cNvPr>
+          <p:cNvPr id="5" name="TextBox 4"/>
           <p:cNvSpPr txBox="1"/>
           <p:nvPr/>
         </p:nvSpPr>
@@ -9780,18 +9138,18 @@
               </a:rPr>
               <a:t>WHY IT MATTERS</a:t>
             </a:r>
-          </a:p>
-        </p:txBody>
-      </p:sp>
-      <p:sp>
-        <p:nvSpPr>
-          <p:cNvPr id="7" name="Rounded Rectangle 3">
-            <a:extLst>
-              <a:ext uri="{FF2B5EF4-FFF2-40B4-BE49-F238E27FC236}">
-                <a16:creationId xmlns:a16="http://schemas.microsoft.com/office/drawing/2014/main" id="{D6EE7AF3-0F15-57FB-60A7-38E59633BAFC}"/>
-              </a:ext>
-            </a:extLst>
-          </p:cNvPr>
+            <a:endParaRPr lang="en-IN" b="1">
+              <a:solidFill>
+                <a:srgbClr val="F05332"/>
+              </a:solidFill>
+              <a:latin typeface="Aptos"/>
+            </a:endParaRPr>
+          </a:p>
+        </p:txBody>
+      </p:sp>
+      <p:sp>
+        <p:nvSpPr>
+          <p:cNvPr id="7" name="Rounded Rectangle 3"/>
           <p:cNvSpPr/>
           <p:nvPr/>
         </p:nvSpPr>
@@ -9831,19 +9189,12 @@
           <a:lstStyle/>
           <a:p>
             <a:pPr algn="ctr"/>
-            <a:endParaRPr/>
-          </a:p>
-        </p:txBody>
-      </p:sp>
-      <p:sp>
-        <p:nvSpPr>
-          <p:cNvPr id="13" name="TextBox 12">
-            <a:extLst>
-              <a:ext uri="{FF2B5EF4-FFF2-40B4-BE49-F238E27FC236}">
-                <a16:creationId xmlns:a16="http://schemas.microsoft.com/office/drawing/2014/main" id="{8108FE24-6C05-CAB5-1012-233646773791}"/>
-              </a:ext>
-            </a:extLst>
-          </p:cNvPr>
+          </a:p>
+        </p:txBody>
+      </p:sp>
+      <p:sp>
+        <p:nvSpPr>
+          <p:cNvPr id="13" name="TextBox 12"/>
           <p:cNvSpPr txBox="1"/>
           <p:nvPr/>
         </p:nvSpPr>
@@ -9878,6 +9229,7 @@
               <a:rPr sz="2000"/>
               <a:t>• Coding copilot that notices repeated errors or stagnation.</a:t>
             </a:r>
+            <a:endParaRPr sz="2000"/>
           </a:p>
           <a:p>
             <a:pPr>
@@ -9895,6 +9247,7 @@
               <a:rPr sz="2000"/>
               <a:t>• Study partner that turns documents into guided Socratic learning.</a:t>
             </a:r>
+            <a:endParaRPr sz="2000"/>
           </a:p>
           <a:p>
             <a:pPr>
@@ -9912,6 +9265,7 @@
               <a:rPr sz="2000"/>
               <a:t>• Research companion that keeps context while goals evolve.</a:t>
             </a:r>
+            <a:endParaRPr sz="2000"/>
           </a:p>
           <a:p>
             <a:pPr>
@@ -9929,18 +9283,13 @@
               <a:rPr sz="2000"/>
               <a:t>• Desktop assistant that connects conversation to local workflows.</a:t>
             </a:r>
-          </a:p>
-        </p:txBody>
-      </p:sp>
-      <p:sp>
-        <p:nvSpPr>
-          <p:cNvPr id="15" name="Rounded Rectangle 7">
-            <a:extLst>
-              <a:ext uri="{FF2B5EF4-FFF2-40B4-BE49-F238E27FC236}">
-                <a16:creationId xmlns:a16="http://schemas.microsoft.com/office/drawing/2014/main" id="{546D2F94-1F59-9DA1-F232-CAB094E50B1B}"/>
-              </a:ext>
-            </a:extLst>
-          </p:cNvPr>
+            <a:endParaRPr sz="2000"/>
+          </a:p>
+        </p:txBody>
+      </p:sp>
+      <p:sp>
+        <p:nvSpPr>
+          <p:cNvPr id="15" name="Rounded Rectangle 7"/>
           <p:cNvSpPr/>
           <p:nvPr/>
         </p:nvSpPr>
@@ -9980,19 +9329,12 @@
           <a:lstStyle/>
           <a:p>
             <a:pPr algn="ctr"/>
-            <a:endParaRPr/>
-          </a:p>
-        </p:txBody>
-      </p:sp>
-      <p:sp>
-        <p:nvSpPr>
-          <p:cNvPr id="17" name="TextBox 16">
-            <a:extLst>
-              <a:ext uri="{FF2B5EF4-FFF2-40B4-BE49-F238E27FC236}">
-                <a16:creationId xmlns:a16="http://schemas.microsoft.com/office/drawing/2014/main" id="{BB12B5BA-8F74-D4C1-0A37-1B41BB9EC14F}"/>
-              </a:ext>
-            </a:extLst>
-          </p:cNvPr>
+          </a:p>
+        </p:txBody>
+      </p:sp>
+      <p:sp>
+        <p:nvSpPr>
+          <p:cNvPr id="17" name="TextBox 16"/>
           <p:cNvSpPr txBox="1"/>
           <p:nvPr/>
         </p:nvSpPr>
@@ -10026,18 +9368,18 @@
               </a:rPr>
               <a:t>User value</a:t>
             </a:r>
-          </a:p>
-        </p:txBody>
-      </p:sp>
-      <p:sp>
-        <p:nvSpPr>
-          <p:cNvPr id="21" name="TextBox 20">
-            <a:extLst>
-              <a:ext uri="{FF2B5EF4-FFF2-40B4-BE49-F238E27FC236}">
-                <a16:creationId xmlns:a16="http://schemas.microsoft.com/office/drawing/2014/main" id="{88DFDB42-CB55-DF54-BC88-BED8109BF9CE}"/>
-              </a:ext>
-            </a:extLst>
-          </p:cNvPr>
+            <a:endParaRPr sz="2000" b="1">
+              <a:solidFill>
+                <a:srgbClr val="1CB8C2"/>
+              </a:solidFill>
+              <a:latin typeface="Aptos"/>
+            </a:endParaRPr>
+          </a:p>
+        </p:txBody>
+      </p:sp>
+      <p:sp>
+        <p:nvSpPr>
+          <p:cNvPr id="21" name="TextBox 20"/>
           <p:cNvSpPr txBox="1"/>
           <p:nvPr/>
         </p:nvSpPr>
@@ -10072,6 +9414,7 @@
               <a:rPr sz="2000"/>
               <a:t>• Less conversational friction during natural speech.</a:t>
             </a:r>
+            <a:endParaRPr sz="2000"/>
           </a:p>
           <a:p>
             <a:pPr>
@@ -10089,6 +9432,7 @@
               <a:rPr sz="2000"/>
               <a:t>• No hard reset when an interruption changes the goal.</a:t>
             </a:r>
+            <a:endParaRPr sz="2000"/>
           </a:p>
           <a:p>
             <a:pPr>
@@ -10106,6 +9450,7 @@
               <a:rPr sz="2000"/>
               <a:t>• Context is retained within the session and local Vault.</a:t>
             </a:r>
+            <a:endParaRPr sz="2000"/>
           </a:p>
           <a:p>
             <a:pPr>
@@ -10123,18 +9468,13 @@
               <a:rPr sz="2000"/>
               <a:t>• Resolved tasks can become reusable skills instead of one-off answers.</a:t>
             </a:r>
-          </a:p>
-        </p:txBody>
-      </p:sp>
-      <p:sp>
-        <p:nvSpPr>
-          <p:cNvPr id="23" name="Rounded Rectangle 11">
-            <a:extLst>
-              <a:ext uri="{FF2B5EF4-FFF2-40B4-BE49-F238E27FC236}">
-                <a16:creationId xmlns:a16="http://schemas.microsoft.com/office/drawing/2014/main" id="{DA0D3DC7-F919-1382-75DB-2220F7EE6EA4}"/>
-              </a:ext>
-            </a:extLst>
-          </p:cNvPr>
+            <a:endParaRPr sz="2000"/>
+          </a:p>
+        </p:txBody>
+      </p:sp>
+      <p:sp>
+        <p:nvSpPr>
+          <p:cNvPr id="23" name="Rounded Rectangle 11"/>
           <p:cNvSpPr/>
           <p:nvPr/>
         </p:nvSpPr>
@@ -10174,19 +9514,12 @@
           <a:lstStyle/>
           <a:p>
             <a:pPr algn="ctr"/>
-            <a:endParaRPr/>
-          </a:p>
-        </p:txBody>
-      </p:sp>
-      <p:sp>
-        <p:nvSpPr>
-          <p:cNvPr id="25" name="TextBox 24">
-            <a:extLst>
-              <a:ext uri="{FF2B5EF4-FFF2-40B4-BE49-F238E27FC236}">
-                <a16:creationId xmlns:a16="http://schemas.microsoft.com/office/drawing/2014/main" id="{F9B22383-62EC-5188-FE9D-A2EEF79C347B}"/>
-              </a:ext>
-            </a:extLst>
-          </p:cNvPr>
+          </a:p>
+        </p:txBody>
+      </p:sp>
+      <p:sp>
+        <p:nvSpPr>
+          <p:cNvPr id="25" name="TextBox 24"/>
           <p:cNvSpPr txBox="1"/>
           <p:nvPr/>
         </p:nvSpPr>
@@ -10220,18 +9553,18 @@
               </a:rPr>
               <a:t>Design principle: the agent should yield instantly, remember what matters, and continue from the user's new intent.</a:t>
             </a:r>
-          </a:p>
-        </p:txBody>
-      </p:sp>
-      <p:sp>
-        <p:nvSpPr>
-          <p:cNvPr id="9" name="TextBox 8">
-            <a:extLst>
-              <a:ext uri="{FF2B5EF4-FFF2-40B4-BE49-F238E27FC236}">
-                <a16:creationId xmlns:a16="http://schemas.microsoft.com/office/drawing/2014/main" id="{14312088-A2E1-792A-9AC7-B6C4D19F3010}"/>
-              </a:ext>
-            </a:extLst>
-          </p:cNvPr>
+            <a:endParaRPr sz="1400" b="1">
+              <a:solidFill>
+                <a:srgbClr val="181837"/>
+              </a:solidFill>
+              <a:latin typeface="Aptos"/>
+            </a:endParaRPr>
+          </a:p>
+        </p:txBody>
+      </p:sp>
+      <p:sp>
+        <p:nvSpPr>
+          <p:cNvPr id="9" name="TextBox 8"/>
           <p:cNvSpPr txBox="1"/>
           <p:nvPr/>
         </p:nvSpPr>
@@ -10265,15 +9598,16 @@
               </a:rPr>
               <a:t>Real-world use cases</a:t>
             </a:r>
+            <a:endParaRPr sz="2000" b="1">
+              <a:solidFill>
+                <a:srgbClr val="6B3FBE"/>
+              </a:solidFill>
+              <a:latin typeface="Aptos"/>
+            </a:endParaRPr>
           </a:p>
         </p:txBody>
       </p:sp>
     </p:spTree>
-    <p:extLst>
-      <p:ext uri="{BB962C8B-B14F-4D97-AF65-F5344CB8AC3E}">
-        <p14:creationId xmlns:p14="http://schemas.microsoft.com/office/powerpoint/2010/main" val="3668119090"/>
-      </p:ext>
-    </p:extLst>
   </p:cSld>
   <p:clrMapOvr>
     <a:masterClrMapping/>
@@ -10300,13 +9634,7 @@
       </p:grpSpPr>
       <p:sp>
         <p:nvSpPr>
-          <p:cNvPr id="2" name="Title 1">
-            <a:extLst>
-              <a:ext uri="{FF2B5EF4-FFF2-40B4-BE49-F238E27FC236}">
-                <a16:creationId xmlns:a16="http://schemas.microsoft.com/office/drawing/2014/main" id="{51353DB3-FB86-4452-A4FB-E7F4BEA62856}"/>
-              </a:ext>
-            </a:extLst>
-          </p:cNvPr>
+          <p:cNvPr id="2" name="Title 1"/>
           <p:cNvSpPr>
             <a:spLocks noGrp="1"/>
           </p:cNvSpPr>
@@ -10335,9 +9663,9 @@
                 <a:solidFill>
                   <a:srgbClr val="704EA6"/>
                 </a:solidFill>
-                <a:latin typeface="Calibri" pitchFamily="34" charset="0"/>
-                <a:ea typeface="Calibri" pitchFamily="34" charset="-122"/>
-                <a:cs typeface="Calibri" pitchFamily="34" charset="-120"/>
+                <a:latin typeface="Calibri" panose="020F0502020204030204" pitchFamily="34" charset="0"/>
+                <a:ea typeface="Calibri" panose="020F0502020204030204" pitchFamily="34" charset="-122"/>
+                <a:cs typeface="Calibri" panose="020F0502020204030204" pitchFamily="34" charset="-120"/>
               </a:rPr>
               <a:t>Innovation highlights, results and limitations</a:t>
             </a:r>
@@ -10351,13 +9679,7 @@
       </p:sp>
       <p:sp>
         <p:nvSpPr>
-          <p:cNvPr id="5" name="Rounded Rectangle 3">
-            <a:extLst>
-              <a:ext uri="{FF2B5EF4-FFF2-40B4-BE49-F238E27FC236}">
-                <a16:creationId xmlns:a16="http://schemas.microsoft.com/office/drawing/2014/main" id="{87C05DB1-6FEE-F416-530F-EA9EBC39405E}"/>
-              </a:ext>
-            </a:extLst>
-          </p:cNvPr>
+          <p:cNvPr id="5" name="Rounded Rectangle 3"/>
           <p:cNvSpPr/>
           <p:nvPr/>
         </p:nvSpPr>
@@ -10397,19 +9719,12 @@
           <a:lstStyle/>
           <a:p>
             <a:pPr algn="ctr"/>
-            <a:endParaRPr/>
-          </a:p>
-        </p:txBody>
-      </p:sp>
-      <p:sp>
-        <p:nvSpPr>
-          <p:cNvPr id="7" name="TextBox 6">
-            <a:extLst>
-              <a:ext uri="{FF2B5EF4-FFF2-40B4-BE49-F238E27FC236}">
-                <a16:creationId xmlns:a16="http://schemas.microsoft.com/office/drawing/2014/main" id="{EE0A825E-65BE-3B4B-6ABC-D3DD929AD686}"/>
-              </a:ext>
-            </a:extLst>
-          </p:cNvPr>
+          </a:p>
+        </p:txBody>
+      </p:sp>
+      <p:sp>
+        <p:nvSpPr>
+          <p:cNvPr id="7" name="TextBox 6"/>
           <p:cNvSpPr txBox="1"/>
           <p:nvPr/>
         </p:nvSpPr>
@@ -10443,18 +9758,18 @@
               </a:rPr>
               <a:t>01</a:t>
             </a:r>
-          </a:p>
-        </p:txBody>
-      </p:sp>
-      <p:sp>
-        <p:nvSpPr>
-          <p:cNvPr id="9" name="TextBox 8">
-            <a:extLst>
-              <a:ext uri="{FF2B5EF4-FFF2-40B4-BE49-F238E27FC236}">
-                <a16:creationId xmlns:a16="http://schemas.microsoft.com/office/drawing/2014/main" id="{294680FB-93C5-4590-E726-F3AA1323FEA0}"/>
-              </a:ext>
-            </a:extLst>
-          </p:cNvPr>
+            <a:endParaRPr sz="1500" b="1">
+              <a:solidFill>
+                <a:srgbClr val="FFFFFF"/>
+              </a:solidFill>
+              <a:latin typeface="Aptos"/>
+            </a:endParaRPr>
+          </a:p>
+        </p:txBody>
+      </p:sp>
+      <p:sp>
+        <p:nvSpPr>
+          <p:cNvPr id="9" name="TextBox 8"/>
           <p:cNvSpPr txBox="1"/>
           <p:nvPr/>
         </p:nvSpPr>
@@ -10488,18 +9803,18 @@
               </a:rPr>
               <a:t>Interruptibility</a:t>
             </a:r>
-          </a:p>
-        </p:txBody>
-      </p:sp>
-      <p:sp>
-        <p:nvSpPr>
-          <p:cNvPr id="11" name="TextBox 10">
-            <a:extLst>
-              <a:ext uri="{FF2B5EF4-FFF2-40B4-BE49-F238E27FC236}">
-                <a16:creationId xmlns:a16="http://schemas.microsoft.com/office/drawing/2014/main" id="{398E9B70-78F0-6186-2407-9D4CE1C53AC6}"/>
-              </a:ext>
-            </a:extLst>
-          </p:cNvPr>
+            <a:endParaRPr sz="1500" b="1">
+              <a:solidFill>
+                <a:srgbClr val="181837"/>
+              </a:solidFill>
+              <a:latin typeface="Aptos"/>
+            </a:endParaRPr>
+          </a:p>
+        </p:txBody>
+      </p:sp>
+      <p:sp>
+        <p:nvSpPr>
+          <p:cNvPr id="11" name="TextBox 10"/>
           <p:cNvSpPr txBox="1"/>
           <p:nvPr/>
         </p:nvSpPr>
@@ -10533,18 +9848,18 @@
               </a:rPr>
               <a:t>Gemini Live session forwards audio in both directions and exposes an interrupted event to the UI.</a:t>
             </a:r>
-          </a:p>
-        </p:txBody>
-      </p:sp>
-      <p:sp>
-        <p:nvSpPr>
-          <p:cNvPr id="13" name="Rounded Rectangle 7">
-            <a:extLst>
-              <a:ext uri="{FF2B5EF4-FFF2-40B4-BE49-F238E27FC236}">
-                <a16:creationId xmlns:a16="http://schemas.microsoft.com/office/drawing/2014/main" id="{C0F9836F-9A0A-1355-1A82-A992BF5968E8}"/>
-              </a:ext>
-            </a:extLst>
-          </p:cNvPr>
+            <a:endParaRPr sz="1600" b="0">
+              <a:solidFill>
+                <a:srgbClr val="232337"/>
+              </a:solidFill>
+              <a:latin typeface="Aptos"/>
+            </a:endParaRPr>
+          </a:p>
+        </p:txBody>
+      </p:sp>
+      <p:sp>
+        <p:nvSpPr>
+          <p:cNvPr id="13" name="Rounded Rectangle 7"/>
           <p:cNvSpPr/>
           <p:nvPr/>
         </p:nvSpPr>
@@ -10584,19 +9899,12 @@
           <a:lstStyle/>
           <a:p>
             <a:pPr algn="ctr"/>
-            <a:endParaRPr/>
-          </a:p>
-        </p:txBody>
-      </p:sp>
-      <p:sp>
-        <p:nvSpPr>
-          <p:cNvPr id="15" name="TextBox 14">
-            <a:extLst>
-              <a:ext uri="{FF2B5EF4-FFF2-40B4-BE49-F238E27FC236}">
-                <a16:creationId xmlns:a16="http://schemas.microsoft.com/office/drawing/2014/main" id="{11B5955B-DB62-B5D9-014C-F2DD2F45131A}"/>
-              </a:ext>
-            </a:extLst>
-          </p:cNvPr>
+          </a:p>
+        </p:txBody>
+      </p:sp>
+      <p:sp>
+        <p:nvSpPr>
+          <p:cNvPr id="15" name="TextBox 14"/>
           <p:cNvSpPr txBox="1"/>
           <p:nvPr/>
         </p:nvSpPr>
@@ -10630,18 +9938,18 @@
               </a:rPr>
               <a:t>02</a:t>
             </a:r>
-          </a:p>
-        </p:txBody>
-      </p:sp>
-      <p:sp>
-        <p:nvSpPr>
-          <p:cNvPr id="17" name="TextBox 16">
-            <a:extLst>
-              <a:ext uri="{FF2B5EF4-FFF2-40B4-BE49-F238E27FC236}">
-                <a16:creationId xmlns:a16="http://schemas.microsoft.com/office/drawing/2014/main" id="{99026539-7CDA-F436-A0CE-8B29A8093BAC}"/>
-              </a:ext>
-            </a:extLst>
-          </p:cNvPr>
+            <a:endParaRPr sz="1500" b="1">
+              <a:solidFill>
+                <a:srgbClr val="FFFFFF"/>
+              </a:solidFill>
+              <a:latin typeface="Aptos"/>
+            </a:endParaRPr>
+          </a:p>
+        </p:txBody>
+      </p:sp>
+      <p:sp>
+        <p:nvSpPr>
+          <p:cNvPr id="17" name="TextBox 16"/>
           <p:cNvSpPr txBox="1"/>
           <p:nvPr/>
         </p:nvSpPr>
@@ -10675,18 +9983,18 @@
               </a:rPr>
               <a:t>Resilience</a:t>
             </a:r>
-          </a:p>
-        </p:txBody>
-      </p:sp>
-      <p:sp>
-        <p:nvSpPr>
-          <p:cNvPr id="19" name="TextBox 18">
-            <a:extLst>
-              <a:ext uri="{FF2B5EF4-FFF2-40B4-BE49-F238E27FC236}">
-                <a16:creationId xmlns:a16="http://schemas.microsoft.com/office/drawing/2014/main" id="{97E74598-DDBB-6019-0B41-06C122680720}"/>
-              </a:ext>
-            </a:extLst>
-          </p:cNvPr>
+            <a:endParaRPr sz="1500" b="1">
+              <a:solidFill>
+                <a:srgbClr val="181837"/>
+              </a:solidFill>
+              <a:latin typeface="Aptos"/>
+            </a:endParaRPr>
+          </a:p>
+        </p:txBody>
+      </p:sp>
+      <p:sp>
+        <p:nvSpPr>
+          <p:cNvPr id="19" name="TextBox 18"/>
           <p:cNvSpPr txBox="1"/>
           <p:nvPr/>
         </p:nvSpPr>
@@ -10717,18 +10025,15 @@
               </a:rPr>
               <a:t>Fallback model cascade and offline responses reduce abrupt conversation failure.</a:t>
             </a:r>
-          </a:p>
-        </p:txBody>
-      </p:sp>
-      <p:sp>
-        <p:nvSpPr>
-          <p:cNvPr id="21" name="Rounded Rectangle 11">
-            <a:extLst>
-              <a:ext uri="{FF2B5EF4-FFF2-40B4-BE49-F238E27FC236}">
-                <a16:creationId xmlns:a16="http://schemas.microsoft.com/office/drawing/2014/main" id="{E475F931-D28E-BDD2-78B2-3E641240E7F7}"/>
-              </a:ext>
-            </a:extLst>
-          </p:cNvPr>
+            <a:endParaRPr sz="1600" b="0">
+              <a:latin typeface="Aptos"/>
+            </a:endParaRPr>
+          </a:p>
+        </p:txBody>
+      </p:sp>
+      <p:sp>
+        <p:nvSpPr>
+          <p:cNvPr id="21" name="Rounded Rectangle 11"/>
           <p:cNvSpPr/>
           <p:nvPr/>
         </p:nvSpPr>
@@ -10768,19 +10073,12 @@
           <a:lstStyle/>
           <a:p>
             <a:pPr algn="ctr"/>
-            <a:endParaRPr/>
-          </a:p>
-        </p:txBody>
-      </p:sp>
-      <p:sp>
-        <p:nvSpPr>
-          <p:cNvPr id="23" name="TextBox 22">
-            <a:extLst>
-              <a:ext uri="{FF2B5EF4-FFF2-40B4-BE49-F238E27FC236}">
-                <a16:creationId xmlns:a16="http://schemas.microsoft.com/office/drawing/2014/main" id="{68469F66-2DC6-5273-7418-E4E7B1E1B038}"/>
-              </a:ext>
-            </a:extLst>
-          </p:cNvPr>
+          </a:p>
+        </p:txBody>
+      </p:sp>
+      <p:sp>
+        <p:nvSpPr>
+          <p:cNvPr id="23" name="TextBox 22"/>
           <p:cNvSpPr txBox="1"/>
           <p:nvPr/>
         </p:nvSpPr>
@@ -10814,18 +10112,18 @@
               </a:rPr>
               <a:t>03</a:t>
             </a:r>
-          </a:p>
-        </p:txBody>
-      </p:sp>
-      <p:sp>
-        <p:nvSpPr>
-          <p:cNvPr id="25" name="TextBox 24">
-            <a:extLst>
-              <a:ext uri="{FF2B5EF4-FFF2-40B4-BE49-F238E27FC236}">
-                <a16:creationId xmlns:a16="http://schemas.microsoft.com/office/drawing/2014/main" id="{214DEC37-D892-C4D7-5346-5F53DAFD803C}"/>
-              </a:ext>
-            </a:extLst>
-          </p:cNvPr>
+            <a:endParaRPr sz="1500" b="1">
+              <a:solidFill>
+                <a:srgbClr val="FFFFFF"/>
+              </a:solidFill>
+              <a:latin typeface="Aptos"/>
+            </a:endParaRPr>
+          </a:p>
+        </p:txBody>
+      </p:sp>
+      <p:sp>
+        <p:nvSpPr>
+          <p:cNvPr id="25" name="TextBox 24"/>
           <p:cNvSpPr txBox="1"/>
           <p:nvPr/>
         </p:nvSpPr>
@@ -10859,18 +10157,18 @@
               </a:rPr>
               <a:t>Context awareness</a:t>
             </a:r>
-          </a:p>
-        </p:txBody>
-      </p:sp>
-      <p:sp>
-        <p:nvSpPr>
-          <p:cNvPr id="27" name="TextBox 26">
-            <a:extLst>
-              <a:ext uri="{FF2B5EF4-FFF2-40B4-BE49-F238E27FC236}">
-                <a16:creationId xmlns:a16="http://schemas.microsoft.com/office/drawing/2014/main" id="{91708E40-1F20-1648-AF65-18AF0D0657E2}"/>
-              </a:ext>
-            </a:extLst>
-          </p:cNvPr>
+            <a:endParaRPr sz="1500" b="1">
+              <a:solidFill>
+                <a:srgbClr val="181837"/>
+              </a:solidFill>
+              <a:latin typeface="Aptos"/>
+            </a:endParaRPr>
+          </a:p>
+        </p:txBody>
+      </p:sp>
+      <p:sp>
+        <p:nvSpPr>
+          <p:cNvPr id="27" name="TextBox 26"/>
           <p:cNvSpPr txBox="1"/>
           <p:nvPr/>
         </p:nvSpPr>
@@ -10913,18 +10211,18 @@
               </a:rPr>
               <a:t> supervisor can trigger proactive intervention from stagnation/error signals.</a:t>
             </a:r>
-          </a:p>
-        </p:txBody>
-      </p:sp>
-      <p:sp>
-        <p:nvSpPr>
-          <p:cNvPr id="29" name="Rounded Rectangle 15">
-            <a:extLst>
-              <a:ext uri="{FF2B5EF4-FFF2-40B4-BE49-F238E27FC236}">
-                <a16:creationId xmlns:a16="http://schemas.microsoft.com/office/drawing/2014/main" id="{B1C92665-416D-4C9D-E43E-B2548E0D5E97}"/>
-              </a:ext>
-            </a:extLst>
-          </p:cNvPr>
+            <a:endParaRPr sz="1600" b="0">
+              <a:solidFill>
+                <a:srgbClr val="232337"/>
+              </a:solidFill>
+              <a:latin typeface="Aptos"/>
+            </a:endParaRPr>
+          </a:p>
+        </p:txBody>
+      </p:sp>
+      <p:sp>
+        <p:nvSpPr>
+          <p:cNvPr id="29" name="Rounded Rectangle 15"/>
           <p:cNvSpPr/>
           <p:nvPr/>
         </p:nvSpPr>
@@ -10964,19 +10262,12 @@
           <a:lstStyle/>
           <a:p>
             <a:pPr algn="ctr"/>
-            <a:endParaRPr/>
-          </a:p>
-        </p:txBody>
-      </p:sp>
-      <p:sp>
-        <p:nvSpPr>
-          <p:cNvPr id="31" name="TextBox 30">
-            <a:extLst>
-              <a:ext uri="{FF2B5EF4-FFF2-40B4-BE49-F238E27FC236}">
-                <a16:creationId xmlns:a16="http://schemas.microsoft.com/office/drawing/2014/main" id="{D1D5A5B5-D96C-3B3F-F18B-DB732B7EAC09}"/>
-              </a:ext>
-            </a:extLst>
-          </p:cNvPr>
+          </a:p>
+        </p:txBody>
+      </p:sp>
+      <p:sp>
+        <p:nvSpPr>
+          <p:cNvPr id="31" name="TextBox 30"/>
           <p:cNvSpPr txBox="1"/>
           <p:nvPr/>
         </p:nvSpPr>
@@ -11010,18 +10301,18 @@
               </a:rPr>
               <a:t>04</a:t>
             </a:r>
-          </a:p>
-        </p:txBody>
-      </p:sp>
-      <p:sp>
-        <p:nvSpPr>
-          <p:cNvPr id="33" name="TextBox 32">
-            <a:extLst>
-              <a:ext uri="{FF2B5EF4-FFF2-40B4-BE49-F238E27FC236}">
-                <a16:creationId xmlns:a16="http://schemas.microsoft.com/office/drawing/2014/main" id="{332A8D25-FC96-0E1D-21FB-2A52187E4765}"/>
-              </a:ext>
-            </a:extLst>
-          </p:cNvPr>
+            <a:endParaRPr sz="1500" b="1">
+              <a:solidFill>
+                <a:srgbClr val="FFFFFF"/>
+              </a:solidFill>
+              <a:latin typeface="Aptos"/>
+            </a:endParaRPr>
+          </a:p>
+        </p:txBody>
+      </p:sp>
+      <p:sp>
+        <p:nvSpPr>
+          <p:cNvPr id="33" name="TextBox 32"/>
           <p:cNvSpPr txBox="1"/>
           <p:nvPr/>
         </p:nvSpPr>
@@ -11055,18 +10346,18 @@
               </a:rPr>
               <a:t>Reasoning depth</a:t>
             </a:r>
-          </a:p>
-        </p:txBody>
-      </p:sp>
-      <p:sp>
-        <p:nvSpPr>
-          <p:cNvPr id="35" name="TextBox 34">
-            <a:extLst>
-              <a:ext uri="{FF2B5EF4-FFF2-40B4-BE49-F238E27FC236}">
-                <a16:creationId xmlns:a16="http://schemas.microsoft.com/office/drawing/2014/main" id="{96B26990-D975-C224-B307-C1FC80AC7121}"/>
-              </a:ext>
-            </a:extLst>
-          </p:cNvPr>
+            <a:endParaRPr sz="1500" b="1">
+              <a:solidFill>
+                <a:srgbClr val="181837"/>
+              </a:solidFill>
+              <a:latin typeface="Aptos"/>
+            </a:endParaRPr>
+          </a:p>
+        </p:txBody>
+      </p:sp>
+      <p:sp>
+        <p:nvSpPr>
+          <p:cNvPr id="35" name="TextBox 34"/>
           <p:cNvSpPr txBox="1"/>
           <p:nvPr/>
         </p:nvSpPr>
@@ -11100,18 +10391,18 @@
               </a:rPr>
               <a:t>Socratic graph + Teacher–Critic–Student deliberation separate analysis from the spoken answer.</a:t>
             </a:r>
-          </a:p>
-        </p:txBody>
-      </p:sp>
-      <p:sp>
-        <p:nvSpPr>
-          <p:cNvPr id="37" name="Rounded Rectangle 19">
-            <a:extLst>
-              <a:ext uri="{FF2B5EF4-FFF2-40B4-BE49-F238E27FC236}">
-                <a16:creationId xmlns:a16="http://schemas.microsoft.com/office/drawing/2014/main" id="{10EF3279-6311-5F18-9FC5-DB14CCDADE4D}"/>
-              </a:ext>
-            </a:extLst>
-          </p:cNvPr>
+            <a:endParaRPr sz="1600" b="0">
+              <a:solidFill>
+                <a:srgbClr val="232337"/>
+              </a:solidFill>
+              <a:latin typeface="Aptos"/>
+            </a:endParaRPr>
+          </a:p>
+        </p:txBody>
+      </p:sp>
+      <p:sp>
+        <p:nvSpPr>
+          <p:cNvPr id="37" name="Rounded Rectangle 19"/>
           <p:cNvSpPr/>
           <p:nvPr/>
         </p:nvSpPr>
@@ -11151,19 +10442,12 @@
           <a:lstStyle/>
           <a:p>
             <a:pPr algn="ctr"/>
-            <a:endParaRPr/>
-          </a:p>
-        </p:txBody>
-      </p:sp>
-      <p:sp>
-        <p:nvSpPr>
-          <p:cNvPr id="39" name="TextBox 38">
-            <a:extLst>
-              <a:ext uri="{FF2B5EF4-FFF2-40B4-BE49-F238E27FC236}">
-                <a16:creationId xmlns:a16="http://schemas.microsoft.com/office/drawing/2014/main" id="{A7A9CA4D-8AFA-943C-54DA-26AB452D9373}"/>
-              </a:ext>
-            </a:extLst>
-          </p:cNvPr>
+          </a:p>
+        </p:txBody>
+      </p:sp>
+      <p:sp>
+        <p:nvSpPr>
+          <p:cNvPr id="39" name="TextBox 38"/>
           <p:cNvSpPr txBox="1"/>
           <p:nvPr/>
         </p:nvSpPr>
@@ -11197,18 +10481,18 @@
               </a:rPr>
               <a:t>05</a:t>
             </a:r>
-          </a:p>
-        </p:txBody>
-      </p:sp>
-      <p:sp>
-        <p:nvSpPr>
-          <p:cNvPr id="41" name="TextBox 40">
-            <a:extLst>
-              <a:ext uri="{FF2B5EF4-FFF2-40B4-BE49-F238E27FC236}">
-                <a16:creationId xmlns:a16="http://schemas.microsoft.com/office/drawing/2014/main" id="{5991EBA6-937A-EE74-31C4-F4D68C2412E8}"/>
-              </a:ext>
-            </a:extLst>
-          </p:cNvPr>
+            <a:endParaRPr sz="1500" b="1">
+              <a:solidFill>
+                <a:srgbClr val="FFFFFF"/>
+              </a:solidFill>
+              <a:latin typeface="Aptos"/>
+            </a:endParaRPr>
+          </a:p>
+        </p:txBody>
+      </p:sp>
+      <p:sp>
+        <p:nvSpPr>
+          <p:cNvPr id="41" name="TextBox 40"/>
           <p:cNvSpPr txBox="1"/>
           <p:nvPr/>
         </p:nvSpPr>
@@ -11242,18 +10526,18 @@
               </a:rPr>
               <a:t>Lifelong learning</a:t>
             </a:r>
-          </a:p>
-        </p:txBody>
-      </p:sp>
-      <p:sp>
-        <p:nvSpPr>
-          <p:cNvPr id="43" name="TextBox 42">
-            <a:extLst>
-              <a:ext uri="{FF2B5EF4-FFF2-40B4-BE49-F238E27FC236}">
-                <a16:creationId xmlns:a16="http://schemas.microsoft.com/office/drawing/2014/main" id="{78140146-380F-B74B-31D2-16E237FECBC5}"/>
-              </a:ext>
-            </a:extLst>
-          </p:cNvPr>
+            <a:endParaRPr sz="1500" b="1">
+              <a:solidFill>
+                <a:srgbClr val="181837"/>
+              </a:solidFill>
+              <a:latin typeface="Aptos"/>
+            </a:endParaRPr>
+          </a:p>
+        </p:txBody>
+      </p:sp>
+      <p:sp>
+        <p:nvSpPr>
+          <p:cNvPr id="43" name="TextBox 42"/>
           <p:cNvSpPr txBox="1"/>
           <p:nvPr/>
         </p:nvSpPr>
@@ -11287,18 +10571,18 @@
               </a:rPr>
               <a:t>Voyager turns solved engineering workflows into versioned Vault skills.</a:t>
             </a:r>
-          </a:p>
-        </p:txBody>
-      </p:sp>
-      <p:sp>
-        <p:nvSpPr>
-          <p:cNvPr id="45" name="Rounded Rectangle 23">
-            <a:extLst>
-              <a:ext uri="{FF2B5EF4-FFF2-40B4-BE49-F238E27FC236}">
-                <a16:creationId xmlns:a16="http://schemas.microsoft.com/office/drawing/2014/main" id="{E8605FDC-BC6E-F280-1E8E-C2E552D9E6E5}"/>
-              </a:ext>
-            </a:extLst>
-          </p:cNvPr>
+            <a:endParaRPr sz="1600" b="0">
+              <a:solidFill>
+                <a:srgbClr val="232337"/>
+              </a:solidFill>
+              <a:latin typeface="Aptos"/>
+            </a:endParaRPr>
+          </a:p>
+        </p:txBody>
+      </p:sp>
+      <p:sp>
+        <p:nvSpPr>
+          <p:cNvPr id="45" name="Rounded Rectangle 23"/>
           <p:cNvSpPr/>
           <p:nvPr/>
         </p:nvSpPr>
@@ -11338,19 +10622,12 @@
           <a:lstStyle/>
           <a:p>
             <a:pPr algn="ctr"/>
-            <a:endParaRPr/>
-          </a:p>
-        </p:txBody>
-      </p:sp>
-      <p:sp>
-        <p:nvSpPr>
-          <p:cNvPr id="47" name="TextBox 46">
-            <a:extLst>
-              <a:ext uri="{FF2B5EF4-FFF2-40B4-BE49-F238E27FC236}">
-                <a16:creationId xmlns:a16="http://schemas.microsoft.com/office/drawing/2014/main" id="{8A07318C-8C98-CE55-B755-5470DD2EB159}"/>
-              </a:ext>
-            </a:extLst>
-          </p:cNvPr>
+          </a:p>
+        </p:txBody>
+      </p:sp>
+      <p:sp>
+        <p:nvSpPr>
+          <p:cNvPr id="47" name="TextBox 46"/>
           <p:cNvSpPr txBox="1"/>
           <p:nvPr/>
         </p:nvSpPr>
@@ -11384,18 +10661,18 @@
               </a:rPr>
               <a:t>LIMITS</a:t>
             </a:r>
-          </a:p>
-        </p:txBody>
-      </p:sp>
-      <p:sp>
-        <p:nvSpPr>
-          <p:cNvPr id="49" name="TextBox 48">
-            <a:extLst>
-              <a:ext uri="{FF2B5EF4-FFF2-40B4-BE49-F238E27FC236}">
-                <a16:creationId xmlns:a16="http://schemas.microsoft.com/office/drawing/2014/main" id="{EDA0FDB3-55A1-284A-DB22-BBE8EC59F8F1}"/>
-              </a:ext>
-            </a:extLst>
-          </p:cNvPr>
+            <a:endParaRPr sz="1300" b="1">
+              <a:solidFill>
+                <a:srgbClr val="F05332"/>
+              </a:solidFill>
+              <a:latin typeface="Aptos"/>
+            </a:endParaRPr>
+          </a:p>
+        </p:txBody>
+      </p:sp>
+      <p:sp>
+        <p:nvSpPr>
+          <p:cNvPr id="49" name="TextBox 48"/>
           <p:cNvSpPr txBox="1"/>
           <p:nvPr/>
         </p:nvSpPr>
@@ -11429,15 +10706,16 @@
               </a:rPr>
               <a:t>Current prototype is local-first but still depends on Gemini connectivity for full cloud reasoning; observer signals and workflow actions are prototype integrations rather than a production automation layer.</a:t>
             </a:r>
+            <a:endParaRPr sz="1300" b="1">
+              <a:solidFill>
+                <a:srgbClr val="232337"/>
+              </a:solidFill>
+              <a:latin typeface="Aptos"/>
+            </a:endParaRPr>
           </a:p>
         </p:txBody>
       </p:sp>
     </p:spTree>
-    <p:extLst>
-      <p:ext uri="{BB962C8B-B14F-4D97-AF65-F5344CB8AC3E}">
-        <p14:creationId xmlns:p14="http://schemas.microsoft.com/office/powerpoint/2010/main" val="1993237029"/>
-      </p:ext>
-    </p:extLst>
   </p:cSld>
   <p:clrMapOvr>
     <a:masterClrMapping/>
@@ -11464,13 +10742,7 @@
       </p:grpSpPr>
       <p:sp>
         <p:nvSpPr>
-          <p:cNvPr id="2" name="Title 1">
-            <a:extLst>
-              <a:ext uri="{FF2B5EF4-FFF2-40B4-BE49-F238E27FC236}">
-                <a16:creationId xmlns:a16="http://schemas.microsoft.com/office/drawing/2014/main" id="{51353DB3-FB86-4452-A4FB-E7F4BEA62856}"/>
-              </a:ext>
-            </a:extLst>
-          </p:cNvPr>
+          <p:cNvPr id="2" name="Title 1"/>
           <p:cNvSpPr>
             <a:spLocks noGrp="1"/>
           </p:cNvSpPr>
@@ -11494,9 +10766,9 @@
                 <a:solidFill>
                   <a:srgbClr val="704EA6"/>
                 </a:solidFill>
-                <a:latin typeface="Calibri" pitchFamily="34" charset="0"/>
-                <a:ea typeface="Calibri" pitchFamily="34" charset="-122"/>
-                <a:cs typeface="Calibri" pitchFamily="34" charset="-120"/>
+                <a:latin typeface="Calibri" panose="020F0502020204030204" pitchFamily="34" charset="0"/>
+                <a:ea typeface="Calibri" panose="020F0502020204030204" pitchFamily="34" charset="-122"/>
+                <a:cs typeface="Calibri" panose="020F0502020204030204" pitchFamily="34" charset="-120"/>
               </a:rPr>
               <a:t>What’s next</a:t>
             </a:r>
@@ -11510,13 +10782,7 @@
       </p:sp>
       <p:sp>
         <p:nvSpPr>
-          <p:cNvPr id="4" name="Rounded Rectangle 4">
-            <a:extLst>
-              <a:ext uri="{FF2B5EF4-FFF2-40B4-BE49-F238E27FC236}">
-                <a16:creationId xmlns:a16="http://schemas.microsoft.com/office/drawing/2014/main" id="{3F3BAA80-F2ED-07FF-2A9B-9940C7F602B4}"/>
-              </a:ext>
-            </a:extLst>
-          </p:cNvPr>
+          <p:cNvPr id="4" name="Rounded Rectangle 4"/>
           <p:cNvSpPr/>
           <p:nvPr/>
         </p:nvSpPr>
@@ -11556,19 +10822,12 @@
           <a:lstStyle/>
           <a:p>
             <a:pPr algn="ctr"/>
-            <a:endParaRPr/>
-          </a:p>
-        </p:txBody>
-      </p:sp>
-      <p:sp>
-        <p:nvSpPr>
-          <p:cNvPr id="6" name="Oval 5">
-            <a:extLst>
-              <a:ext uri="{FF2B5EF4-FFF2-40B4-BE49-F238E27FC236}">
-                <a16:creationId xmlns:a16="http://schemas.microsoft.com/office/drawing/2014/main" id="{FD6CD0DB-5535-DC1B-2266-404A9EF3D9D2}"/>
-              </a:ext>
-            </a:extLst>
-          </p:cNvPr>
+          </a:p>
+        </p:txBody>
+      </p:sp>
+      <p:sp>
+        <p:nvSpPr>
+          <p:cNvPr id="6" name="Oval 5"/>
           <p:cNvSpPr/>
           <p:nvPr/>
         </p:nvSpPr>
@@ -11606,19 +10865,12 @@
           <a:lstStyle/>
           <a:p>
             <a:pPr algn="ctr"/>
-            <a:endParaRPr/>
-          </a:p>
-        </p:txBody>
-      </p:sp>
-      <p:sp>
-        <p:nvSpPr>
-          <p:cNvPr id="8" name="TextBox 7">
-            <a:extLst>
-              <a:ext uri="{FF2B5EF4-FFF2-40B4-BE49-F238E27FC236}">
-                <a16:creationId xmlns:a16="http://schemas.microsoft.com/office/drawing/2014/main" id="{90132D85-4BE6-CBB6-CBA8-19DD2F180C51}"/>
-              </a:ext>
-            </a:extLst>
-          </p:cNvPr>
+          </a:p>
+        </p:txBody>
+      </p:sp>
+      <p:sp>
+        <p:nvSpPr>
+          <p:cNvPr id="8" name="TextBox 7"/>
           <p:cNvSpPr txBox="1"/>
           <p:nvPr/>
         </p:nvSpPr>
@@ -11648,18 +10900,18 @@
               </a:rPr>
               <a:t>01</a:t>
             </a:r>
-          </a:p>
-        </p:txBody>
-      </p:sp>
-      <p:sp>
-        <p:nvSpPr>
-          <p:cNvPr id="10" name="TextBox 9">
-            <a:extLst>
-              <a:ext uri="{FF2B5EF4-FFF2-40B4-BE49-F238E27FC236}">
-                <a16:creationId xmlns:a16="http://schemas.microsoft.com/office/drawing/2014/main" id="{CC597937-5832-B80A-519D-6450345656BB}"/>
-              </a:ext>
-            </a:extLst>
-          </p:cNvPr>
+            <a:endParaRPr sz="1100" b="1" dirty="0">
+              <a:solidFill>
+                <a:srgbClr val="FFFFFF"/>
+              </a:solidFill>
+              <a:latin typeface="Aptos"/>
+            </a:endParaRPr>
+          </a:p>
+        </p:txBody>
+      </p:sp>
+      <p:sp>
+        <p:nvSpPr>
+          <p:cNvPr id="10" name="TextBox 9"/>
           <p:cNvSpPr txBox="1"/>
           <p:nvPr/>
         </p:nvSpPr>
@@ -11690,18 +10942,18 @@
               <a:t>WORKSPACE
 CONNECTION</a:t>
             </a:r>
-          </a:p>
-        </p:txBody>
-      </p:sp>
-      <p:sp>
-        <p:nvSpPr>
-          <p:cNvPr id="12" name="Rectangle 11">
-            <a:extLst>
-              <a:ext uri="{FF2B5EF4-FFF2-40B4-BE49-F238E27FC236}">
-                <a16:creationId xmlns:a16="http://schemas.microsoft.com/office/drawing/2014/main" id="{589E74F5-93E2-B627-9D1A-539517F332D8}"/>
-              </a:ext>
-            </a:extLst>
-          </p:cNvPr>
+            <a:endParaRPr sz="1800" b="1">
+              <a:solidFill>
+                <a:srgbClr val="181837"/>
+              </a:solidFill>
+              <a:latin typeface="Aptos"/>
+            </a:endParaRPr>
+          </a:p>
+        </p:txBody>
+      </p:sp>
+      <p:sp>
+        <p:nvSpPr>
+          <p:cNvPr id="12" name="Rectangle 11"/>
           <p:cNvSpPr/>
           <p:nvPr/>
         </p:nvSpPr>
@@ -11739,19 +10991,12 @@
           <a:lstStyle/>
           <a:p>
             <a:pPr algn="ctr"/>
-            <a:endParaRPr/>
-          </a:p>
-        </p:txBody>
-      </p:sp>
-      <p:sp>
-        <p:nvSpPr>
-          <p:cNvPr id="14" name="TextBox 13">
-            <a:extLst>
-              <a:ext uri="{FF2B5EF4-FFF2-40B4-BE49-F238E27FC236}">
-                <a16:creationId xmlns:a16="http://schemas.microsoft.com/office/drawing/2014/main" id="{91F91FC0-4A50-39E0-4445-5C2EC69A5FBB}"/>
-              </a:ext>
-            </a:extLst>
-          </p:cNvPr>
+          </a:p>
+        </p:txBody>
+      </p:sp>
+      <p:sp>
+        <p:nvSpPr>
+          <p:cNvPr id="14" name="TextBox 13"/>
           <p:cNvSpPr txBox="1"/>
           <p:nvPr/>
         </p:nvSpPr>
@@ -11778,18 +11023,15 @@
               </a:rPr>
               <a:t>Connect Gmail, Drive &amp; Tasks to bring everyday work context directly into KAIZEN.</a:t>
             </a:r>
-          </a:p>
-        </p:txBody>
-      </p:sp>
-      <p:sp>
-        <p:nvSpPr>
-          <p:cNvPr id="16" name="Rounded Rectangle 10">
-            <a:extLst>
-              <a:ext uri="{FF2B5EF4-FFF2-40B4-BE49-F238E27FC236}">
-                <a16:creationId xmlns:a16="http://schemas.microsoft.com/office/drawing/2014/main" id="{E8B54005-63E5-0AD3-784A-834A6174ACCA}"/>
-              </a:ext>
-            </a:extLst>
-          </p:cNvPr>
+            <a:endParaRPr sz="1400" b="0" dirty="0">
+              <a:latin typeface="Aptos"/>
+            </a:endParaRPr>
+          </a:p>
+        </p:txBody>
+      </p:sp>
+      <p:sp>
+        <p:nvSpPr>
+          <p:cNvPr id="16" name="Rounded Rectangle 10"/>
           <p:cNvSpPr/>
           <p:nvPr/>
         </p:nvSpPr>
@@ -11829,19 +11071,12 @@
           <a:lstStyle/>
           <a:p>
             <a:pPr algn="ctr"/>
-            <a:endParaRPr/>
-          </a:p>
-        </p:txBody>
-      </p:sp>
-      <p:sp>
-        <p:nvSpPr>
-          <p:cNvPr id="18" name="Oval 17">
-            <a:extLst>
-              <a:ext uri="{FF2B5EF4-FFF2-40B4-BE49-F238E27FC236}">
-                <a16:creationId xmlns:a16="http://schemas.microsoft.com/office/drawing/2014/main" id="{631B426F-65ED-013A-F7BC-0CFFDC81C11E}"/>
-              </a:ext>
-            </a:extLst>
-          </p:cNvPr>
+          </a:p>
+        </p:txBody>
+      </p:sp>
+      <p:sp>
+        <p:nvSpPr>
+          <p:cNvPr id="18" name="Oval 17"/>
           <p:cNvSpPr/>
           <p:nvPr/>
         </p:nvSpPr>
@@ -11879,19 +11114,12 @@
           <a:lstStyle/>
           <a:p>
             <a:pPr algn="ctr"/>
-            <a:endParaRPr/>
-          </a:p>
-        </p:txBody>
-      </p:sp>
-      <p:sp>
-        <p:nvSpPr>
-          <p:cNvPr id="20" name="TextBox 19">
-            <a:extLst>
-              <a:ext uri="{FF2B5EF4-FFF2-40B4-BE49-F238E27FC236}">
-                <a16:creationId xmlns:a16="http://schemas.microsoft.com/office/drawing/2014/main" id="{7DB274B8-1B17-7626-5828-9C39CA640495}"/>
-              </a:ext>
-            </a:extLst>
-          </p:cNvPr>
+          </a:p>
+        </p:txBody>
+      </p:sp>
+      <p:sp>
+        <p:nvSpPr>
+          <p:cNvPr id="20" name="TextBox 19"/>
           <p:cNvSpPr txBox="1"/>
           <p:nvPr/>
         </p:nvSpPr>
@@ -11921,18 +11149,18 @@
               </a:rPr>
               <a:t>02</a:t>
             </a:r>
-          </a:p>
-        </p:txBody>
-      </p:sp>
-      <p:sp>
-        <p:nvSpPr>
-          <p:cNvPr id="22" name="TextBox 21">
-            <a:extLst>
-              <a:ext uri="{FF2B5EF4-FFF2-40B4-BE49-F238E27FC236}">
-                <a16:creationId xmlns:a16="http://schemas.microsoft.com/office/drawing/2014/main" id="{011CEEFC-4066-84A6-7073-5B8D9FB00C6F}"/>
-              </a:ext>
-            </a:extLst>
-          </p:cNvPr>
+            <a:endParaRPr sz="1100" b="1" dirty="0">
+              <a:solidFill>
+                <a:srgbClr val="FFFFFF"/>
+              </a:solidFill>
+              <a:latin typeface="Aptos"/>
+            </a:endParaRPr>
+          </a:p>
+        </p:txBody>
+      </p:sp>
+      <p:sp>
+        <p:nvSpPr>
+          <p:cNvPr id="22" name="TextBox 21"/>
           <p:cNvSpPr txBox="1"/>
           <p:nvPr/>
         </p:nvSpPr>
@@ -11962,18 +11190,18 @@
               </a:rPr>
               <a:t>LOCAL BRAIN</a:t>
             </a:r>
-          </a:p>
-        </p:txBody>
-      </p:sp>
-      <p:sp>
-        <p:nvSpPr>
-          <p:cNvPr id="24" name="Rectangle 23">
-            <a:extLst>
-              <a:ext uri="{FF2B5EF4-FFF2-40B4-BE49-F238E27FC236}">
-                <a16:creationId xmlns:a16="http://schemas.microsoft.com/office/drawing/2014/main" id="{FBFAF3A7-329A-22C5-207C-07CDFA006102}"/>
-              </a:ext>
-            </a:extLst>
-          </p:cNvPr>
+            <a:endParaRPr sz="1800" b="1">
+              <a:solidFill>
+                <a:srgbClr val="181837"/>
+              </a:solidFill>
+              <a:latin typeface="Aptos"/>
+            </a:endParaRPr>
+          </a:p>
+        </p:txBody>
+      </p:sp>
+      <p:sp>
+        <p:nvSpPr>
+          <p:cNvPr id="24" name="Rectangle 23"/>
           <p:cNvSpPr/>
           <p:nvPr/>
         </p:nvSpPr>
@@ -12011,19 +11239,12 @@
           <a:lstStyle/>
           <a:p>
             <a:pPr algn="ctr"/>
-            <a:endParaRPr/>
-          </a:p>
-        </p:txBody>
-      </p:sp>
-      <p:sp>
-        <p:nvSpPr>
-          <p:cNvPr id="26" name="TextBox 25">
-            <a:extLst>
-              <a:ext uri="{FF2B5EF4-FFF2-40B4-BE49-F238E27FC236}">
-                <a16:creationId xmlns:a16="http://schemas.microsoft.com/office/drawing/2014/main" id="{0EA380E7-1F26-8ED3-7783-1D3B55494A8B}"/>
-              </a:ext>
-            </a:extLst>
-          </p:cNvPr>
+          </a:p>
+        </p:txBody>
+      </p:sp>
+      <p:sp>
+        <p:nvSpPr>
+          <p:cNvPr id="26" name="TextBox 25"/>
           <p:cNvSpPr txBox="1"/>
           <p:nvPr/>
         </p:nvSpPr>
@@ -12053,18 +11274,18 @@
               </a:rPr>
               <a:t>Obsidian-powered note taking for capturing, organizing and recalling knowledge locally.</a:t>
             </a:r>
-          </a:p>
-        </p:txBody>
-      </p:sp>
-      <p:sp>
-        <p:nvSpPr>
-          <p:cNvPr id="28" name="Rounded Rectangle 16">
-            <a:extLst>
-              <a:ext uri="{FF2B5EF4-FFF2-40B4-BE49-F238E27FC236}">
-                <a16:creationId xmlns:a16="http://schemas.microsoft.com/office/drawing/2014/main" id="{2307BBA5-7DED-9055-7F88-AA6F7CAAF70D}"/>
-              </a:ext>
-            </a:extLst>
-          </p:cNvPr>
+            <a:endParaRPr sz="1400" b="0" dirty="0">
+              <a:solidFill>
+                <a:srgbClr val="232337"/>
+              </a:solidFill>
+              <a:latin typeface="Aptos"/>
+            </a:endParaRPr>
+          </a:p>
+        </p:txBody>
+      </p:sp>
+      <p:sp>
+        <p:nvSpPr>
+          <p:cNvPr id="28" name="Rounded Rectangle 16"/>
           <p:cNvSpPr/>
           <p:nvPr/>
         </p:nvSpPr>
@@ -12104,19 +11325,12 @@
           <a:lstStyle/>
           <a:p>
             <a:pPr algn="ctr"/>
-            <a:endParaRPr/>
-          </a:p>
-        </p:txBody>
-      </p:sp>
-      <p:sp>
-        <p:nvSpPr>
-          <p:cNvPr id="30" name="Oval 29">
-            <a:extLst>
-              <a:ext uri="{FF2B5EF4-FFF2-40B4-BE49-F238E27FC236}">
-                <a16:creationId xmlns:a16="http://schemas.microsoft.com/office/drawing/2014/main" id="{8A6CECA1-096F-E24D-F904-6ADFBB7424F6}"/>
-              </a:ext>
-            </a:extLst>
-          </p:cNvPr>
+          </a:p>
+        </p:txBody>
+      </p:sp>
+      <p:sp>
+        <p:nvSpPr>
+          <p:cNvPr id="30" name="Oval 29"/>
           <p:cNvSpPr/>
           <p:nvPr/>
         </p:nvSpPr>
@@ -12154,19 +11368,12 @@
           <a:lstStyle/>
           <a:p>
             <a:pPr algn="ctr"/>
-            <a:endParaRPr/>
-          </a:p>
-        </p:txBody>
-      </p:sp>
-      <p:sp>
-        <p:nvSpPr>
-          <p:cNvPr id="32" name="TextBox 31">
-            <a:extLst>
-              <a:ext uri="{FF2B5EF4-FFF2-40B4-BE49-F238E27FC236}">
-                <a16:creationId xmlns:a16="http://schemas.microsoft.com/office/drawing/2014/main" id="{138F8F21-3A26-1E53-1042-A727276FF50E}"/>
-              </a:ext>
-            </a:extLst>
-          </p:cNvPr>
+          </a:p>
+        </p:txBody>
+      </p:sp>
+      <p:sp>
+        <p:nvSpPr>
+          <p:cNvPr id="32" name="TextBox 31"/>
           <p:cNvSpPr txBox="1"/>
           <p:nvPr/>
         </p:nvSpPr>
@@ -12196,18 +11403,18 @@
               </a:rPr>
               <a:t>03</a:t>
             </a:r>
-          </a:p>
-        </p:txBody>
-      </p:sp>
-      <p:sp>
-        <p:nvSpPr>
-          <p:cNvPr id="34" name="TextBox 33">
-            <a:extLst>
-              <a:ext uri="{FF2B5EF4-FFF2-40B4-BE49-F238E27FC236}">
-                <a16:creationId xmlns:a16="http://schemas.microsoft.com/office/drawing/2014/main" id="{EAD1C97C-F017-2DFE-A7B7-37051131FA84}"/>
-              </a:ext>
-            </a:extLst>
-          </p:cNvPr>
+            <a:endParaRPr sz="1100" b="1" dirty="0">
+              <a:solidFill>
+                <a:srgbClr val="FFFFFF"/>
+              </a:solidFill>
+              <a:latin typeface="Aptos"/>
+            </a:endParaRPr>
+          </a:p>
+        </p:txBody>
+      </p:sp>
+      <p:sp>
+        <p:nvSpPr>
+          <p:cNvPr id="34" name="TextBox 33"/>
           <p:cNvSpPr txBox="1"/>
           <p:nvPr/>
         </p:nvSpPr>
@@ -12237,18 +11444,18 @@
               </a:rPr>
               <a:t>SKILL LEARNING</a:t>
             </a:r>
-          </a:p>
-        </p:txBody>
-      </p:sp>
-      <p:sp>
-        <p:nvSpPr>
-          <p:cNvPr id="36" name="Rectangle 35">
-            <a:extLst>
-              <a:ext uri="{FF2B5EF4-FFF2-40B4-BE49-F238E27FC236}">
-                <a16:creationId xmlns:a16="http://schemas.microsoft.com/office/drawing/2014/main" id="{A99FBD4E-3276-5987-D6E5-09B840CB02AD}"/>
-              </a:ext>
-            </a:extLst>
-          </p:cNvPr>
+            <a:endParaRPr sz="1800" b="1">
+              <a:solidFill>
+                <a:srgbClr val="181837"/>
+              </a:solidFill>
+              <a:latin typeface="Aptos"/>
+            </a:endParaRPr>
+          </a:p>
+        </p:txBody>
+      </p:sp>
+      <p:sp>
+        <p:nvSpPr>
+          <p:cNvPr id="36" name="Rectangle 35"/>
           <p:cNvSpPr/>
           <p:nvPr/>
         </p:nvSpPr>
@@ -12286,19 +11493,12 @@
           <a:lstStyle/>
           <a:p>
             <a:pPr algn="ctr"/>
-            <a:endParaRPr/>
-          </a:p>
-        </p:txBody>
-      </p:sp>
-      <p:sp>
-        <p:nvSpPr>
-          <p:cNvPr id="38" name="TextBox 37">
-            <a:extLst>
-              <a:ext uri="{FF2B5EF4-FFF2-40B4-BE49-F238E27FC236}">
-                <a16:creationId xmlns:a16="http://schemas.microsoft.com/office/drawing/2014/main" id="{20D5F0CB-F83A-1B7E-8E3C-4BED54BB62F2}"/>
-              </a:ext>
-            </a:extLst>
-          </p:cNvPr>
+          </a:p>
+        </p:txBody>
+      </p:sp>
+      <p:sp>
+        <p:nvSpPr>
+          <p:cNvPr id="38" name="TextBox 37"/>
           <p:cNvSpPr txBox="1"/>
           <p:nvPr/>
         </p:nvSpPr>
@@ -12328,18 +11528,18 @@
               </a:rPr>
               <a:t>Learn from completed tasks and convert successful workflows into reusable skills.</a:t>
             </a:r>
-          </a:p>
-        </p:txBody>
-      </p:sp>
-      <p:sp>
-        <p:nvSpPr>
-          <p:cNvPr id="40" name="Rounded Rectangle 22">
-            <a:extLst>
-              <a:ext uri="{FF2B5EF4-FFF2-40B4-BE49-F238E27FC236}">
-                <a16:creationId xmlns:a16="http://schemas.microsoft.com/office/drawing/2014/main" id="{CF258365-B453-2BA1-7FFF-BADD87C470F4}"/>
-              </a:ext>
-            </a:extLst>
-          </p:cNvPr>
+            <a:endParaRPr sz="1400" b="0" dirty="0">
+              <a:solidFill>
+                <a:srgbClr val="232337"/>
+              </a:solidFill>
+              <a:latin typeface="Aptos"/>
+            </a:endParaRPr>
+          </a:p>
+        </p:txBody>
+      </p:sp>
+      <p:sp>
+        <p:nvSpPr>
+          <p:cNvPr id="40" name="Rounded Rectangle 22"/>
           <p:cNvSpPr/>
           <p:nvPr/>
         </p:nvSpPr>
@@ -12379,19 +11579,12 @@
           <a:lstStyle/>
           <a:p>
             <a:pPr algn="ctr"/>
-            <a:endParaRPr/>
-          </a:p>
-        </p:txBody>
-      </p:sp>
-      <p:sp>
-        <p:nvSpPr>
-          <p:cNvPr id="42" name="TextBox 41">
-            <a:extLst>
-              <a:ext uri="{FF2B5EF4-FFF2-40B4-BE49-F238E27FC236}">
-                <a16:creationId xmlns:a16="http://schemas.microsoft.com/office/drawing/2014/main" id="{0C3D4D22-3742-28B0-2F7D-436D89CCBADE}"/>
-              </a:ext>
-            </a:extLst>
-          </p:cNvPr>
+          </a:p>
+        </p:txBody>
+      </p:sp>
+      <p:sp>
+        <p:nvSpPr>
+          <p:cNvPr id="42" name="TextBox 41"/>
           <p:cNvSpPr txBox="1"/>
           <p:nvPr/>
         </p:nvSpPr>
@@ -12421,18 +11614,18 @@
               </a:rPr>
               <a:t>OUR VISION</a:t>
             </a:r>
-          </a:p>
-        </p:txBody>
-      </p:sp>
-      <p:sp>
-        <p:nvSpPr>
-          <p:cNvPr id="44" name="TextBox 43">
-            <a:extLst>
-              <a:ext uri="{FF2B5EF4-FFF2-40B4-BE49-F238E27FC236}">
-                <a16:creationId xmlns:a16="http://schemas.microsoft.com/office/drawing/2014/main" id="{DE7F53EE-CFD0-7F5C-978E-0CE251B28E2B}"/>
-              </a:ext>
-            </a:extLst>
-          </p:cNvPr>
+            <a:endParaRPr b="1" dirty="0">
+              <a:solidFill>
+                <a:srgbClr val="6B3FBE"/>
+              </a:solidFill>
+              <a:latin typeface="Aptos"/>
+            </a:endParaRPr>
+          </a:p>
+        </p:txBody>
+      </p:sp>
+      <p:sp>
+        <p:nvSpPr>
+          <p:cNvPr id="44" name="TextBox 43"/>
           <p:cNvSpPr txBox="1"/>
           <p:nvPr/>
         </p:nvSpPr>
@@ -12462,15 +11655,16 @@
               </a:rPr>
               <a:t>CONNECT  →  REMEMBER  →  LEARN  →  EVOLVE</a:t>
             </a:r>
+            <a:endParaRPr sz="1600" b="1" dirty="0">
+              <a:solidFill>
+                <a:srgbClr val="181837"/>
+              </a:solidFill>
+              <a:latin typeface="Aptos"/>
+            </a:endParaRPr>
           </a:p>
         </p:txBody>
       </p:sp>
     </p:spTree>
-    <p:extLst>
-      <p:ext uri="{BB962C8B-B14F-4D97-AF65-F5344CB8AC3E}">
-        <p14:creationId xmlns:p14="http://schemas.microsoft.com/office/powerpoint/2010/main" val="3985914682"/>
-      </p:ext>
-    </p:extLst>
   </p:cSld>
   <p:clrMapOvr>
     <a:masterClrMapping/>
@@ -12521,7 +11715,7 @@
     </a:clrScheme>
     <a:fontScheme name="Office">
       <a:majorFont>
-        <a:latin typeface="Calibri Light" panose="020F0302020204030204"/>
+        <a:latin typeface="Calibri Light"/>
         <a:ea typeface=""/>
         <a:cs typeface=""/>
         <a:font script="Jpan" typeface="游ゴシック Light"/>
@@ -12554,26 +11748,9 @@
         <a:font script="Viet" typeface="Times New Roman"/>
         <a:font script="Uigh" typeface="Microsoft Uighur"/>
         <a:font script="Geor" typeface="Sylfaen"/>
-        <a:font script="Armn" typeface="Arial"/>
-        <a:font script="Bugi" typeface="Leelawadee UI"/>
-        <a:font script="Bopo" typeface="Microsoft JhengHei"/>
-        <a:font script="Java" typeface="Javanese Text"/>
-        <a:font script="Lisu" typeface="Segoe UI"/>
-        <a:font script="Mymr" typeface="Myanmar Text"/>
-        <a:font script="Nkoo" typeface="Ebrima"/>
-        <a:font script="Olck" typeface="Nirmala UI"/>
-        <a:font script="Osma" typeface="Ebrima"/>
-        <a:font script="Phag" typeface="Phagspa"/>
-        <a:font script="Syrn" typeface="Estrangelo Edessa"/>
-        <a:font script="Syrj" typeface="Estrangelo Edessa"/>
-        <a:font script="Syre" typeface="Estrangelo Edessa"/>
-        <a:font script="Sora" typeface="Nirmala UI"/>
-        <a:font script="Tale" typeface="Microsoft Tai Le"/>
-        <a:font script="Talu" typeface="Microsoft New Tai Lue"/>
-        <a:font script="Tfng" typeface="Ebrima"/>
       </a:majorFont>
       <a:minorFont>
-        <a:latin typeface="Calibri" panose="020F0502020204030204"/>
+        <a:latin typeface="Calibri"/>
         <a:ea typeface=""/>
         <a:cs typeface=""/>
         <a:font script="Jpan" typeface="游ゴシック"/>
@@ -12606,23 +11783,6 @@
         <a:font script="Viet" typeface="Arial"/>
         <a:font script="Uigh" typeface="Microsoft Uighur"/>
         <a:font script="Geor" typeface="Sylfaen"/>
-        <a:font script="Armn" typeface="Arial"/>
-        <a:font script="Bugi" typeface="Leelawadee UI"/>
-        <a:font script="Bopo" typeface="Microsoft JhengHei"/>
-        <a:font script="Java" typeface="Javanese Text"/>
-        <a:font script="Lisu" typeface="Segoe UI"/>
-        <a:font script="Mymr" typeface="Myanmar Text"/>
-        <a:font script="Nkoo" typeface="Ebrima"/>
-        <a:font script="Olck" typeface="Nirmala UI"/>
-        <a:font script="Osma" typeface="Ebrima"/>
-        <a:font script="Phag" typeface="Phagspa"/>
-        <a:font script="Syrn" typeface="Estrangelo Edessa"/>
-        <a:font script="Syrj" typeface="Estrangelo Edessa"/>
-        <a:font script="Syre" typeface="Estrangelo Edessa"/>
-        <a:font script="Sora" typeface="Nirmala UI"/>
-        <a:font script="Tale" typeface="Microsoft Tai Le"/>
-        <a:font script="Talu" typeface="Microsoft New Tai Lue"/>
-        <a:font script="Tfng" typeface="Ebrima"/>
       </a:minorFont>
     </a:fontScheme>
     <a:fmtScheme name="Office">
@@ -12763,8 +11923,6 @@
       </a:bgFillStyleLst>
     </a:fmtScheme>
   </a:themeElements>
-  <a:objectDefaults/>
-  <a:extraClrSchemeLst/>
   <a:extLst>
     <a:ext uri="{05A4C25C-085E-4340-85A3-A5531E510DB2}">
       <thm15:themeFamily xmlns:thm15="http://schemas.microsoft.com/office/thememl/2012/main" name="Office Theme" id="{62F939B6-93AF-4DB8-9C6B-D6C7DFDC589F}" vid="{4A3C46E8-61CC-4603-A589-7422A47A8E4A}"/>
@@ -12816,7 +11974,7 @@
     </a:clrScheme>
     <a:fontScheme name="Office">
       <a:majorFont>
-        <a:latin typeface="Calibri Light" panose="020F0302020204030204"/>
+        <a:latin typeface="Calibri Light"/>
         <a:ea typeface=""/>
         <a:cs typeface=""/>
         <a:font script="Jpan" typeface="游ゴシック Light"/>
@@ -12849,26 +12007,9 @@
         <a:font script="Viet" typeface="Times New Roman"/>
         <a:font script="Uigh" typeface="Microsoft Uighur"/>
         <a:font script="Geor" typeface="Sylfaen"/>
-        <a:font script="Armn" typeface="Arial"/>
-        <a:font script="Bugi" typeface="Leelawadee UI"/>
-        <a:font script="Bopo" typeface="Microsoft JhengHei"/>
-        <a:font script="Java" typeface="Javanese Text"/>
-        <a:font script="Lisu" typeface="Segoe UI"/>
-        <a:font script="Mymr" typeface="Myanmar Text"/>
-        <a:font script="Nkoo" typeface="Ebrima"/>
-        <a:font script="Olck" typeface="Nirmala UI"/>
-        <a:font script="Osma" typeface="Ebrima"/>
-        <a:font script="Phag" typeface="Phagspa"/>
-        <a:font script="Syrn" typeface="Estrangelo Edessa"/>
-        <a:font script="Syrj" typeface="Estrangelo Edessa"/>
-        <a:font script="Syre" typeface="Estrangelo Edessa"/>
-        <a:font script="Sora" typeface="Nirmala UI"/>
-        <a:font script="Tale" typeface="Microsoft Tai Le"/>
-        <a:font script="Talu" typeface="Microsoft New Tai Lue"/>
-        <a:font script="Tfng" typeface="Ebrima"/>
       </a:majorFont>
       <a:minorFont>
-        <a:latin typeface="Calibri" panose="020F0502020204030204"/>
+        <a:latin typeface="Calibri"/>
         <a:ea typeface=""/>
         <a:cs typeface=""/>
         <a:font script="Jpan" typeface="游ゴシック"/>
@@ -12901,23 +12042,6 @@
         <a:font script="Viet" typeface="Arial"/>
         <a:font script="Uigh" typeface="Microsoft Uighur"/>
         <a:font script="Geor" typeface="Sylfaen"/>
-        <a:font script="Armn" typeface="Arial"/>
-        <a:font script="Bugi" typeface="Leelawadee UI"/>
-        <a:font script="Bopo" typeface="Microsoft JhengHei"/>
-        <a:font script="Java" typeface="Javanese Text"/>
-        <a:font script="Lisu" typeface="Segoe UI"/>
-        <a:font script="Mymr" typeface="Myanmar Text"/>
-        <a:font script="Nkoo" typeface="Ebrima"/>
-        <a:font script="Olck" typeface="Nirmala UI"/>
-        <a:font script="Osma" typeface="Ebrima"/>
-        <a:font script="Phag" typeface="Phagspa"/>
-        <a:font script="Syrn" typeface="Estrangelo Edessa"/>
-        <a:font script="Syrj" typeface="Estrangelo Edessa"/>
-        <a:font script="Syre" typeface="Estrangelo Edessa"/>
-        <a:font script="Sora" typeface="Nirmala UI"/>
-        <a:font script="Tale" typeface="Microsoft Tai Le"/>
-        <a:font script="Talu" typeface="Microsoft New Tai Lue"/>
-        <a:font script="Tfng" typeface="Ebrima"/>
       </a:minorFont>
     </a:fontScheme>
     <a:fmtScheme name="Office">
@@ -13058,8 +12182,6 @@
       </a:bgFillStyleLst>
     </a:fmtScheme>
   </a:themeElements>
-  <a:objectDefaults/>
-  <a:extraClrSchemeLst/>
   <a:extLst>
     <a:ext uri="{05A4C25C-085E-4340-85A3-A5531E510DB2}">
       <thm15:themeFamily xmlns:thm15="http://schemas.microsoft.com/office/thememl/2012/main" name="Office Theme" id="{62F939B6-93AF-4DB8-9C6B-D6C7DFDC589F}" vid="{4A3C46E8-61CC-4603-A589-7422A47A8E4A}"/>
